--- a/Burrows-Wheeler transformacija i FM index.pptx
+++ b/Burrows-Wheeler transformacija i FM index.pptx
@@ -5,14 +5,20 @@
     <p:sldMasterId id="2147483648" r:id="rId4"/>
   </p:sldMasterIdLst>
   <p:notesMasterIdLst>
-    <p:notesMasterId r:id="rId10"/>
+    <p:notesMasterId r:id="rId16"/>
   </p:notesMasterIdLst>
   <p:sldIdLst>
     <p:sldId id="256" r:id="rId5"/>
     <p:sldId id="257" r:id="rId6"/>
     <p:sldId id="258" r:id="rId7"/>
     <p:sldId id="260" r:id="rId8"/>
-    <p:sldId id="261" r:id="rId9"/>
+    <p:sldId id="269" r:id="rId9"/>
+    <p:sldId id="262" r:id="rId10"/>
+    <p:sldId id="266" r:id="rId11"/>
+    <p:sldId id="264" r:id="rId12"/>
+    <p:sldId id="265" r:id="rId13"/>
+    <p:sldId id="267" r:id="rId14"/>
+    <p:sldId id="268" r:id="rId15"/>
   </p:sldIdLst>
   <p:sldSz cx="12192000" cy="6858000"/>
   <p:notesSz cx="6858000" cy="9144000"/>
@@ -201,7 +207,7 @@
           <a:p>
             <a:fld id="{AC73F182-31D9-48C6-AA78-B271D95C0E92}" type="datetimeFigureOut">
               <a:rPr lang="en-US" smtClean="0"/>
-              <a:t>9/20/2025</a:t>
+              <a:t>9/25/2025</a:t>
             </a:fld>
             <a:endParaRPr lang="en-US"/>
           </a:p>
@@ -1236,6 +1242,90 @@
 </p:notes>
 </file>
 
+<file path=ppt/notesSlides/notesSlide2.xml><?xml version="1.0" encoding="utf-8"?>
+<p:notes xmlns:a="http://schemas.openxmlformats.org/drawingml/2006/main" xmlns:r="http://schemas.openxmlformats.org/officeDocument/2006/relationships" xmlns:p="http://schemas.openxmlformats.org/presentationml/2006/main">
+  <p:cSld>
+    <p:spTree>
+      <p:nvGrpSpPr>
+        <p:cNvPr id="1" name=""/>
+        <p:cNvGrpSpPr/>
+        <p:nvPr/>
+      </p:nvGrpSpPr>
+      <p:grpSpPr>
+        <a:xfrm>
+          <a:off x="0" y="0"/>
+          <a:ext cx="0" cy="0"/>
+          <a:chOff x="0" y="0"/>
+          <a:chExt cx="0" cy="0"/>
+        </a:xfrm>
+      </p:grpSpPr>
+      <p:sp>
+        <p:nvSpPr>
+          <p:cNvPr id="2" name="Slide Image Placeholder 1"/>
+          <p:cNvSpPr>
+            <a:spLocks noGrp="1" noRot="1" noChangeAspect="1"/>
+          </p:cNvSpPr>
+          <p:nvPr>
+            <p:ph type="sldImg"/>
+          </p:nvPr>
+        </p:nvSpPr>
+        <p:spPr/>
+      </p:sp>
+      <p:sp>
+        <p:nvSpPr>
+          <p:cNvPr id="3" name="Notes Placeholder 2"/>
+          <p:cNvSpPr>
+            <a:spLocks noGrp="1"/>
+          </p:cNvSpPr>
+          <p:nvPr>
+            <p:ph type="body" idx="1"/>
+          </p:nvPr>
+        </p:nvSpPr>
+        <p:spPr/>
+        <p:txBody>
+          <a:bodyPr/>
+          <a:lstStyle/>
+          <a:p>
+            <a:endParaRPr lang="en-US" dirty="0"/>
+          </a:p>
+        </p:txBody>
+      </p:sp>
+      <p:sp>
+        <p:nvSpPr>
+          <p:cNvPr id="4" name="Slide Number Placeholder 3"/>
+          <p:cNvSpPr>
+            <a:spLocks noGrp="1"/>
+          </p:cNvSpPr>
+          <p:nvPr>
+            <p:ph type="sldNum" sz="quarter" idx="5"/>
+          </p:nvPr>
+        </p:nvSpPr>
+        <p:spPr/>
+        <p:txBody>
+          <a:bodyPr/>
+          <a:lstStyle/>
+          <a:p>
+            <a:fld id="{8D204D62-BDE0-416B-B808-718FCF5751A1}" type="slidenum">
+              <a:rPr lang="en-US" smtClean="0"/>
+              <a:t>5</a:t>
+            </a:fld>
+            <a:endParaRPr lang="en-US"/>
+          </a:p>
+        </p:txBody>
+      </p:sp>
+    </p:spTree>
+    <p:extLst>
+      <p:ext uri="{BB962C8B-B14F-4D97-AF65-F5344CB8AC3E}">
+        <p14:creationId xmlns:p14="http://schemas.microsoft.com/office/powerpoint/2010/main" val="1077187221"/>
+      </p:ext>
+    </p:extLst>
+  </p:cSld>
+  <p:clrMapOvr>
+    <a:masterClrMapping/>
+  </p:clrMapOvr>
+</p:notes>
+</file>
+
 <file path=ppt/slideLayouts/slideLayout1.xml><?xml version="1.0" encoding="utf-8"?>
 <p:sldLayout xmlns:a="http://schemas.openxmlformats.org/drawingml/2006/main" xmlns:r="http://schemas.openxmlformats.org/officeDocument/2006/relationships" xmlns:p="http://schemas.openxmlformats.org/presentationml/2006/main" type="title" preserve="1">
   <p:cSld name="Title Slide">
@@ -1383,7 +1473,7 @@
           <a:p>
             <a:fld id="{3C85CAEB-1E40-4CD7-9AB3-AC048F29DA40}" type="datetimeFigureOut">
               <a:rPr lang="en-US" smtClean="0"/>
-              <a:t>9/20/2025</a:t>
+              <a:t>9/25/2025</a:t>
             </a:fld>
             <a:endParaRPr lang="en-US"/>
           </a:p>
@@ -1581,7 +1671,7 @@
           <a:p>
             <a:fld id="{3C85CAEB-1E40-4CD7-9AB3-AC048F29DA40}" type="datetimeFigureOut">
               <a:rPr lang="en-US" smtClean="0"/>
-              <a:t>9/20/2025</a:t>
+              <a:t>9/25/2025</a:t>
             </a:fld>
             <a:endParaRPr lang="en-US"/>
           </a:p>
@@ -1789,7 +1879,7 @@
           <a:p>
             <a:fld id="{3C85CAEB-1E40-4CD7-9AB3-AC048F29DA40}" type="datetimeFigureOut">
               <a:rPr lang="en-US" smtClean="0"/>
-              <a:t>9/20/2025</a:t>
+              <a:t>9/25/2025</a:t>
             </a:fld>
             <a:endParaRPr lang="en-US"/>
           </a:p>
@@ -1987,7 +2077,7 @@
           <a:p>
             <a:fld id="{3C85CAEB-1E40-4CD7-9AB3-AC048F29DA40}" type="datetimeFigureOut">
               <a:rPr lang="en-US" smtClean="0"/>
-              <a:t>9/20/2025</a:t>
+              <a:t>9/25/2025</a:t>
             </a:fld>
             <a:endParaRPr lang="en-US"/>
           </a:p>
@@ -2262,7 +2352,7 @@
           <a:p>
             <a:fld id="{3C85CAEB-1E40-4CD7-9AB3-AC048F29DA40}" type="datetimeFigureOut">
               <a:rPr lang="en-US" smtClean="0"/>
-              <a:t>9/20/2025</a:t>
+              <a:t>9/25/2025</a:t>
             </a:fld>
             <a:endParaRPr lang="en-US"/>
           </a:p>
@@ -2527,7 +2617,7 @@
           <a:p>
             <a:fld id="{3C85CAEB-1E40-4CD7-9AB3-AC048F29DA40}" type="datetimeFigureOut">
               <a:rPr lang="en-US" smtClean="0"/>
-              <a:t>9/20/2025</a:t>
+              <a:t>9/25/2025</a:t>
             </a:fld>
             <a:endParaRPr lang="en-US"/>
           </a:p>
@@ -2939,7 +3029,7 @@
           <a:p>
             <a:fld id="{3C85CAEB-1E40-4CD7-9AB3-AC048F29DA40}" type="datetimeFigureOut">
               <a:rPr lang="en-US" smtClean="0"/>
-              <a:t>9/20/2025</a:t>
+              <a:t>9/25/2025</a:t>
             </a:fld>
             <a:endParaRPr lang="en-US"/>
           </a:p>
@@ -3080,7 +3170,7 @@
           <a:p>
             <a:fld id="{3C85CAEB-1E40-4CD7-9AB3-AC048F29DA40}" type="datetimeFigureOut">
               <a:rPr lang="en-US" smtClean="0"/>
-              <a:t>9/20/2025</a:t>
+              <a:t>9/25/2025</a:t>
             </a:fld>
             <a:endParaRPr lang="en-US"/>
           </a:p>
@@ -3193,7 +3283,7 @@
           <a:p>
             <a:fld id="{3C85CAEB-1E40-4CD7-9AB3-AC048F29DA40}" type="datetimeFigureOut">
               <a:rPr lang="en-US" smtClean="0"/>
-              <a:t>9/20/2025</a:t>
+              <a:t>9/25/2025</a:t>
             </a:fld>
             <a:endParaRPr lang="en-US"/>
           </a:p>
@@ -3504,7 +3594,7 @@
           <a:p>
             <a:fld id="{3C85CAEB-1E40-4CD7-9AB3-AC048F29DA40}" type="datetimeFigureOut">
               <a:rPr lang="en-US" smtClean="0"/>
-              <a:t>9/20/2025</a:t>
+              <a:t>9/25/2025</a:t>
             </a:fld>
             <a:endParaRPr lang="en-US"/>
           </a:p>
@@ -3792,7 +3882,7 @@
           <a:p>
             <a:fld id="{3C85CAEB-1E40-4CD7-9AB3-AC048F29DA40}" type="datetimeFigureOut">
               <a:rPr lang="en-US" smtClean="0"/>
-              <a:t>9/20/2025</a:t>
+              <a:t>9/25/2025</a:t>
             </a:fld>
             <a:endParaRPr lang="en-US"/>
           </a:p>
@@ -4033,7 +4123,7 @@
           <a:p>
             <a:fld id="{3C85CAEB-1E40-4CD7-9AB3-AC048F29DA40}" type="datetimeFigureOut">
               <a:rPr lang="en-US" smtClean="0"/>
-              <a:t>9/20/2025</a:t>
+              <a:t>9/25/2025</a:t>
             </a:fld>
             <a:endParaRPr lang="en-US"/>
           </a:p>
@@ -7938,6 +8028,905 @@
 </p:sld>
 </file>
 
+<file path=ppt/slides/slide10.xml><?xml version="1.0" encoding="utf-8"?>
+<p:sld xmlns:a="http://schemas.openxmlformats.org/drawingml/2006/main" xmlns:r="http://schemas.openxmlformats.org/officeDocument/2006/relationships" xmlns:p="http://schemas.openxmlformats.org/presentationml/2006/main">
+  <p:cSld>
+    <p:spTree>
+      <p:nvGrpSpPr>
+        <p:cNvPr id="1" name=""/>
+        <p:cNvGrpSpPr/>
+        <p:nvPr/>
+      </p:nvGrpSpPr>
+      <p:grpSpPr>
+        <a:xfrm>
+          <a:off x="0" y="0"/>
+          <a:ext cx="0" cy="0"/>
+          <a:chOff x="0" y="0"/>
+          <a:chExt cx="0" cy="0"/>
+        </a:xfrm>
+      </p:grpSpPr>
+      <p:pic>
+        <p:nvPicPr>
+          <p:cNvPr id="5" name="Content Placeholder 4" descr="A group of graphs and charts&#10;&#10;AI-generated content may be incorrect.">
+            <a:extLst>
+              <a:ext uri="{FF2B5EF4-FFF2-40B4-BE49-F238E27FC236}">
+                <a16:creationId xmlns:a16="http://schemas.microsoft.com/office/drawing/2014/main" id="{722CDBDB-A71F-8A97-A39D-8F6CB4D29377}"/>
+              </a:ext>
+            </a:extLst>
+          </p:cNvPr>
+          <p:cNvPicPr>
+            <a:picLocks noGrp="1" noChangeAspect="1"/>
+          </p:cNvPicPr>
+          <p:nvPr>
+            <p:ph idx="1"/>
+          </p:nvPr>
+        </p:nvPicPr>
+        <p:blipFill>
+          <a:blip r:embed="rId2">
+            <a:extLst>
+              <a:ext uri="{28A0092B-C50C-407E-A947-70E740481C1C}">
+                <a14:useLocalDpi xmlns:a14="http://schemas.microsoft.com/office/drawing/2010/main" val="0"/>
+              </a:ext>
+            </a:extLst>
+          </a:blip>
+          <a:stretch>
+            <a:fillRect/>
+          </a:stretch>
+        </p:blipFill>
+        <p:spPr>
+          <a:xfrm>
+            <a:off x="4196512" y="0"/>
+            <a:ext cx="7789762" cy="6816043"/>
+          </a:xfrm>
+        </p:spPr>
+      </p:pic>
+      <p:pic>
+        <p:nvPicPr>
+          <p:cNvPr id="6" name="Picture 8" descr="Phineas and Ferb Theory: Why Perry the Platypus Lives With the Family">
+            <a:extLst>
+              <a:ext uri="{FF2B5EF4-FFF2-40B4-BE49-F238E27FC236}">
+                <a16:creationId xmlns:a16="http://schemas.microsoft.com/office/drawing/2014/main" id="{F38B5A31-3025-3312-05D2-27C603DA8FFF}"/>
+              </a:ext>
+            </a:extLst>
+          </p:cNvPr>
+          <p:cNvPicPr>
+            <a:picLocks noChangeAspect="1" noChangeArrowheads="1"/>
+          </p:cNvPicPr>
+          <p:nvPr/>
+        </p:nvPicPr>
+        <p:blipFill>
+          <a:blip r:embed="rId3">
+            <a:extLst>
+              <a:ext uri="{28A0092B-C50C-407E-A947-70E740481C1C}">
+                <a14:useLocalDpi xmlns:a14="http://schemas.microsoft.com/office/drawing/2010/main" val="0"/>
+              </a:ext>
+            </a:extLst>
+          </a:blip>
+          <a:srcRect/>
+          <a:stretch>
+            <a:fillRect/>
+          </a:stretch>
+        </p:blipFill>
+        <p:spPr bwMode="auto">
+          <a:xfrm>
+            <a:off x="414071" y="2765069"/>
+            <a:ext cx="3374572" cy="1687286"/>
+          </a:xfrm>
+          <a:prstGeom prst="rect">
+            <a:avLst/>
+          </a:prstGeom>
+          <a:noFill/>
+          <a:effectLst>
+            <a:softEdge rad="31750"/>
+          </a:effectLst>
+          <a:extLst>
+            <a:ext uri="{909E8E84-426E-40DD-AFC4-6F175D3DCCD1}">
+              <a14:hiddenFill xmlns:a14="http://schemas.microsoft.com/office/drawing/2010/main">
+                <a:solidFill>
+                  <a:srgbClr val="FFFFFF"/>
+                </a:solidFill>
+              </a14:hiddenFill>
+            </a:ext>
+          </a:extLst>
+        </p:spPr>
+      </p:pic>
+      <p:sp>
+        <p:nvSpPr>
+          <p:cNvPr id="7" name="Title 1">
+            <a:extLst>
+              <a:ext uri="{FF2B5EF4-FFF2-40B4-BE49-F238E27FC236}">
+                <a16:creationId xmlns:a16="http://schemas.microsoft.com/office/drawing/2014/main" id="{B486834E-2E85-2234-160E-5CA50B56299B}"/>
+              </a:ext>
+            </a:extLst>
+          </p:cNvPr>
+          <p:cNvSpPr>
+            <a:spLocks noGrp="1"/>
+          </p:cNvSpPr>
+          <p:nvPr>
+            <p:ph type="title"/>
+          </p:nvPr>
+        </p:nvSpPr>
+        <p:spPr>
+          <a:xfrm>
+            <a:off x="120569" y="0"/>
+            <a:ext cx="10515600" cy="1325563"/>
+          </a:xfrm>
+        </p:spPr>
+        <p:txBody>
+          <a:bodyPr/>
+          <a:lstStyle/>
+          <a:p>
+            <a:r>
+              <a:rPr lang="en-US" dirty="0" err="1"/>
+              <a:t>Rezultati</a:t>
+            </a:r>
+            <a:endParaRPr lang="en-US" dirty="0"/>
+          </a:p>
+        </p:txBody>
+      </p:sp>
+    </p:spTree>
+    <p:extLst>
+      <p:ext uri="{BB962C8B-B14F-4D97-AF65-F5344CB8AC3E}">
+        <p14:creationId xmlns:p14="http://schemas.microsoft.com/office/powerpoint/2010/main" val="2816954358"/>
+      </p:ext>
+    </p:extLst>
+  </p:cSld>
+  <p:clrMapOvr>
+    <a:masterClrMapping/>
+  </p:clrMapOvr>
+</p:sld>
+</file>
+
+<file path=ppt/slides/slide11.xml><?xml version="1.0" encoding="utf-8"?>
+<p:sld xmlns:a="http://schemas.openxmlformats.org/drawingml/2006/main" xmlns:r="http://schemas.openxmlformats.org/officeDocument/2006/relationships" xmlns:p="http://schemas.openxmlformats.org/presentationml/2006/main">
+  <p:cSld>
+    <p:bg>
+      <p:bgPr>
+        <a:solidFill>
+          <a:schemeClr val="bg1"/>
+        </a:solidFill>
+        <a:effectLst/>
+      </p:bgPr>
+    </p:bg>
+    <p:spTree>
+      <p:nvGrpSpPr>
+        <p:cNvPr id="1" name="">
+          <a:extLst>
+            <a:ext uri="{FF2B5EF4-FFF2-40B4-BE49-F238E27FC236}">
+              <a16:creationId xmlns:a16="http://schemas.microsoft.com/office/drawing/2014/main" id="{4078A8B7-E281-3F71-11CD-840FB7A6AFAF}"/>
+            </a:ext>
+          </a:extLst>
+        </p:cNvPr>
+        <p:cNvGrpSpPr/>
+        <p:nvPr/>
+      </p:nvGrpSpPr>
+      <p:grpSpPr>
+        <a:xfrm>
+          <a:off x="0" y="0"/>
+          <a:ext cx="0" cy="0"/>
+          <a:chOff x="0" y="0"/>
+          <a:chExt cx="0" cy="0"/>
+        </a:xfrm>
+      </p:grpSpPr>
+      <p:sp>
+        <p:nvSpPr>
+          <p:cNvPr id="10" name="Rectangle 9">
+            <a:extLst>
+              <a:ext uri="{FF2B5EF4-FFF2-40B4-BE49-F238E27FC236}">
+                <a16:creationId xmlns:a16="http://schemas.microsoft.com/office/drawing/2014/main" id="{01B8EF4A-7540-D91F-C183-96E4E1B1ACBF}"/>
+              </a:ext>
+              <a:ext uri="{C183D7F6-B498-43B3-948B-1728B52AA6E4}">
+                <adec:decorative xmlns:adec="http://schemas.microsoft.com/office/drawing/2017/decorative" val="1"/>
+              </a:ext>
+            </a:extLst>
+          </p:cNvPr>
+          <p:cNvSpPr>
+            <a:spLocks noGrp="1" noRot="1" noChangeAspect="1" noMove="1" noResize="1" noEditPoints="1" noAdjustHandles="1" noChangeArrowheads="1" noChangeShapeType="1" noTextEdit="1"/>
+          </p:cNvSpPr>
+          <p:nvPr>
+            <p:extLst>
+              <p:ext uri="{386F3935-93C4-4BCD-93E2-E3B085C9AB24}">
+                <p16:designElem xmlns:p16="http://schemas.microsoft.com/office/powerpoint/2015/main" val="1"/>
+              </p:ext>
+            </p:extLst>
+          </p:nvPr>
+        </p:nvSpPr>
+        <p:spPr>
+          <a:xfrm>
+            <a:off x="0" y="0"/>
+            <a:ext cx="12192000" cy="6858000"/>
+          </a:xfrm>
+          <a:prstGeom prst="rect">
+            <a:avLst/>
+          </a:prstGeom>
+          <a:solidFill>
+            <a:schemeClr val="bg1"/>
+          </a:solidFill>
+          <a:ln>
+            <a:noFill/>
+          </a:ln>
+        </p:spPr>
+        <p:style>
+          <a:lnRef idx="2">
+            <a:schemeClr val="accent1">
+              <a:shade val="50000"/>
+            </a:schemeClr>
+          </a:lnRef>
+          <a:fillRef idx="1">
+            <a:schemeClr val="accent1"/>
+          </a:fillRef>
+          <a:effectRef idx="0">
+            <a:schemeClr val="accent1"/>
+          </a:effectRef>
+          <a:fontRef idx="minor">
+            <a:schemeClr val="lt1"/>
+          </a:fontRef>
+        </p:style>
+        <p:txBody>
+          <a:bodyPr rtlCol="0" anchor="ctr"/>
+          <a:lstStyle/>
+          <a:p>
+            <a:pPr algn="ctr"/>
+            <a:endParaRPr lang="en-US" dirty="0"/>
+          </a:p>
+        </p:txBody>
+      </p:sp>
+      <p:sp>
+        <p:nvSpPr>
+          <p:cNvPr id="12" name="Freeform: Shape 11">
+            <a:extLst>
+              <a:ext uri="{FF2B5EF4-FFF2-40B4-BE49-F238E27FC236}">
+                <a16:creationId xmlns:a16="http://schemas.microsoft.com/office/drawing/2014/main" id="{EC86C24E-02C4-D19D-D109-6B287ADDBEBF}"/>
+              </a:ext>
+              <a:ext uri="{C183D7F6-B498-43B3-948B-1728B52AA6E4}">
+                <adec:decorative xmlns:adec="http://schemas.microsoft.com/office/drawing/2017/decorative" val="1"/>
+              </a:ext>
+            </a:extLst>
+          </p:cNvPr>
+          <p:cNvSpPr>
+            <a:spLocks noGrp="1" noRot="1" noChangeAspect="1" noMove="1" noResize="1" noEditPoints="1" noAdjustHandles="1" noChangeArrowheads="1" noChangeShapeType="1" noTextEdit="1"/>
+          </p:cNvSpPr>
+          <p:nvPr>
+            <p:extLst>
+              <p:ext uri="{386F3935-93C4-4BCD-93E2-E3B085C9AB24}">
+                <p16:designElem xmlns:p16="http://schemas.microsoft.com/office/powerpoint/2015/main" val="1"/>
+              </p:ext>
+            </p:extLst>
+          </p:nvPr>
+        </p:nvSpPr>
+        <p:spPr>
+          <a:xfrm rot="18900000" flipH="1">
+            <a:off x="-376156" y="-253670"/>
+            <a:ext cx="1827638" cy="1376989"/>
+          </a:xfrm>
+          <a:custGeom>
+            <a:avLst/>
+            <a:gdLst>
+              <a:gd name="connsiteX0" fmla="*/ 0 w 1827638"/>
+              <a:gd name="connsiteY0" fmla="*/ 987379 h 1376989"/>
+              <a:gd name="connsiteX1" fmla="*/ 987379 w 1827638"/>
+              <a:gd name="connsiteY1" fmla="*/ 0 h 1376989"/>
+              <a:gd name="connsiteX2" fmla="*/ 1827638 w 1827638"/>
+              <a:gd name="connsiteY2" fmla="*/ 840260 h 1376989"/>
+              <a:gd name="connsiteX3" fmla="*/ 1827638 w 1827638"/>
+              <a:gd name="connsiteY3" fmla="*/ 1376989 h 1376989"/>
+              <a:gd name="connsiteX4" fmla="*/ 0 w 1827638"/>
+              <a:gd name="connsiteY4" fmla="*/ 1376989 h 1376989"/>
+            </a:gdLst>
+            <a:ahLst/>
+            <a:cxnLst>
+              <a:cxn ang="0">
+                <a:pos x="connsiteX0" y="connsiteY0"/>
+              </a:cxn>
+              <a:cxn ang="0">
+                <a:pos x="connsiteX1" y="connsiteY1"/>
+              </a:cxn>
+              <a:cxn ang="0">
+                <a:pos x="connsiteX2" y="connsiteY2"/>
+              </a:cxn>
+              <a:cxn ang="0">
+                <a:pos x="connsiteX3" y="connsiteY3"/>
+              </a:cxn>
+              <a:cxn ang="0">
+                <a:pos x="connsiteX4" y="connsiteY4"/>
+              </a:cxn>
+            </a:cxnLst>
+            <a:rect l="l" t="t" r="r" b="b"/>
+            <a:pathLst>
+              <a:path w="1827638" h="1376989">
+                <a:moveTo>
+                  <a:pt x="0" y="987379"/>
+                </a:moveTo>
+                <a:lnTo>
+                  <a:pt x="987379" y="0"/>
+                </a:lnTo>
+                <a:lnTo>
+                  <a:pt x="1827638" y="840260"/>
+                </a:lnTo>
+                <a:lnTo>
+                  <a:pt x="1827638" y="1376989"/>
+                </a:lnTo>
+                <a:lnTo>
+                  <a:pt x="0" y="1376989"/>
+                </a:lnTo>
+                <a:close/>
+              </a:path>
+            </a:pathLst>
+          </a:custGeom>
+          <a:solidFill>
+            <a:schemeClr val="accent1">
+              <a:alpha val="30000"/>
+            </a:schemeClr>
+          </a:solidFill>
+          <a:ln>
+            <a:noFill/>
+          </a:ln>
+        </p:spPr>
+        <p:style>
+          <a:lnRef idx="2">
+            <a:schemeClr val="accent1">
+              <a:shade val="50000"/>
+            </a:schemeClr>
+          </a:lnRef>
+          <a:fillRef idx="1">
+            <a:schemeClr val="accent1"/>
+          </a:fillRef>
+          <a:effectRef idx="0">
+            <a:schemeClr val="accent1"/>
+          </a:effectRef>
+          <a:fontRef idx="minor">
+            <a:schemeClr val="lt1"/>
+          </a:fontRef>
+        </p:style>
+        <p:txBody>
+          <a:bodyPr rtlCol="0" anchor="ctr"/>
+          <a:lstStyle/>
+          <a:p>
+            <a:pPr algn="ctr"/>
+            <a:endParaRPr lang="en-US" dirty="0"/>
+          </a:p>
+        </p:txBody>
+      </p:sp>
+      <p:sp>
+        <p:nvSpPr>
+          <p:cNvPr id="14" name="Rectangle 13">
+            <a:extLst>
+              <a:ext uri="{FF2B5EF4-FFF2-40B4-BE49-F238E27FC236}">
+                <a16:creationId xmlns:a16="http://schemas.microsoft.com/office/drawing/2014/main" id="{B15CDEEE-60D7-F387-88D8-58A5643D9498}"/>
+              </a:ext>
+              <a:ext uri="{C183D7F6-B498-43B3-948B-1728B52AA6E4}">
+                <adec:decorative xmlns:adec="http://schemas.microsoft.com/office/drawing/2017/decorative" val="1"/>
+              </a:ext>
+            </a:extLst>
+          </p:cNvPr>
+          <p:cNvSpPr>
+            <a:spLocks noGrp="1" noRot="1" noChangeAspect="1" noMove="1" noResize="1" noEditPoints="1" noAdjustHandles="1" noChangeArrowheads="1" noChangeShapeType="1" noTextEdit="1"/>
+          </p:cNvSpPr>
+          <p:nvPr>
+            <p:extLst>
+              <p:ext uri="{386F3935-93C4-4BCD-93E2-E3B085C9AB24}">
+                <p16:designElem xmlns:p16="http://schemas.microsoft.com/office/powerpoint/2015/main" val="1"/>
+              </p:ext>
+            </p:extLst>
+          </p:nvPr>
+        </p:nvSpPr>
+        <p:spPr>
+          <a:xfrm rot="18900000" flipH="1">
+            <a:off x="891641" y="422146"/>
+            <a:ext cx="645368" cy="645368"/>
+          </a:xfrm>
+          <a:prstGeom prst="rect">
+            <a:avLst/>
+          </a:prstGeom>
+          <a:solidFill>
+            <a:schemeClr val="accent1">
+              <a:alpha val="30000"/>
+            </a:schemeClr>
+          </a:solidFill>
+          <a:ln>
+            <a:noFill/>
+          </a:ln>
+        </p:spPr>
+        <p:style>
+          <a:lnRef idx="2">
+            <a:schemeClr val="accent1">
+              <a:shade val="50000"/>
+            </a:schemeClr>
+          </a:lnRef>
+          <a:fillRef idx="1">
+            <a:schemeClr val="accent1"/>
+          </a:fillRef>
+          <a:effectRef idx="0">
+            <a:schemeClr val="accent1"/>
+          </a:effectRef>
+          <a:fontRef idx="minor">
+            <a:schemeClr val="lt1"/>
+          </a:fontRef>
+        </p:style>
+        <p:txBody>
+          <a:bodyPr rtlCol="0" anchor="ctr"/>
+          <a:lstStyle/>
+          <a:p>
+            <a:pPr algn="ctr"/>
+            <a:endParaRPr lang="en-US"/>
+          </a:p>
+        </p:txBody>
+      </p:sp>
+      <p:sp>
+        <p:nvSpPr>
+          <p:cNvPr id="16" name="Rectangle 15">
+            <a:extLst>
+              <a:ext uri="{FF2B5EF4-FFF2-40B4-BE49-F238E27FC236}">
+                <a16:creationId xmlns:a16="http://schemas.microsoft.com/office/drawing/2014/main" id="{6AD5BFE6-25BB-8D95-D88E-FA1B0B69FEDD}"/>
+              </a:ext>
+              <a:ext uri="{C183D7F6-B498-43B3-948B-1728B52AA6E4}">
+                <adec:decorative xmlns:adec="http://schemas.microsoft.com/office/drawing/2017/decorative" val="1"/>
+              </a:ext>
+            </a:extLst>
+          </p:cNvPr>
+          <p:cNvSpPr>
+            <a:spLocks noGrp="1" noRot="1" noChangeAspect="1" noMove="1" noResize="1" noEditPoints="1" noAdjustHandles="1" noChangeArrowheads="1" noChangeShapeType="1" noTextEdit="1"/>
+          </p:cNvSpPr>
+          <p:nvPr>
+            <p:extLst>
+              <p:ext uri="{386F3935-93C4-4BCD-93E2-E3B085C9AB24}">
+                <p16:designElem xmlns:p16="http://schemas.microsoft.com/office/powerpoint/2015/main" val="1"/>
+              </p:ext>
+            </p:extLst>
+          </p:nvPr>
+        </p:nvSpPr>
+        <p:spPr>
+          <a:xfrm rot="18900000" flipH="1">
+            <a:off x="10043482" y="655140"/>
+            <a:ext cx="687472" cy="687472"/>
+          </a:xfrm>
+          <a:prstGeom prst="rect">
+            <a:avLst/>
+          </a:prstGeom>
+          <a:solidFill>
+            <a:schemeClr val="accent4">
+              <a:alpha val="30000"/>
+            </a:schemeClr>
+          </a:solidFill>
+          <a:ln>
+            <a:noFill/>
+          </a:ln>
+        </p:spPr>
+        <p:style>
+          <a:lnRef idx="2">
+            <a:schemeClr val="accent1">
+              <a:shade val="50000"/>
+            </a:schemeClr>
+          </a:lnRef>
+          <a:fillRef idx="1">
+            <a:schemeClr val="accent1"/>
+          </a:fillRef>
+          <a:effectRef idx="0">
+            <a:schemeClr val="accent1"/>
+          </a:effectRef>
+          <a:fontRef idx="minor">
+            <a:schemeClr val="lt1"/>
+          </a:fontRef>
+        </p:style>
+        <p:txBody>
+          <a:bodyPr rtlCol="0" anchor="ctr"/>
+          <a:lstStyle/>
+          <a:p>
+            <a:pPr algn="ctr"/>
+            <a:endParaRPr lang="en-US"/>
+          </a:p>
+        </p:txBody>
+      </p:sp>
+      <p:sp>
+        <p:nvSpPr>
+          <p:cNvPr id="18" name="Freeform: Shape 17">
+            <a:extLst>
+              <a:ext uri="{FF2B5EF4-FFF2-40B4-BE49-F238E27FC236}">
+                <a16:creationId xmlns:a16="http://schemas.microsoft.com/office/drawing/2014/main" id="{EB64FC5B-6DE7-2205-FD10-B5F5F873A792}"/>
+              </a:ext>
+              <a:ext uri="{C183D7F6-B498-43B3-948B-1728B52AA6E4}">
+                <adec:decorative xmlns:adec="http://schemas.microsoft.com/office/drawing/2017/decorative" val="1"/>
+              </a:ext>
+            </a:extLst>
+          </p:cNvPr>
+          <p:cNvSpPr>
+            <a:spLocks noGrp="1" noRot="1" noChangeAspect="1" noMove="1" noResize="1" noEditPoints="1" noAdjustHandles="1" noChangeArrowheads="1" noChangeShapeType="1" noTextEdit="1"/>
+          </p:cNvSpPr>
+          <p:nvPr>
+            <p:extLst>
+              <p:ext uri="{386F3935-93C4-4BCD-93E2-E3B085C9AB24}">
+                <p16:designElem xmlns:p16="http://schemas.microsoft.com/office/powerpoint/2015/main" val="1"/>
+              </p:ext>
+            </p:extLst>
+          </p:nvPr>
+        </p:nvSpPr>
+        <p:spPr>
+          <a:xfrm rot="10800000" flipH="1">
+            <a:off x="9356643" y="0"/>
+            <a:ext cx="2835357" cy="1480837"/>
+          </a:xfrm>
+          <a:custGeom>
+            <a:avLst/>
+            <a:gdLst>
+              <a:gd name="connsiteX0" fmla="*/ 2835357 w 2835357"/>
+              <a:gd name="connsiteY0" fmla="*/ 1480837 h 1480837"/>
+              <a:gd name="connsiteX1" fmla="*/ 0 w 2835357"/>
+              <a:gd name="connsiteY1" fmla="*/ 1480837 h 1480837"/>
+              <a:gd name="connsiteX2" fmla="*/ 1552727 w 2835357"/>
+              <a:gd name="connsiteY2" fmla="*/ 0 h 1480837"/>
+              <a:gd name="connsiteX3" fmla="*/ 2835357 w 2835357"/>
+              <a:gd name="connsiteY3" fmla="*/ 1223245 h 1480837"/>
+            </a:gdLst>
+            <a:ahLst/>
+            <a:cxnLst>
+              <a:cxn ang="0">
+                <a:pos x="connsiteX0" y="connsiteY0"/>
+              </a:cxn>
+              <a:cxn ang="0">
+                <a:pos x="connsiteX1" y="connsiteY1"/>
+              </a:cxn>
+              <a:cxn ang="0">
+                <a:pos x="connsiteX2" y="connsiteY2"/>
+              </a:cxn>
+              <a:cxn ang="0">
+                <a:pos x="connsiteX3" y="connsiteY3"/>
+              </a:cxn>
+            </a:cxnLst>
+            <a:rect l="l" t="t" r="r" b="b"/>
+            <a:pathLst>
+              <a:path w="2835357" h="1480837">
+                <a:moveTo>
+                  <a:pt x="2835357" y="1480837"/>
+                </a:moveTo>
+                <a:lnTo>
+                  <a:pt x="0" y="1480837"/>
+                </a:lnTo>
+                <a:lnTo>
+                  <a:pt x="1552727" y="0"/>
+                </a:lnTo>
+                <a:lnTo>
+                  <a:pt x="2835357" y="1223245"/>
+                </a:lnTo>
+                <a:close/>
+              </a:path>
+            </a:pathLst>
+          </a:custGeom>
+          <a:solidFill>
+            <a:schemeClr val="accent4">
+              <a:alpha val="30000"/>
+            </a:schemeClr>
+          </a:solidFill>
+          <a:ln>
+            <a:noFill/>
+          </a:ln>
+        </p:spPr>
+        <p:style>
+          <a:lnRef idx="2">
+            <a:schemeClr val="accent1">
+              <a:shade val="50000"/>
+            </a:schemeClr>
+          </a:lnRef>
+          <a:fillRef idx="1">
+            <a:schemeClr val="accent1"/>
+          </a:fillRef>
+          <a:effectRef idx="0">
+            <a:schemeClr val="accent1"/>
+          </a:effectRef>
+          <a:fontRef idx="minor">
+            <a:schemeClr val="lt1"/>
+          </a:fontRef>
+        </p:style>
+        <p:txBody>
+          <a:bodyPr wrap="square" rtlCol="0" anchor="ctr">
+            <a:noAutofit/>
+          </a:bodyPr>
+          <a:lstStyle/>
+          <a:p>
+            <a:pPr algn="ctr"/>
+            <a:endParaRPr lang="en-US" dirty="0"/>
+          </a:p>
+        </p:txBody>
+      </p:sp>
+      <p:sp>
+        <p:nvSpPr>
+          <p:cNvPr id="20" name="Isosceles Triangle 19">
+            <a:extLst>
+              <a:ext uri="{FF2B5EF4-FFF2-40B4-BE49-F238E27FC236}">
+                <a16:creationId xmlns:a16="http://schemas.microsoft.com/office/drawing/2014/main" id="{42447A5C-F850-81C7-46DB-2A97606275DE}"/>
+              </a:ext>
+              <a:ext uri="{C183D7F6-B498-43B3-948B-1728B52AA6E4}">
+                <adec:decorative xmlns:adec="http://schemas.microsoft.com/office/drawing/2017/decorative" val="1"/>
+              </a:ext>
+            </a:extLst>
+          </p:cNvPr>
+          <p:cNvSpPr>
+            <a:spLocks noGrp="1" noRot="1" noChangeAspect="1" noMove="1" noResize="1" noEditPoints="1" noAdjustHandles="1" noChangeArrowheads="1" noChangeShapeType="1" noTextEdit="1"/>
+          </p:cNvSpPr>
+          <p:nvPr>
+            <p:extLst>
+              <p:ext uri="{386F3935-93C4-4BCD-93E2-E3B085C9AB24}">
+                <p16:designElem xmlns:p16="http://schemas.microsoft.com/office/powerpoint/2015/main" val="1"/>
+              </p:ext>
+            </p:extLst>
+          </p:nvPr>
+        </p:nvSpPr>
+        <p:spPr>
+          <a:xfrm flipH="1">
+            <a:off x="7976344" y="6115501"/>
+            <a:ext cx="1494513" cy="742499"/>
+          </a:xfrm>
+          <a:prstGeom prst="triangle">
+            <a:avLst/>
+          </a:prstGeom>
+          <a:solidFill>
+            <a:schemeClr val="accent1">
+              <a:alpha val="30000"/>
+            </a:schemeClr>
+          </a:solidFill>
+          <a:ln>
+            <a:noFill/>
+          </a:ln>
+        </p:spPr>
+        <p:style>
+          <a:lnRef idx="2">
+            <a:schemeClr val="accent1">
+              <a:shade val="50000"/>
+            </a:schemeClr>
+          </a:lnRef>
+          <a:fillRef idx="1">
+            <a:schemeClr val="accent1"/>
+          </a:fillRef>
+          <a:effectRef idx="0">
+            <a:schemeClr val="accent1"/>
+          </a:effectRef>
+          <a:fontRef idx="minor">
+            <a:schemeClr val="lt1"/>
+          </a:fontRef>
+        </p:style>
+        <p:txBody>
+          <a:bodyPr rtlCol="0" anchor="ctr"/>
+          <a:lstStyle/>
+          <a:p>
+            <a:pPr algn="ctr"/>
+            <a:endParaRPr lang="en-US"/>
+          </a:p>
+        </p:txBody>
+      </p:sp>
+      <p:sp>
+        <p:nvSpPr>
+          <p:cNvPr id="22" name="Isosceles Triangle 21">
+            <a:extLst>
+              <a:ext uri="{FF2B5EF4-FFF2-40B4-BE49-F238E27FC236}">
+                <a16:creationId xmlns:a16="http://schemas.microsoft.com/office/drawing/2014/main" id="{2651BF5D-D704-F476-0A9F-64A2A023FC07}"/>
+              </a:ext>
+              <a:ext uri="{C183D7F6-B498-43B3-948B-1728B52AA6E4}">
+                <adec:decorative xmlns:adec="http://schemas.microsoft.com/office/drawing/2017/decorative" val="1"/>
+              </a:ext>
+            </a:extLst>
+          </p:cNvPr>
+          <p:cNvSpPr>
+            <a:spLocks noGrp="1" noRot="1" noChangeAspect="1" noMove="1" noResize="1" noEditPoints="1" noAdjustHandles="1" noChangeArrowheads="1" noChangeShapeType="1" noTextEdit="1"/>
+          </p:cNvSpPr>
+          <p:nvPr>
+            <p:extLst>
+              <p:ext uri="{386F3935-93C4-4BCD-93E2-E3B085C9AB24}">
+                <p16:designElem xmlns:p16="http://schemas.microsoft.com/office/powerpoint/2015/main" val="1"/>
+              </p:ext>
+            </p:extLst>
+          </p:nvPr>
+        </p:nvSpPr>
+        <p:spPr>
+          <a:xfrm flipH="1">
+            <a:off x="7604080" y="6453143"/>
+            <a:ext cx="814903" cy="404857"/>
+          </a:xfrm>
+          <a:prstGeom prst="triangle">
+            <a:avLst/>
+          </a:prstGeom>
+          <a:solidFill>
+            <a:schemeClr val="accent1">
+              <a:alpha val="30000"/>
+            </a:schemeClr>
+          </a:solidFill>
+          <a:ln>
+            <a:noFill/>
+          </a:ln>
+        </p:spPr>
+        <p:style>
+          <a:lnRef idx="2">
+            <a:schemeClr val="accent1">
+              <a:shade val="50000"/>
+            </a:schemeClr>
+          </a:lnRef>
+          <a:fillRef idx="1">
+            <a:schemeClr val="accent1"/>
+          </a:fillRef>
+          <a:effectRef idx="0">
+            <a:schemeClr val="accent1"/>
+          </a:effectRef>
+          <a:fontRef idx="minor">
+            <a:schemeClr val="lt1"/>
+          </a:fontRef>
+        </p:style>
+        <p:txBody>
+          <a:bodyPr rtlCol="0" anchor="ctr"/>
+          <a:lstStyle/>
+          <a:p>
+            <a:pPr algn="ctr"/>
+            <a:endParaRPr lang="en-US"/>
+          </a:p>
+        </p:txBody>
+      </p:sp>
+      <p:sp>
+        <p:nvSpPr>
+          <p:cNvPr id="6" name="TextBox 5">
+            <a:extLst>
+              <a:ext uri="{FF2B5EF4-FFF2-40B4-BE49-F238E27FC236}">
+                <a16:creationId xmlns:a16="http://schemas.microsoft.com/office/drawing/2014/main" id="{76C94CCD-2557-3515-784C-46425BAC953D}"/>
+              </a:ext>
+            </a:extLst>
+          </p:cNvPr>
+          <p:cNvSpPr txBox="1"/>
+          <p:nvPr/>
+        </p:nvSpPr>
+        <p:spPr>
+          <a:xfrm>
+            <a:off x="1912717" y="5003674"/>
+            <a:ext cx="6094070" cy="369332"/>
+          </a:xfrm>
+          <a:prstGeom prst="rect">
+            <a:avLst/>
+          </a:prstGeom>
+          <a:noFill/>
+        </p:spPr>
+        <p:txBody>
+          <a:bodyPr wrap="square">
+            <a:spAutoFit/>
+          </a:bodyPr>
+          <a:lstStyle/>
+          <a:p>
+            <a:r>
+              <a:rPr lang="en-US" dirty="0"/>
+              <a:t>10896</a:t>
+            </a:r>
+            <a:r>
+              <a:rPr lang="en-US" sz="1800" dirty="0"/>
+              <a:t> times </a:t>
+            </a:r>
+            <a:endParaRPr lang="en-US" sz="1800" dirty="0">
+              <a:latin typeface="+mn-lt"/>
+            </a:endParaRPr>
+          </a:p>
+        </p:txBody>
+      </p:sp>
+      <p:sp>
+        <p:nvSpPr>
+          <p:cNvPr id="7" name="TextBox 6">
+            <a:extLst>
+              <a:ext uri="{FF2B5EF4-FFF2-40B4-BE49-F238E27FC236}">
+                <a16:creationId xmlns:a16="http://schemas.microsoft.com/office/drawing/2014/main" id="{8C84A0A8-91BB-161E-ED93-98C6FF94BCE5}"/>
+              </a:ext>
+            </a:extLst>
+          </p:cNvPr>
+          <p:cNvSpPr txBox="1"/>
+          <p:nvPr/>
+        </p:nvSpPr>
+        <p:spPr>
+          <a:xfrm>
+            <a:off x="5772889" y="5003674"/>
+            <a:ext cx="6094070" cy="369332"/>
+          </a:xfrm>
+          <a:prstGeom prst="rect">
+            <a:avLst/>
+          </a:prstGeom>
+          <a:noFill/>
+        </p:spPr>
+        <p:txBody>
+          <a:bodyPr wrap="square">
+            <a:spAutoFit/>
+          </a:bodyPr>
+          <a:lstStyle/>
+          <a:p>
+            <a:r>
+              <a:rPr lang="en-US" sz="1800" dirty="0"/>
+              <a:t>1 time </a:t>
+            </a:r>
+            <a:endParaRPr lang="en-US" sz="1800" dirty="0">
+              <a:latin typeface="+mn-lt"/>
+            </a:endParaRPr>
+          </a:p>
+        </p:txBody>
+      </p:sp>
+      <p:sp>
+        <p:nvSpPr>
+          <p:cNvPr id="8" name="TextBox 7">
+            <a:extLst>
+              <a:ext uri="{FF2B5EF4-FFF2-40B4-BE49-F238E27FC236}">
+                <a16:creationId xmlns:a16="http://schemas.microsoft.com/office/drawing/2014/main" id="{7A6DD695-005E-5559-4FD5-64D5A0F83B93}"/>
+              </a:ext>
+            </a:extLst>
+          </p:cNvPr>
+          <p:cNvSpPr txBox="1"/>
+          <p:nvPr/>
+        </p:nvSpPr>
+        <p:spPr>
+          <a:xfrm>
+            <a:off x="9544612" y="5003674"/>
+            <a:ext cx="6094070" cy="369332"/>
+          </a:xfrm>
+          <a:prstGeom prst="rect">
+            <a:avLst/>
+          </a:prstGeom>
+          <a:noFill/>
+        </p:spPr>
+        <p:txBody>
+          <a:bodyPr wrap="square">
+            <a:spAutoFit/>
+          </a:bodyPr>
+          <a:lstStyle/>
+          <a:p>
+            <a:r>
+              <a:rPr lang="en-US" dirty="0"/>
+              <a:t>0</a:t>
+            </a:r>
+            <a:r>
+              <a:rPr lang="en-US" sz="1800" dirty="0"/>
+              <a:t> times</a:t>
+            </a:r>
+            <a:endParaRPr lang="en-US" sz="1800" dirty="0">
+              <a:latin typeface="+mn-lt"/>
+            </a:endParaRPr>
+          </a:p>
+        </p:txBody>
+      </p:sp>
+      <p:pic>
+        <p:nvPicPr>
+          <p:cNvPr id="9" name="Content Placeholder 8" descr="A graph with numbers and lines&#10;&#10;AI-generated content may be incorrect.">
+            <a:extLst>
+              <a:ext uri="{FF2B5EF4-FFF2-40B4-BE49-F238E27FC236}">
+                <a16:creationId xmlns:a16="http://schemas.microsoft.com/office/drawing/2014/main" id="{A267976B-46D1-7532-88D1-9D69B9F702A3}"/>
+              </a:ext>
+            </a:extLst>
+          </p:cNvPr>
+          <p:cNvPicPr>
+            <a:picLocks noGrp="1" noChangeAspect="1"/>
+          </p:cNvPicPr>
+          <p:nvPr>
+            <p:ph idx="1"/>
+          </p:nvPr>
+        </p:nvPicPr>
+        <p:blipFill>
+          <a:blip r:embed="rId2">
+            <a:extLst>
+              <a:ext uri="{28A0092B-C50C-407E-A947-70E740481C1C}">
+                <a14:useLocalDpi xmlns:a14="http://schemas.microsoft.com/office/drawing/2010/main" val="0"/>
+              </a:ext>
+            </a:extLst>
+          </a:blip>
+          <a:stretch>
+            <a:fillRect/>
+          </a:stretch>
+        </p:blipFill>
+        <p:spPr>
+          <a:xfrm>
+            <a:off x="838200" y="1581314"/>
+            <a:ext cx="10515600" cy="3505199"/>
+          </a:xfrm>
+        </p:spPr>
+      </p:pic>
+    </p:spTree>
+    <p:extLst>
+      <p:ext uri="{BB962C8B-B14F-4D97-AF65-F5344CB8AC3E}">
+        <p14:creationId xmlns:p14="http://schemas.microsoft.com/office/powerpoint/2010/main" val="195175935"/>
+      </p:ext>
+    </p:extLst>
+  </p:cSld>
+  <p:clrMapOvr>
+    <a:masterClrMapping/>
+  </p:clrMapOvr>
+</p:sld>
+</file>
+
 <file path=ppt/slides/slide2.xml><?xml version="1.0" encoding="utf-8"?>
 <p:sld xmlns:a="http://schemas.openxmlformats.org/drawingml/2006/main" xmlns:r="http://schemas.openxmlformats.org/officeDocument/2006/relationships" xmlns:p="http://schemas.openxmlformats.org/presentationml/2006/main">
   <p:cSld>
@@ -7955,6 +8944,55 @@
           <a:chExt cx="0" cy="0"/>
         </a:xfrm>
       </p:grpSpPr>
+      <p:sp>
+        <p:nvSpPr>
+          <p:cNvPr id="30" name="Rectangle 29">
+            <a:extLst>
+              <a:ext uri="{FF2B5EF4-FFF2-40B4-BE49-F238E27FC236}">
+                <a16:creationId xmlns:a16="http://schemas.microsoft.com/office/drawing/2014/main" id="{EBCCEF3B-B238-6E64-1CF8-2F24DE3813C7}"/>
+              </a:ext>
+            </a:extLst>
+          </p:cNvPr>
+          <p:cNvSpPr/>
+          <p:nvPr/>
+        </p:nvSpPr>
+        <p:spPr>
+          <a:xfrm>
+            <a:off x="8765978" y="3902005"/>
+            <a:ext cx="2488176" cy="1661795"/>
+          </a:xfrm>
+          <a:prstGeom prst="rect">
+            <a:avLst/>
+          </a:prstGeom>
+          <a:solidFill>
+            <a:srgbClr val="99CCFF">
+              <a:alpha val="16863"/>
+            </a:srgbClr>
+          </a:solidFill>
+        </p:spPr>
+        <p:style>
+          <a:lnRef idx="1">
+            <a:schemeClr val="accent2"/>
+          </a:lnRef>
+          <a:fillRef idx="2">
+            <a:schemeClr val="accent2"/>
+          </a:fillRef>
+          <a:effectRef idx="1">
+            <a:schemeClr val="accent2"/>
+          </a:effectRef>
+          <a:fontRef idx="minor">
+            <a:schemeClr val="dk1"/>
+          </a:fontRef>
+        </p:style>
+        <p:txBody>
+          <a:bodyPr rtlCol="0" anchor="ctr"/>
+          <a:lstStyle/>
+          <a:p>
+            <a:pPr algn="ctr"/>
+            <a:endParaRPr lang="en-US"/>
+          </a:p>
+        </p:txBody>
+      </p:sp>
       <p:sp>
         <p:nvSpPr>
           <p:cNvPr id="27" name="Rectangle 26">
@@ -9298,13 +10336,13 @@
           <p:nvPr>
             <p:extLst>
               <p:ext uri="{D42A27DB-BD31-4B8C-83A1-F6EECF244321}">
-                <p14:modId xmlns:p14="http://schemas.microsoft.com/office/powerpoint/2010/main" val="414728474"/>
+                <p14:modId xmlns:p14="http://schemas.microsoft.com/office/powerpoint/2010/main" val="2092524948"/>
               </p:ext>
             </p:extLst>
           </p:nvPr>
         </p:nvGraphicFramePr>
         <p:xfrm>
-          <a:off x="6912076" y="1020195"/>
+          <a:off x="6912076" y="1019814"/>
           <a:ext cx="4363065" cy="2544953"/>
         </p:xfrm>
         <a:graphic>
@@ -9503,12 +10541,12 @@
                         <a:buNone/>
                       </a:pPr>
                       <a:r>
-                        <a:rPr lang="en-US" b="0">
+                        <a:rPr lang="en-US" b="0" dirty="0">
                           <a:effectLst/>
                         </a:rPr>
                         <a:t>6</a:t>
                       </a:r>
-                      <a:endParaRPr lang="en-US" b="0">
+                      <a:endParaRPr lang="en-US" b="0" dirty="0">
                         <a:effectLst/>
                         <a:latin typeface="Inter"/>
                       </a:endParaRPr>
@@ -9685,12 +10723,12 @@
                         <a:buNone/>
                       </a:pPr>
                       <a:r>
-                        <a:rPr lang="en-US" b="0">
+                        <a:rPr lang="en-US" b="0" dirty="0">
                           <a:effectLst/>
                         </a:rPr>
                         <a:t>1</a:t>
                       </a:r>
-                      <a:endParaRPr lang="en-US" b="0">
+                      <a:endParaRPr lang="en-US" b="0" dirty="0">
                         <a:effectLst/>
                         <a:latin typeface="Inter"/>
                       </a:endParaRPr>
@@ -9817,12 +10855,12 @@
                         <a:buNone/>
                       </a:pPr>
                       <a:r>
-                        <a:rPr lang="en-US" b="0">
+                        <a:rPr lang="en-US" b="0" dirty="0">
                           <a:effectLst/>
                         </a:rPr>
                         <a:t>1</a:t>
                       </a:r>
-                      <a:endParaRPr lang="en-US" b="0">
+                      <a:endParaRPr lang="en-US" b="0" dirty="0">
                         <a:effectLst/>
                         <a:latin typeface="Inter"/>
                       </a:endParaRPr>
@@ -10056,12 +11094,12 @@
                         <a:buNone/>
                       </a:pPr>
                       <a:r>
-                        <a:rPr lang="en-US" b="0">
+                        <a:rPr lang="en-US" b="0" dirty="0">
                           <a:effectLst/>
                         </a:rPr>
                         <a:t>1</a:t>
                       </a:r>
-                      <a:endParaRPr lang="en-US" b="0">
+                      <a:endParaRPr lang="en-US" b="0" dirty="0">
                         <a:effectLst/>
                         <a:latin typeface="Inter"/>
                       </a:endParaRPr>
@@ -10534,12 +11572,12 @@
                         <a:buNone/>
                       </a:pPr>
                       <a:r>
-                        <a:rPr lang="en-US" b="0">
+                        <a:rPr lang="en-US" b="0" dirty="0">
                           <a:effectLst/>
                         </a:rPr>
                         <a:t>$</a:t>
                       </a:r>
-                      <a:endParaRPr lang="en-US" b="0">
+                      <a:endParaRPr lang="en-US" b="0" dirty="0">
                         <a:effectLst/>
                         <a:latin typeface="Inter"/>
                       </a:endParaRPr>
@@ -10904,55 +11942,6 @@
               <a:t>Određivnaje mesta preklapanja</a:t>
             </a:r>
             <a:endParaRPr lang="en-US" sz="2400" dirty="0"/>
-          </a:p>
-        </p:txBody>
-      </p:sp>
-      <p:sp>
-        <p:nvSpPr>
-          <p:cNvPr id="30" name="Rectangle 29">
-            <a:extLst>
-              <a:ext uri="{FF2B5EF4-FFF2-40B4-BE49-F238E27FC236}">
-                <a16:creationId xmlns:a16="http://schemas.microsoft.com/office/drawing/2014/main" id="{EBCCEF3B-B238-6E64-1CF8-2F24DE3813C7}"/>
-              </a:ext>
-            </a:extLst>
-          </p:cNvPr>
-          <p:cNvSpPr/>
-          <p:nvPr/>
-        </p:nvSpPr>
-        <p:spPr>
-          <a:xfrm>
-            <a:off x="8765978" y="3902005"/>
-            <a:ext cx="2488176" cy="1661795"/>
-          </a:xfrm>
-          <a:prstGeom prst="rect">
-            <a:avLst/>
-          </a:prstGeom>
-          <a:solidFill>
-            <a:srgbClr val="99CCFF">
-              <a:alpha val="16863"/>
-            </a:srgbClr>
-          </a:solidFill>
-        </p:spPr>
-        <p:style>
-          <a:lnRef idx="1">
-            <a:schemeClr val="accent2"/>
-          </a:lnRef>
-          <a:fillRef idx="2">
-            <a:schemeClr val="accent2"/>
-          </a:fillRef>
-          <a:effectRef idx="1">
-            <a:schemeClr val="accent2"/>
-          </a:effectRef>
-          <a:fontRef idx="minor">
-            <a:schemeClr val="dk1"/>
-          </a:fontRef>
-        </p:style>
-        <p:txBody>
-          <a:bodyPr rtlCol="0" anchor="ctr"/>
-          <a:lstStyle/>
-          <a:p>
-            <a:pPr algn="ctr"/>
-            <a:endParaRPr lang="en-US"/>
           </a:p>
         </p:txBody>
       </p:sp>
@@ -11223,7 +12212,7 @@
           <p:nvPr>
             <p:extLst>
               <p:ext uri="{D42A27DB-BD31-4B8C-83A1-F6EECF244321}">
-                <p14:modId xmlns:p14="http://schemas.microsoft.com/office/powerpoint/2010/main" val="2610221109"/>
+                <p14:modId xmlns:p14="http://schemas.microsoft.com/office/powerpoint/2010/main" val="2546136512"/>
               </p:ext>
             </p:extLst>
           </p:nvPr>
@@ -11553,10 +12542,21 @@
                     <a:lstStyle/>
                     <a:p>
                       <a:r>
-                        <a:rPr lang="sr-Latn-RS" dirty="0"/>
-                        <a:t>?</a:t>
-                      </a:r>
-                      <a:endParaRPr lang="en-US" dirty="0"/>
+                        <a:rPr lang="en-US" dirty="0"/>
+                        <a:t>GCAGTGG, </a:t>
+                      </a:r>
+                    </a:p>
+                    <a:p>
+                      <a:r>
+                        <a:rPr lang="en-US" dirty="0"/>
+                        <a:t>ACAAAGGGCAAGAAGAA,</a:t>
+                      </a:r>
+                    </a:p>
+                    <a:p>
+                      <a:r>
+                        <a:rPr lang="en-US" dirty="0"/>
+                        <a:t>GATGTTGTGGCAGAGCTTGAAGATT</a:t>
+                      </a:r>
                     </a:p>
                   </a:txBody>
                   <a:tcPr/>
@@ -11780,6 +12780,14 @@
 <file path=ppt/slides/slide4.xml><?xml version="1.0" encoding="utf-8"?>
 <p:sld xmlns:a="http://schemas.openxmlformats.org/drawingml/2006/main" xmlns:r="http://schemas.openxmlformats.org/officeDocument/2006/relationships" xmlns:p="http://schemas.openxmlformats.org/presentationml/2006/main">
   <p:cSld>
+    <p:bg>
+      <p:bgPr>
+        <a:solidFill>
+          <a:schemeClr val="bg1"/>
+        </a:solidFill>
+        <a:effectLst/>
+      </p:bgPr>
+    </p:bg>
     <p:spTree>
       <p:nvGrpSpPr>
         <p:cNvPr id="1" name=""/>
@@ -11794,6 +12802,66 @@
           <a:chExt cx="0" cy="0"/>
         </a:xfrm>
       </p:grpSpPr>
+      <p:sp useBgFill="1">
+        <p:nvSpPr>
+          <p:cNvPr id="9" name="Rectangle 8">
+            <a:extLst>
+              <a:ext uri="{FF2B5EF4-FFF2-40B4-BE49-F238E27FC236}">
+                <a16:creationId xmlns:a16="http://schemas.microsoft.com/office/drawing/2014/main" id="{100EDD19-6802-4EC3-95CE-CFFAB042CFD6}"/>
+              </a:ext>
+              <a:ext uri="{C183D7F6-B498-43B3-948B-1728B52AA6E4}">
+                <adec:decorative xmlns:adec="http://schemas.microsoft.com/office/drawing/2017/decorative" val="1"/>
+              </a:ext>
+            </a:extLst>
+          </p:cNvPr>
+          <p:cNvSpPr>
+            <a:spLocks noGrp="1" noRot="1" noChangeAspect="1" noMove="1" noResize="1" noEditPoints="1" noAdjustHandles="1" noChangeArrowheads="1" noChangeShapeType="1" noTextEdit="1"/>
+          </p:cNvSpPr>
+          <p:nvPr>
+            <p:extLst>
+              <p:ext uri="{386F3935-93C4-4BCD-93E2-E3B085C9AB24}">
+                <p16:designElem xmlns:p16="http://schemas.microsoft.com/office/powerpoint/2015/main" val="1"/>
+              </p:ext>
+            </p:extLst>
+          </p:nvPr>
+        </p:nvSpPr>
+        <p:spPr>
+          <a:xfrm>
+            <a:off x="0" y="0"/>
+            <a:ext cx="12188952" cy="6858000"/>
+          </a:xfrm>
+          <a:prstGeom prst="rect">
+            <a:avLst/>
+          </a:prstGeom>
+          <a:ln>
+            <a:noFill/>
+          </a:ln>
+        </p:spPr>
+        <p:style>
+          <a:lnRef idx="2">
+            <a:schemeClr val="accent1">
+              <a:shade val="50000"/>
+            </a:schemeClr>
+          </a:lnRef>
+          <a:fillRef idx="1">
+            <a:schemeClr val="accent1"/>
+          </a:fillRef>
+          <a:effectRef idx="0">
+            <a:schemeClr val="accent1"/>
+          </a:effectRef>
+          <a:fontRef idx="minor">
+            <a:schemeClr val="lt1"/>
+          </a:fontRef>
+        </p:style>
+        <p:txBody>
+          <a:bodyPr rtlCol="0" anchor="ctr"/>
+          <a:lstStyle/>
+          <a:p>
+            <a:pPr algn="ctr"/>
+            <a:endParaRPr lang="en-US"/>
+          </a:p>
+        </p:txBody>
+      </p:sp>
       <p:sp>
         <p:nvSpPr>
           <p:cNvPr id="2" name="Title 1">
@@ -11812,19 +12880,658 @@
         </p:nvSpPr>
         <p:spPr>
           <a:xfrm>
-            <a:off x="838200" y="125640"/>
+            <a:off x="838200" y="365125"/>
             <a:ext cx="10515600" cy="1325563"/>
           </a:xfrm>
         </p:spPr>
         <p:txBody>
-          <a:bodyPr/>
+          <a:bodyPr>
+            <a:normAutofit/>
+          </a:bodyPr>
           <a:lstStyle/>
           <a:p>
             <a:r>
-              <a:rPr lang="en-US" dirty="0" err="1"/>
+              <a:rPr lang="en-US" sz="5400" u="sng"/>
               <a:t>Optimizacije</a:t>
             </a:r>
-            <a:endParaRPr lang="en-US" dirty="0"/>
+          </a:p>
+        </p:txBody>
+      </p:sp>
+      <p:sp>
+        <p:nvSpPr>
+          <p:cNvPr id="11" name="sketch line">
+            <a:extLst>
+              <a:ext uri="{FF2B5EF4-FFF2-40B4-BE49-F238E27FC236}">
+                <a16:creationId xmlns:a16="http://schemas.microsoft.com/office/drawing/2014/main" id="{DB17E863-922E-4C26-BD64-E8FD41D28661}"/>
+              </a:ext>
+              <a:ext uri="{C183D7F6-B498-43B3-948B-1728B52AA6E4}">
+                <adec:decorative xmlns:adec="http://schemas.microsoft.com/office/drawing/2017/decorative" val="1"/>
+              </a:ext>
+            </a:extLst>
+          </p:cNvPr>
+          <p:cNvSpPr>
+            <a:spLocks noGrp="1" noRot="1" noChangeAspect="1" noMove="1" noResize="1" noEditPoints="1" noAdjustHandles="1" noChangeArrowheads="1" noChangeShapeType="1" noTextEdit="1"/>
+          </p:cNvSpPr>
+          <p:nvPr>
+            <p:extLst>
+              <p:ext uri="{386F3935-93C4-4BCD-93E2-E3B085C9AB24}">
+                <p16:designElem xmlns:p16="http://schemas.microsoft.com/office/powerpoint/2015/main" val="1"/>
+              </p:ext>
+            </p:extLst>
+          </p:nvPr>
+        </p:nvSpPr>
+        <p:spPr>
+          <a:xfrm>
+            <a:off x="669036" y="1677373"/>
+            <a:ext cx="10853928" cy="18288"/>
+          </a:xfrm>
+          <a:custGeom>
+            <a:avLst/>
+            <a:gdLst>
+              <a:gd name="connsiteX0" fmla="*/ 0 w 10853928"/>
+              <a:gd name="connsiteY0" fmla="*/ 0 h 18288"/>
+              <a:gd name="connsiteX1" fmla="*/ 461292 w 10853928"/>
+              <a:gd name="connsiteY1" fmla="*/ 0 h 18288"/>
+              <a:gd name="connsiteX2" fmla="*/ 1139662 w 10853928"/>
+              <a:gd name="connsiteY2" fmla="*/ 0 h 18288"/>
+              <a:gd name="connsiteX3" fmla="*/ 1926572 w 10853928"/>
+              <a:gd name="connsiteY3" fmla="*/ 0 h 18288"/>
+              <a:gd name="connsiteX4" fmla="*/ 2279325 w 10853928"/>
+              <a:gd name="connsiteY4" fmla="*/ 0 h 18288"/>
+              <a:gd name="connsiteX5" fmla="*/ 2632078 w 10853928"/>
+              <a:gd name="connsiteY5" fmla="*/ 0 h 18288"/>
+              <a:gd name="connsiteX6" fmla="*/ 3527527 w 10853928"/>
+              <a:gd name="connsiteY6" fmla="*/ 0 h 18288"/>
+              <a:gd name="connsiteX7" fmla="*/ 4205897 w 10853928"/>
+              <a:gd name="connsiteY7" fmla="*/ 0 h 18288"/>
+              <a:gd name="connsiteX8" fmla="*/ 4558650 w 10853928"/>
+              <a:gd name="connsiteY8" fmla="*/ 0 h 18288"/>
+              <a:gd name="connsiteX9" fmla="*/ 5237020 w 10853928"/>
+              <a:gd name="connsiteY9" fmla="*/ 0 h 18288"/>
+              <a:gd name="connsiteX10" fmla="*/ 6132469 w 10853928"/>
+              <a:gd name="connsiteY10" fmla="*/ 0 h 18288"/>
+              <a:gd name="connsiteX11" fmla="*/ 6702301 w 10853928"/>
+              <a:gd name="connsiteY11" fmla="*/ 0 h 18288"/>
+              <a:gd name="connsiteX12" fmla="*/ 7272132 w 10853928"/>
+              <a:gd name="connsiteY12" fmla="*/ 0 h 18288"/>
+              <a:gd name="connsiteX13" fmla="*/ 7950502 w 10853928"/>
+              <a:gd name="connsiteY13" fmla="*/ 0 h 18288"/>
+              <a:gd name="connsiteX14" fmla="*/ 8737412 w 10853928"/>
+              <a:gd name="connsiteY14" fmla="*/ 0 h 18288"/>
+              <a:gd name="connsiteX15" fmla="*/ 9524322 w 10853928"/>
+              <a:gd name="connsiteY15" fmla="*/ 0 h 18288"/>
+              <a:gd name="connsiteX16" fmla="*/ 10853928 w 10853928"/>
+              <a:gd name="connsiteY16" fmla="*/ 0 h 18288"/>
+              <a:gd name="connsiteX17" fmla="*/ 10853928 w 10853928"/>
+              <a:gd name="connsiteY17" fmla="*/ 18288 h 18288"/>
+              <a:gd name="connsiteX18" fmla="*/ 10392636 w 10853928"/>
+              <a:gd name="connsiteY18" fmla="*/ 18288 h 18288"/>
+              <a:gd name="connsiteX19" fmla="*/ 9497187 w 10853928"/>
+              <a:gd name="connsiteY19" fmla="*/ 18288 h 18288"/>
+              <a:gd name="connsiteX20" fmla="*/ 8818817 w 10853928"/>
+              <a:gd name="connsiteY20" fmla="*/ 18288 h 18288"/>
+              <a:gd name="connsiteX21" fmla="*/ 8466064 w 10853928"/>
+              <a:gd name="connsiteY21" fmla="*/ 18288 h 18288"/>
+              <a:gd name="connsiteX22" fmla="*/ 7787693 w 10853928"/>
+              <a:gd name="connsiteY22" fmla="*/ 18288 h 18288"/>
+              <a:gd name="connsiteX23" fmla="*/ 7217862 w 10853928"/>
+              <a:gd name="connsiteY23" fmla="*/ 18288 h 18288"/>
+              <a:gd name="connsiteX24" fmla="*/ 6648031 w 10853928"/>
+              <a:gd name="connsiteY24" fmla="*/ 18288 h 18288"/>
+              <a:gd name="connsiteX25" fmla="*/ 6078200 w 10853928"/>
+              <a:gd name="connsiteY25" fmla="*/ 18288 h 18288"/>
+              <a:gd name="connsiteX26" fmla="*/ 5508368 w 10853928"/>
+              <a:gd name="connsiteY26" fmla="*/ 18288 h 18288"/>
+              <a:gd name="connsiteX27" fmla="*/ 4721459 w 10853928"/>
+              <a:gd name="connsiteY27" fmla="*/ 18288 h 18288"/>
+              <a:gd name="connsiteX28" fmla="*/ 4043088 w 10853928"/>
+              <a:gd name="connsiteY28" fmla="*/ 18288 h 18288"/>
+              <a:gd name="connsiteX29" fmla="*/ 3690336 w 10853928"/>
+              <a:gd name="connsiteY29" fmla="*/ 18288 h 18288"/>
+              <a:gd name="connsiteX30" fmla="*/ 3120504 w 10853928"/>
+              <a:gd name="connsiteY30" fmla="*/ 18288 h 18288"/>
+              <a:gd name="connsiteX31" fmla="*/ 2333595 w 10853928"/>
+              <a:gd name="connsiteY31" fmla="*/ 18288 h 18288"/>
+              <a:gd name="connsiteX32" fmla="*/ 1872303 w 10853928"/>
+              <a:gd name="connsiteY32" fmla="*/ 18288 h 18288"/>
+              <a:gd name="connsiteX33" fmla="*/ 976854 w 10853928"/>
+              <a:gd name="connsiteY33" fmla="*/ 18288 h 18288"/>
+              <a:gd name="connsiteX34" fmla="*/ 0 w 10853928"/>
+              <a:gd name="connsiteY34" fmla="*/ 18288 h 18288"/>
+              <a:gd name="connsiteX35" fmla="*/ 0 w 10853928"/>
+              <a:gd name="connsiteY35" fmla="*/ 0 h 18288"/>
+            </a:gdLst>
+            <a:ahLst/>
+            <a:cxnLst>
+              <a:cxn ang="0">
+                <a:pos x="connsiteX0" y="connsiteY0"/>
+              </a:cxn>
+              <a:cxn ang="0">
+                <a:pos x="connsiteX1" y="connsiteY1"/>
+              </a:cxn>
+              <a:cxn ang="0">
+                <a:pos x="connsiteX2" y="connsiteY2"/>
+              </a:cxn>
+              <a:cxn ang="0">
+                <a:pos x="connsiteX3" y="connsiteY3"/>
+              </a:cxn>
+              <a:cxn ang="0">
+                <a:pos x="connsiteX4" y="connsiteY4"/>
+              </a:cxn>
+              <a:cxn ang="0">
+                <a:pos x="connsiteX5" y="connsiteY5"/>
+              </a:cxn>
+              <a:cxn ang="0">
+                <a:pos x="connsiteX6" y="connsiteY6"/>
+              </a:cxn>
+              <a:cxn ang="0">
+                <a:pos x="connsiteX7" y="connsiteY7"/>
+              </a:cxn>
+              <a:cxn ang="0">
+                <a:pos x="connsiteX8" y="connsiteY8"/>
+              </a:cxn>
+              <a:cxn ang="0">
+                <a:pos x="connsiteX9" y="connsiteY9"/>
+              </a:cxn>
+              <a:cxn ang="0">
+                <a:pos x="connsiteX10" y="connsiteY10"/>
+              </a:cxn>
+              <a:cxn ang="0">
+                <a:pos x="connsiteX11" y="connsiteY11"/>
+              </a:cxn>
+              <a:cxn ang="0">
+                <a:pos x="connsiteX12" y="connsiteY12"/>
+              </a:cxn>
+              <a:cxn ang="0">
+                <a:pos x="connsiteX13" y="connsiteY13"/>
+              </a:cxn>
+              <a:cxn ang="0">
+                <a:pos x="connsiteX14" y="connsiteY14"/>
+              </a:cxn>
+              <a:cxn ang="0">
+                <a:pos x="connsiteX15" y="connsiteY15"/>
+              </a:cxn>
+              <a:cxn ang="0">
+                <a:pos x="connsiteX16" y="connsiteY16"/>
+              </a:cxn>
+              <a:cxn ang="0">
+                <a:pos x="connsiteX17" y="connsiteY17"/>
+              </a:cxn>
+              <a:cxn ang="0">
+                <a:pos x="connsiteX18" y="connsiteY18"/>
+              </a:cxn>
+              <a:cxn ang="0">
+                <a:pos x="connsiteX19" y="connsiteY19"/>
+              </a:cxn>
+              <a:cxn ang="0">
+                <a:pos x="connsiteX20" y="connsiteY20"/>
+              </a:cxn>
+              <a:cxn ang="0">
+                <a:pos x="connsiteX21" y="connsiteY21"/>
+              </a:cxn>
+              <a:cxn ang="0">
+                <a:pos x="connsiteX22" y="connsiteY22"/>
+              </a:cxn>
+              <a:cxn ang="0">
+                <a:pos x="connsiteX23" y="connsiteY23"/>
+              </a:cxn>
+              <a:cxn ang="0">
+                <a:pos x="connsiteX24" y="connsiteY24"/>
+              </a:cxn>
+              <a:cxn ang="0">
+                <a:pos x="connsiteX25" y="connsiteY25"/>
+              </a:cxn>
+              <a:cxn ang="0">
+                <a:pos x="connsiteX26" y="connsiteY26"/>
+              </a:cxn>
+              <a:cxn ang="0">
+                <a:pos x="connsiteX27" y="connsiteY27"/>
+              </a:cxn>
+              <a:cxn ang="0">
+                <a:pos x="connsiteX28" y="connsiteY28"/>
+              </a:cxn>
+              <a:cxn ang="0">
+                <a:pos x="connsiteX29" y="connsiteY29"/>
+              </a:cxn>
+              <a:cxn ang="0">
+                <a:pos x="connsiteX30" y="connsiteY30"/>
+              </a:cxn>
+              <a:cxn ang="0">
+                <a:pos x="connsiteX31" y="connsiteY31"/>
+              </a:cxn>
+              <a:cxn ang="0">
+                <a:pos x="connsiteX32" y="connsiteY32"/>
+              </a:cxn>
+              <a:cxn ang="0">
+                <a:pos x="connsiteX33" y="connsiteY33"/>
+              </a:cxn>
+              <a:cxn ang="0">
+                <a:pos x="connsiteX34" y="connsiteY34"/>
+              </a:cxn>
+              <a:cxn ang="0">
+                <a:pos x="connsiteX35" y="connsiteY35"/>
+              </a:cxn>
+            </a:cxnLst>
+            <a:rect l="l" t="t" r="r" b="b"/>
+            <a:pathLst>
+              <a:path w="10853928" h="18288" fill="none" extrusionOk="0">
+                <a:moveTo>
+                  <a:pt x="0" y="0"/>
+                </a:moveTo>
+                <a:cubicBezTo>
+                  <a:pt x="146993" y="-19076"/>
+                  <a:pt x="347684" y="-4790"/>
+                  <a:pt x="461292" y="0"/>
+                </a:cubicBezTo>
+                <a:cubicBezTo>
+                  <a:pt x="574900" y="4790"/>
+                  <a:pt x="808367" y="19821"/>
+                  <a:pt x="1139662" y="0"/>
+                </a:cubicBezTo>
+                <a:cubicBezTo>
+                  <a:pt x="1470957" y="-19821"/>
+                  <a:pt x="1627405" y="5721"/>
+                  <a:pt x="1926572" y="0"/>
+                </a:cubicBezTo>
+                <a:cubicBezTo>
+                  <a:pt x="2225739" y="-5721"/>
+                  <a:pt x="2137730" y="-3235"/>
+                  <a:pt x="2279325" y="0"/>
+                </a:cubicBezTo>
+                <a:cubicBezTo>
+                  <a:pt x="2420920" y="3235"/>
+                  <a:pt x="2456518" y="9685"/>
+                  <a:pt x="2632078" y="0"/>
+                </a:cubicBezTo>
+                <a:cubicBezTo>
+                  <a:pt x="2807638" y="-9685"/>
+                  <a:pt x="3211516" y="-43007"/>
+                  <a:pt x="3527527" y="0"/>
+                </a:cubicBezTo>
+                <a:cubicBezTo>
+                  <a:pt x="3843538" y="43007"/>
+                  <a:pt x="4058833" y="22042"/>
+                  <a:pt x="4205897" y="0"/>
+                </a:cubicBezTo>
+                <a:cubicBezTo>
+                  <a:pt x="4352961" y="-22042"/>
+                  <a:pt x="4474805" y="-11846"/>
+                  <a:pt x="4558650" y="0"/>
+                </a:cubicBezTo>
+                <a:cubicBezTo>
+                  <a:pt x="4642495" y="11846"/>
+                  <a:pt x="5041928" y="-6069"/>
+                  <a:pt x="5237020" y="0"/>
+                </a:cubicBezTo>
+                <a:cubicBezTo>
+                  <a:pt x="5432112" y="6069"/>
+                  <a:pt x="5943266" y="-17479"/>
+                  <a:pt x="6132469" y="0"/>
+                </a:cubicBezTo>
+                <a:cubicBezTo>
+                  <a:pt x="6321672" y="17479"/>
+                  <a:pt x="6483872" y="26234"/>
+                  <a:pt x="6702301" y="0"/>
+                </a:cubicBezTo>
+                <a:cubicBezTo>
+                  <a:pt x="6920730" y="-26234"/>
+                  <a:pt x="6991194" y="-15156"/>
+                  <a:pt x="7272132" y="0"/>
+                </a:cubicBezTo>
+                <a:cubicBezTo>
+                  <a:pt x="7553070" y="15156"/>
+                  <a:pt x="7684444" y="-32961"/>
+                  <a:pt x="7950502" y="0"/>
+                </a:cubicBezTo>
+                <a:cubicBezTo>
+                  <a:pt x="8216560" y="32961"/>
+                  <a:pt x="8493290" y="-10491"/>
+                  <a:pt x="8737412" y="0"/>
+                </a:cubicBezTo>
+                <a:cubicBezTo>
+                  <a:pt x="8981534" y="10491"/>
+                  <a:pt x="9191586" y="-13899"/>
+                  <a:pt x="9524322" y="0"/>
+                </a:cubicBezTo>
+                <a:cubicBezTo>
+                  <a:pt x="9857058" y="13899"/>
+                  <a:pt x="10297509" y="7485"/>
+                  <a:pt x="10853928" y="0"/>
+                </a:cubicBezTo>
+                <a:cubicBezTo>
+                  <a:pt x="10854574" y="4451"/>
+                  <a:pt x="10854418" y="9226"/>
+                  <a:pt x="10853928" y="18288"/>
+                </a:cubicBezTo>
+                <a:cubicBezTo>
+                  <a:pt x="10691638" y="28522"/>
+                  <a:pt x="10574319" y="29578"/>
+                  <a:pt x="10392636" y="18288"/>
+                </a:cubicBezTo>
+                <a:cubicBezTo>
+                  <a:pt x="10210953" y="6998"/>
+                  <a:pt x="9836277" y="-16742"/>
+                  <a:pt x="9497187" y="18288"/>
+                </a:cubicBezTo>
+                <a:cubicBezTo>
+                  <a:pt x="9158097" y="53318"/>
+                  <a:pt x="9119479" y="30714"/>
+                  <a:pt x="8818817" y="18288"/>
+                </a:cubicBezTo>
+                <a:cubicBezTo>
+                  <a:pt x="8518155" y="5863"/>
+                  <a:pt x="8640037" y="6483"/>
+                  <a:pt x="8466064" y="18288"/>
+                </a:cubicBezTo>
+                <a:cubicBezTo>
+                  <a:pt x="8292091" y="30093"/>
+                  <a:pt x="7997656" y="18914"/>
+                  <a:pt x="7787693" y="18288"/>
+                </a:cubicBezTo>
+                <a:cubicBezTo>
+                  <a:pt x="7577730" y="17662"/>
+                  <a:pt x="7412468" y="21416"/>
+                  <a:pt x="7217862" y="18288"/>
+                </a:cubicBezTo>
+                <a:cubicBezTo>
+                  <a:pt x="7023256" y="15160"/>
+                  <a:pt x="6898018" y="14824"/>
+                  <a:pt x="6648031" y="18288"/>
+                </a:cubicBezTo>
+                <a:cubicBezTo>
+                  <a:pt x="6398044" y="21752"/>
+                  <a:pt x="6254402" y="38625"/>
+                  <a:pt x="6078200" y="18288"/>
+                </a:cubicBezTo>
+                <a:cubicBezTo>
+                  <a:pt x="5901998" y="-2049"/>
+                  <a:pt x="5622886" y="3213"/>
+                  <a:pt x="5508368" y="18288"/>
+                </a:cubicBezTo>
+                <a:cubicBezTo>
+                  <a:pt x="5393850" y="33363"/>
+                  <a:pt x="5036260" y="26830"/>
+                  <a:pt x="4721459" y="18288"/>
+                </a:cubicBezTo>
+                <a:cubicBezTo>
+                  <a:pt x="4406658" y="9746"/>
+                  <a:pt x="4239221" y="41551"/>
+                  <a:pt x="4043088" y="18288"/>
+                </a:cubicBezTo>
+                <a:cubicBezTo>
+                  <a:pt x="3846955" y="-4975"/>
+                  <a:pt x="3818802" y="34658"/>
+                  <a:pt x="3690336" y="18288"/>
+                </a:cubicBezTo>
+                <a:cubicBezTo>
+                  <a:pt x="3561870" y="1918"/>
+                  <a:pt x="3265491" y="42194"/>
+                  <a:pt x="3120504" y="18288"/>
+                </a:cubicBezTo>
+                <a:cubicBezTo>
+                  <a:pt x="2975517" y="-5618"/>
+                  <a:pt x="2720254" y="36673"/>
+                  <a:pt x="2333595" y="18288"/>
+                </a:cubicBezTo>
+                <a:cubicBezTo>
+                  <a:pt x="1946936" y="-97"/>
+                  <a:pt x="2097241" y="5776"/>
+                  <a:pt x="1872303" y="18288"/>
+                </a:cubicBezTo>
+                <a:cubicBezTo>
+                  <a:pt x="1647365" y="30800"/>
+                  <a:pt x="1282708" y="45380"/>
+                  <a:pt x="976854" y="18288"/>
+                </a:cubicBezTo>
+                <a:cubicBezTo>
+                  <a:pt x="671000" y="-8804"/>
+                  <a:pt x="408401" y="-12775"/>
+                  <a:pt x="0" y="18288"/>
+                </a:cubicBezTo>
+                <a:cubicBezTo>
+                  <a:pt x="-213" y="9468"/>
+                  <a:pt x="187" y="4459"/>
+                  <a:pt x="0" y="0"/>
+                </a:cubicBezTo>
+                <a:close/>
+              </a:path>
+              <a:path w="10853928" h="18288" stroke="0" extrusionOk="0">
+                <a:moveTo>
+                  <a:pt x="0" y="0"/>
+                </a:moveTo>
+                <a:cubicBezTo>
+                  <a:pt x="267322" y="15284"/>
+                  <a:pt x="415388" y="-21048"/>
+                  <a:pt x="569831" y="0"/>
+                </a:cubicBezTo>
+                <a:cubicBezTo>
+                  <a:pt x="724274" y="21048"/>
+                  <a:pt x="769333" y="-2353"/>
+                  <a:pt x="922584" y="0"/>
+                </a:cubicBezTo>
+                <a:cubicBezTo>
+                  <a:pt x="1075835" y="2353"/>
+                  <a:pt x="1399490" y="-145"/>
+                  <a:pt x="1818033" y="0"/>
+                </a:cubicBezTo>
+                <a:cubicBezTo>
+                  <a:pt x="2236576" y="145"/>
+                  <a:pt x="2145330" y="5482"/>
+                  <a:pt x="2387864" y="0"/>
+                </a:cubicBezTo>
+                <a:cubicBezTo>
+                  <a:pt x="2630398" y="-5482"/>
+                  <a:pt x="2793207" y="18487"/>
+                  <a:pt x="2957695" y="0"/>
+                </a:cubicBezTo>
+                <a:cubicBezTo>
+                  <a:pt x="3122183" y="-18487"/>
+                  <a:pt x="3579141" y="19003"/>
+                  <a:pt x="3853144" y="0"/>
+                </a:cubicBezTo>
+                <a:cubicBezTo>
+                  <a:pt x="4127147" y="-19003"/>
+                  <a:pt x="4209857" y="12211"/>
+                  <a:pt x="4314436" y="0"/>
+                </a:cubicBezTo>
+                <a:cubicBezTo>
+                  <a:pt x="4419015" y="-12211"/>
+                  <a:pt x="4762459" y="-17220"/>
+                  <a:pt x="5209885" y="0"/>
+                </a:cubicBezTo>
+                <a:cubicBezTo>
+                  <a:pt x="5657311" y="17220"/>
+                  <a:pt x="5692663" y="-3290"/>
+                  <a:pt x="6105335" y="0"/>
+                </a:cubicBezTo>
+                <a:cubicBezTo>
+                  <a:pt x="6518007" y="3290"/>
+                  <a:pt x="6455516" y="-5124"/>
+                  <a:pt x="6783705" y="0"/>
+                </a:cubicBezTo>
+                <a:cubicBezTo>
+                  <a:pt x="7111894" y="5124"/>
+                  <a:pt x="7441941" y="-17829"/>
+                  <a:pt x="7679154" y="0"/>
+                </a:cubicBezTo>
+                <a:cubicBezTo>
+                  <a:pt x="7916367" y="17829"/>
+                  <a:pt x="8102967" y="-24363"/>
+                  <a:pt x="8248985" y="0"/>
+                </a:cubicBezTo>
+                <a:cubicBezTo>
+                  <a:pt x="8395003" y="24363"/>
+                  <a:pt x="8552393" y="25505"/>
+                  <a:pt x="8818817" y="0"/>
+                </a:cubicBezTo>
+                <a:cubicBezTo>
+                  <a:pt x="9085241" y="-25505"/>
+                  <a:pt x="9411308" y="38000"/>
+                  <a:pt x="9605726" y="0"/>
+                </a:cubicBezTo>
+                <a:cubicBezTo>
+                  <a:pt x="9800144" y="-38000"/>
+                  <a:pt x="10006468" y="-25741"/>
+                  <a:pt x="10175558" y="0"/>
+                </a:cubicBezTo>
+                <a:cubicBezTo>
+                  <a:pt x="10344648" y="25741"/>
+                  <a:pt x="10696282" y="695"/>
+                  <a:pt x="10853928" y="0"/>
+                </a:cubicBezTo>
+                <a:cubicBezTo>
+                  <a:pt x="10853521" y="8690"/>
+                  <a:pt x="10853774" y="14141"/>
+                  <a:pt x="10853928" y="18288"/>
+                </a:cubicBezTo>
+                <a:cubicBezTo>
+                  <a:pt x="10608124" y="24255"/>
+                  <a:pt x="10343415" y="22307"/>
+                  <a:pt x="10067018" y="18288"/>
+                </a:cubicBezTo>
+                <a:cubicBezTo>
+                  <a:pt x="9790621" y="14270"/>
+                  <a:pt x="9843266" y="3564"/>
+                  <a:pt x="9714266" y="18288"/>
+                </a:cubicBezTo>
+                <a:cubicBezTo>
+                  <a:pt x="9585266" y="33012"/>
+                  <a:pt x="9379484" y="1875"/>
+                  <a:pt x="9252974" y="18288"/>
+                </a:cubicBezTo>
+                <a:cubicBezTo>
+                  <a:pt x="9126464" y="34701"/>
+                  <a:pt x="8580678" y="-4904"/>
+                  <a:pt x="8357525" y="18288"/>
+                </a:cubicBezTo>
+                <a:cubicBezTo>
+                  <a:pt x="8134372" y="41480"/>
+                  <a:pt x="7903199" y="26458"/>
+                  <a:pt x="7679154" y="18288"/>
+                </a:cubicBezTo>
+                <a:cubicBezTo>
+                  <a:pt x="7455109" y="10118"/>
+                  <a:pt x="7435944" y="27109"/>
+                  <a:pt x="7217862" y="18288"/>
+                </a:cubicBezTo>
+                <a:cubicBezTo>
+                  <a:pt x="6999780" y="9467"/>
+                  <a:pt x="6680409" y="18985"/>
+                  <a:pt x="6539492" y="18288"/>
+                </a:cubicBezTo>
+                <a:cubicBezTo>
+                  <a:pt x="6398575" y="17592"/>
+                  <a:pt x="6312077" y="33018"/>
+                  <a:pt x="6186739" y="18288"/>
+                </a:cubicBezTo>
+                <a:cubicBezTo>
+                  <a:pt x="6061401" y="3558"/>
+                  <a:pt x="5947033" y="12075"/>
+                  <a:pt x="5833986" y="18288"/>
+                </a:cubicBezTo>
+                <a:cubicBezTo>
+                  <a:pt x="5720939" y="24501"/>
+                  <a:pt x="5482226" y="8586"/>
+                  <a:pt x="5155616" y="18288"/>
+                </a:cubicBezTo>
+                <a:cubicBezTo>
+                  <a:pt x="4829006" y="27991"/>
+                  <a:pt x="4841274" y="29316"/>
+                  <a:pt x="4694324" y="18288"/>
+                </a:cubicBezTo>
+                <a:cubicBezTo>
+                  <a:pt x="4547374" y="7260"/>
+                  <a:pt x="4077675" y="7013"/>
+                  <a:pt x="3907414" y="18288"/>
+                </a:cubicBezTo>
+                <a:cubicBezTo>
+                  <a:pt x="3737153" y="29564"/>
+                  <a:pt x="3538393" y="21630"/>
+                  <a:pt x="3446122" y="18288"/>
+                </a:cubicBezTo>
+                <a:cubicBezTo>
+                  <a:pt x="3353851" y="14946"/>
+                  <a:pt x="2990320" y="-8091"/>
+                  <a:pt x="2659212" y="18288"/>
+                </a:cubicBezTo>
+                <a:cubicBezTo>
+                  <a:pt x="2328104" y="44667"/>
+                  <a:pt x="2427653" y="9607"/>
+                  <a:pt x="2306460" y="18288"/>
+                </a:cubicBezTo>
+                <a:cubicBezTo>
+                  <a:pt x="2185267" y="26969"/>
+                  <a:pt x="1719763" y="3717"/>
+                  <a:pt x="1519550" y="18288"/>
+                </a:cubicBezTo>
+                <a:cubicBezTo>
+                  <a:pt x="1319337" y="32860"/>
+                  <a:pt x="1167371" y="17040"/>
+                  <a:pt x="1058258" y="18288"/>
+                </a:cubicBezTo>
+                <a:cubicBezTo>
+                  <a:pt x="949145" y="19536"/>
+                  <a:pt x="780234" y="31447"/>
+                  <a:pt x="705505" y="18288"/>
+                </a:cubicBezTo>
+                <a:cubicBezTo>
+                  <a:pt x="630776" y="5129"/>
+                  <a:pt x="215796" y="30056"/>
+                  <a:pt x="0" y="18288"/>
+                </a:cubicBezTo>
+                <a:cubicBezTo>
+                  <a:pt x="-53" y="11301"/>
+                  <a:pt x="-649" y="7756"/>
+                  <a:pt x="0" y="0"/>
+                </a:cubicBezTo>
+                <a:close/>
+              </a:path>
+            </a:pathLst>
+          </a:custGeom>
+          <a:solidFill>
+            <a:schemeClr val="accent2"/>
+          </a:solidFill>
+          <a:ln w="41275" cap="rnd">
+            <a:solidFill>
+              <a:schemeClr val="accent2"/>
+            </a:solidFill>
+            <a:round/>
+            <a:extLst>
+              <a:ext uri="{C807C97D-BFC1-408E-A445-0C87EB9F89A2}">
+                <ask:lineSketchStyleProps xmlns:ask="http://schemas.microsoft.com/office/drawing/2018/sketchyshapes" sd="1219033472">
+                  <a:prstGeom prst="rect">
+                    <a:avLst/>
+                  </a:prstGeom>
+                  <ask:type>
+                    <ask:lineSketchFreehand/>
+                  </ask:type>
+                </ask:lineSketchStyleProps>
+              </a:ext>
+            </a:extLst>
+          </a:ln>
+        </p:spPr>
+        <p:style>
+          <a:lnRef idx="2">
+            <a:schemeClr val="accent1">
+              <a:shade val="50000"/>
+            </a:schemeClr>
+          </a:lnRef>
+          <a:fillRef idx="1">
+            <a:schemeClr val="accent1"/>
+          </a:fillRef>
+          <a:effectRef idx="0">
+            <a:schemeClr val="accent1"/>
+          </a:effectRef>
+          <a:fontRef idx="minor">
+            <a:schemeClr val="lt1"/>
+          </a:fontRef>
+        </p:style>
+        <p:txBody>
+          <a:bodyPr rtlCol="0" anchor="ctr"/>
+          <a:lstStyle/>
+          <a:p>
+            <a:pPr algn="ctr"/>
+            <a:endParaRPr lang="en-US"/>
           </a:p>
         </p:txBody>
       </p:sp>
@@ -11846,13 +13553,13 @@
         </p:nvSpPr>
         <p:spPr>
           <a:xfrm>
-            <a:off x="620485" y="1345747"/>
-            <a:ext cx="10515600" cy="2086655"/>
+            <a:off x="838200" y="1929384"/>
+            <a:ext cx="10515600" cy="4251960"/>
           </a:xfrm>
         </p:spPr>
         <p:txBody>
           <a:bodyPr>
-            <a:normAutofit fontScale="85000" lnSpcReduction="20000"/>
+            <a:normAutofit/>
           </a:bodyPr>
           <a:lstStyle/>
           <a:p>
@@ -11860,119 +13567,22 @@
               <a:buNone/>
             </a:pPr>
             <a:r>
-              <a:rPr lang="en-US" sz="3200" dirty="0" err="1"/>
-              <a:t>Konstrukcija</a:t>
-            </a:r>
-            <a:r>
-              <a:rPr lang="en-US" sz="3200" dirty="0"/>
-              <a:t> BWT </a:t>
-            </a:r>
-            <a:r>
-              <a:rPr lang="en-US" sz="3200" dirty="0" err="1"/>
-              <a:t>i</a:t>
-            </a:r>
-            <a:r>
-              <a:rPr lang="en-US" sz="3200" dirty="0"/>
-              <a:t> SA</a:t>
-            </a:r>
-          </a:p>
-          <a:p>
-            <a:r>
-              <a:rPr lang="en-US" sz="3200" dirty="0" err="1"/>
-              <a:t>Naivni</a:t>
-            </a:r>
-            <a:r>
-              <a:rPr lang="en-US" sz="3200" dirty="0"/>
-              <a:t> </a:t>
-            </a:r>
-            <a:r>
-              <a:rPr lang="en-US" sz="3200" dirty="0" err="1"/>
-              <a:t>pristup</a:t>
-            </a:r>
-            <a:r>
-              <a:rPr lang="en-US" sz="3200" dirty="0"/>
-              <a:t> </a:t>
-            </a:r>
-            <a:r>
-              <a:rPr lang="en-US" sz="3200" dirty="0" err="1"/>
-              <a:t>sa</a:t>
-            </a:r>
-            <a:r>
-              <a:rPr lang="en-US" sz="3200" dirty="0"/>
-              <a:t> </a:t>
-            </a:r>
-            <a:r>
-              <a:rPr lang="en-US" sz="3200" dirty="0" err="1"/>
-              <a:t>sortiranjem</a:t>
-            </a:r>
-            <a:r>
-              <a:rPr lang="en-US" sz="3200" dirty="0"/>
-              <a:t> </a:t>
-            </a:r>
-            <a:r>
-              <a:rPr lang="en-US" sz="3200" dirty="0" err="1"/>
-              <a:t>rotacija</a:t>
-            </a:r>
-            <a:r>
-              <a:rPr lang="en-US" sz="3200" dirty="0"/>
-              <a:t> je O(n² log n),</a:t>
-            </a:r>
+              <a:rPr lang="en-US" sz="2200" b="1"/>
+              <a:t>1) Konstrukcija BWT i SA - divsufsort</a:t>
+            </a:r>
+            <a:r>
+              <a:rPr lang="en-US" sz="2200"/>
+              <a:t> jedan od najbržih poznatih algoritama </a:t>
+            </a:r>
+            <a:endParaRPr lang="en-US" sz="2200" b="1"/>
           </a:p>
           <a:p>
             <a:pPr marL="0" indent="0">
               <a:buNone/>
             </a:pPr>
             <a:r>
-              <a:rPr lang="en-US" sz="3200" dirty="0"/>
-              <a:t> </a:t>
-            </a:r>
-            <a:r>
-              <a:rPr lang="en-US" sz="3200" dirty="0" err="1"/>
-              <a:t>dok</a:t>
-            </a:r>
-            <a:r>
-              <a:rPr lang="en-US" sz="3200" dirty="0"/>
-              <a:t> je </a:t>
-            </a:r>
-            <a:r>
-              <a:rPr lang="en-US" sz="3200" b="1" dirty="0" err="1"/>
-              <a:t>divsufsort</a:t>
-            </a:r>
-            <a:r>
-              <a:rPr lang="en-US" sz="3200" dirty="0"/>
-              <a:t> </a:t>
-            </a:r>
-            <a:r>
-              <a:rPr lang="en-US" sz="3200" dirty="0" err="1"/>
-              <a:t>jedan</a:t>
-            </a:r>
-            <a:r>
-              <a:rPr lang="en-US" sz="3200" dirty="0"/>
-              <a:t> od </a:t>
-            </a:r>
-            <a:r>
-              <a:rPr lang="en-US" sz="3200" dirty="0" err="1"/>
-              <a:t>najbržih</a:t>
-            </a:r>
-            <a:r>
-              <a:rPr lang="en-US" sz="3200" dirty="0"/>
-              <a:t> </a:t>
-            </a:r>
-            <a:r>
-              <a:rPr lang="en-US" sz="3200" dirty="0" err="1"/>
-              <a:t>poznatih</a:t>
-            </a:r>
-            <a:r>
-              <a:rPr lang="en-US" sz="3200" dirty="0"/>
-              <a:t> </a:t>
-            </a:r>
-            <a:r>
-              <a:rPr lang="en-US" sz="3200" dirty="0" err="1"/>
-              <a:t>algoritama</a:t>
-            </a:r>
-            <a:r>
-              <a:rPr lang="en-US" sz="3200" dirty="0"/>
-              <a:t> </a:t>
+              <a:rPr lang="en-US" sz="2200"/>
+              <a:t>Naivni pristup sa sortiranjem rotacija je O(n² log n), dok je divsufsort:</a:t>
             </a:r>
           </a:p>
           <a:p>
@@ -11980,7 +13590,7 @@
               <a:buNone/>
             </a:pPr>
             <a:r>
-              <a:rPr lang="en-US" sz="3200" dirty="0"/>
+              <a:rPr lang="en-US" sz="2200"/>
               <a:t>Worst-case time: O(n log n) </a:t>
             </a:r>
           </a:p>
@@ -11989,9 +13599,241 @@
               <a:buNone/>
             </a:pPr>
             <a:r>
-              <a:rPr lang="en-US" sz="3200" dirty="0"/>
+              <a:rPr lang="en-US" sz="2200"/>
               <a:t>Memory space: 5n+O(1) bytes </a:t>
             </a:r>
+          </a:p>
+          <a:p>
+            <a:pPr marL="0" indent="0">
+              <a:buNone/>
+            </a:pPr>
+            <a:r>
+              <a:rPr lang="en-US" sz="2200" b="1"/>
+              <a:t>2) Kontrolne tačke (Checkpointing):</a:t>
+            </a:r>
+            <a:r>
+              <a:rPr lang="en-US" sz="2200"/>
+              <a:t> Čuva broj karaktera samo u fiksnim intervalima (npr. svaka 128. pozicija). Da bi se pronašao broj na bilo kojoj drugoj poziciji, preuzima najbližu kontrolnu tačku (checkpoint) i izračunava preostali broj.</a:t>
+            </a:r>
+          </a:p>
+          <a:p>
+            <a:pPr marL="0" indent="0">
+              <a:buNone/>
+            </a:pPr>
+            <a:endParaRPr lang="en-US" sz="2200"/>
+          </a:p>
+          <a:p>
+            <a:pPr marL="0" indent="0">
+              <a:buNone/>
+            </a:pPr>
+            <a:r>
+              <a:rPr lang="en-US" sz="2200" b="1"/>
+              <a:t>3) Uzorkovanje sufiksnog niza: </a:t>
+            </a:r>
+            <a:r>
+              <a:rPr lang="en-US" sz="2200"/>
+              <a:t>Čuva samo svaki k-ti unos sufiksnog niza. Pozicije koje nisu direktno sačuvane rešavaju se korišćenjem koraka unazad sa BWT-om.</a:t>
+            </a:r>
+          </a:p>
+        </p:txBody>
+      </p:sp>
+      <p:sp>
+        <p:nvSpPr>
+          <p:cNvPr id="4" name="Content Placeholder 2">
+            <a:extLst>
+              <a:ext uri="{FF2B5EF4-FFF2-40B4-BE49-F238E27FC236}">
+                <a16:creationId xmlns:a16="http://schemas.microsoft.com/office/drawing/2014/main" id="{68B269D8-F7C6-F412-203C-2C455CAEBA2C}"/>
+              </a:ext>
+            </a:extLst>
+          </p:cNvPr>
+          <p:cNvSpPr txBox="1">
+            <a:spLocks/>
+          </p:cNvSpPr>
+          <p:nvPr/>
+        </p:nvSpPr>
+        <p:spPr>
+          <a:xfrm>
+            <a:off x="226945" y="3274799"/>
+            <a:ext cx="11845449" cy="2086655"/>
+          </a:xfrm>
+          <a:prstGeom prst="rect">
+            <a:avLst/>
+          </a:prstGeom>
+        </p:spPr>
+        <p:txBody>
+          <a:bodyPr vert="horz" lIns="91440" tIns="45720" rIns="91440" bIns="45720" rtlCol="0">
+            <a:normAutofit/>
+          </a:bodyPr>
+          <a:lstStyle>
+            <a:lvl1pPr marL="228600" indent="-228600" algn="l" defTabSz="914400" rtl="0" eaLnBrk="1" latinLnBrk="0" hangingPunct="1">
+              <a:lnSpc>
+                <a:spcPct val="90000"/>
+              </a:lnSpc>
+              <a:spcBef>
+                <a:spcPts val="1000"/>
+              </a:spcBef>
+              <a:buFont typeface="Arial" panose="020B0604020202020204" pitchFamily="34" charset="0"/>
+              <a:buChar char="•"/>
+              <a:defRPr sz="2800" kern="1200">
+                <a:solidFill>
+                  <a:schemeClr val="tx1"/>
+                </a:solidFill>
+                <a:latin typeface="+mn-lt"/>
+                <a:ea typeface="+mn-ea"/>
+                <a:cs typeface="+mn-cs"/>
+              </a:defRPr>
+            </a:lvl1pPr>
+            <a:lvl2pPr marL="685800" indent="-228600" algn="l" defTabSz="914400" rtl="0" eaLnBrk="1" latinLnBrk="0" hangingPunct="1">
+              <a:lnSpc>
+                <a:spcPct val="90000"/>
+              </a:lnSpc>
+              <a:spcBef>
+                <a:spcPts val="500"/>
+              </a:spcBef>
+              <a:buFont typeface="Arial" panose="020B0604020202020204" pitchFamily="34" charset="0"/>
+              <a:buChar char="•"/>
+              <a:defRPr sz="2400" kern="1200">
+                <a:solidFill>
+                  <a:schemeClr val="tx1"/>
+                </a:solidFill>
+                <a:latin typeface="+mn-lt"/>
+                <a:ea typeface="+mn-ea"/>
+                <a:cs typeface="+mn-cs"/>
+              </a:defRPr>
+            </a:lvl2pPr>
+            <a:lvl3pPr marL="1143000" indent="-228600" algn="l" defTabSz="914400" rtl="0" eaLnBrk="1" latinLnBrk="0" hangingPunct="1">
+              <a:lnSpc>
+                <a:spcPct val="90000"/>
+              </a:lnSpc>
+              <a:spcBef>
+                <a:spcPts val="500"/>
+              </a:spcBef>
+              <a:buFont typeface="Arial" panose="020B0604020202020204" pitchFamily="34" charset="0"/>
+              <a:buChar char="•"/>
+              <a:defRPr sz="2000" kern="1200">
+                <a:solidFill>
+                  <a:schemeClr val="tx1"/>
+                </a:solidFill>
+                <a:latin typeface="+mn-lt"/>
+                <a:ea typeface="+mn-ea"/>
+                <a:cs typeface="+mn-cs"/>
+              </a:defRPr>
+            </a:lvl3pPr>
+            <a:lvl4pPr marL="1600200" indent="-228600" algn="l" defTabSz="914400" rtl="0" eaLnBrk="1" latinLnBrk="0" hangingPunct="1">
+              <a:lnSpc>
+                <a:spcPct val="90000"/>
+              </a:lnSpc>
+              <a:spcBef>
+                <a:spcPts val="500"/>
+              </a:spcBef>
+              <a:buFont typeface="Arial" panose="020B0604020202020204" pitchFamily="34" charset="0"/>
+              <a:buChar char="•"/>
+              <a:defRPr sz="1800" kern="1200">
+                <a:solidFill>
+                  <a:schemeClr val="tx1"/>
+                </a:solidFill>
+                <a:latin typeface="+mn-lt"/>
+                <a:ea typeface="+mn-ea"/>
+                <a:cs typeface="+mn-cs"/>
+              </a:defRPr>
+            </a:lvl4pPr>
+            <a:lvl5pPr marL="2057400" indent="-228600" algn="l" defTabSz="914400" rtl="0" eaLnBrk="1" latinLnBrk="0" hangingPunct="1">
+              <a:lnSpc>
+                <a:spcPct val="90000"/>
+              </a:lnSpc>
+              <a:spcBef>
+                <a:spcPts val="500"/>
+              </a:spcBef>
+              <a:buFont typeface="Arial" panose="020B0604020202020204" pitchFamily="34" charset="0"/>
+              <a:buChar char="•"/>
+              <a:defRPr sz="1800" kern="1200">
+                <a:solidFill>
+                  <a:schemeClr val="tx1"/>
+                </a:solidFill>
+                <a:latin typeface="+mn-lt"/>
+                <a:ea typeface="+mn-ea"/>
+                <a:cs typeface="+mn-cs"/>
+              </a:defRPr>
+            </a:lvl5pPr>
+            <a:lvl6pPr marL="2514600" indent="-228600" algn="l" defTabSz="914400" rtl="0" eaLnBrk="1" latinLnBrk="0" hangingPunct="1">
+              <a:lnSpc>
+                <a:spcPct val="90000"/>
+              </a:lnSpc>
+              <a:spcBef>
+                <a:spcPts val="500"/>
+              </a:spcBef>
+              <a:buFont typeface="Arial" panose="020B0604020202020204" pitchFamily="34" charset="0"/>
+              <a:buChar char="•"/>
+              <a:defRPr sz="1800" kern="1200">
+                <a:solidFill>
+                  <a:schemeClr val="tx1"/>
+                </a:solidFill>
+                <a:latin typeface="+mn-lt"/>
+                <a:ea typeface="+mn-ea"/>
+                <a:cs typeface="+mn-cs"/>
+              </a:defRPr>
+            </a:lvl6pPr>
+            <a:lvl7pPr marL="2971800" indent="-228600" algn="l" defTabSz="914400" rtl="0" eaLnBrk="1" latinLnBrk="0" hangingPunct="1">
+              <a:lnSpc>
+                <a:spcPct val="90000"/>
+              </a:lnSpc>
+              <a:spcBef>
+                <a:spcPts val="500"/>
+              </a:spcBef>
+              <a:buFont typeface="Arial" panose="020B0604020202020204" pitchFamily="34" charset="0"/>
+              <a:buChar char="•"/>
+              <a:defRPr sz="1800" kern="1200">
+                <a:solidFill>
+                  <a:schemeClr val="tx1"/>
+                </a:solidFill>
+                <a:latin typeface="+mn-lt"/>
+                <a:ea typeface="+mn-ea"/>
+                <a:cs typeface="+mn-cs"/>
+              </a:defRPr>
+            </a:lvl7pPr>
+            <a:lvl8pPr marL="3429000" indent="-228600" algn="l" defTabSz="914400" rtl="0" eaLnBrk="1" latinLnBrk="0" hangingPunct="1">
+              <a:lnSpc>
+                <a:spcPct val="90000"/>
+              </a:lnSpc>
+              <a:spcBef>
+                <a:spcPts val="500"/>
+              </a:spcBef>
+              <a:buFont typeface="Arial" panose="020B0604020202020204" pitchFamily="34" charset="0"/>
+              <a:buChar char="•"/>
+              <a:defRPr sz="1800" kern="1200">
+                <a:solidFill>
+                  <a:schemeClr val="tx1"/>
+                </a:solidFill>
+                <a:latin typeface="+mn-lt"/>
+                <a:ea typeface="+mn-ea"/>
+                <a:cs typeface="+mn-cs"/>
+              </a:defRPr>
+            </a:lvl8pPr>
+            <a:lvl9pPr marL="3886200" indent="-228600" algn="l" defTabSz="914400" rtl="0" eaLnBrk="1" latinLnBrk="0" hangingPunct="1">
+              <a:lnSpc>
+                <a:spcPct val="90000"/>
+              </a:lnSpc>
+              <a:spcBef>
+                <a:spcPts val="500"/>
+              </a:spcBef>
+              <a:buFont typeface="Arial" panose="020B0604020202020204" pitchFamily="34" charset="0"/>
+              <a:buChar char="•"/>
+              <a:defRPr sz="1800" kern="1200">
+                <a:solidFill>
+                  <a:schemeClr val="tx1"/>
+                </a:solidFill>
+                <a:latin typeface="+mn-lt"/>
+                <a:ea typeface="+mn-ea"/>
+                <a:cs typeface="+mn-cs"/>
+              </a:defRPr>
+            </a:lvl9pPr>
+          </a:lstStyle>
+          <a:p>
+            <a:pPr marL="0" indent="0">
+              <a:buFont typeface="Arial" panose="020B0604020202020204" pitchFamily="34" charset="0"/>
+              <a:buNone/>
+            </a:pPr>
+            <a:endParaRPr lang="en-US" sz="3200" dirty="0"/>
           </a:p>
         </p:txBody>
       </p:sp>
@@ -12030,7 +13872,7 @@
           <p:cNvPr id="2" name="Title 1">
             <a:extLst>
               <a:ext uri="{FF2B5EF4-FFF2-40B4-BE49-F238E27FC236}">
-                <a16:creationId xmlns:a16="http://schemas.microsoft.com/office/drawing/2014/main" id="{A9D955AD-FFF8-18CA-4539-3847C8C2C8C5}"/>
+                <a16:creationId xmlns:a16="http://schemas.microsoft.com/office/drawing/2014/main" id="{ACF77F52-BE95-0628-194A-460AD273C451}"/>
               </a:ext>
             </a:extLst>
           </p:cNvPr>
@@ -12041,25 +13883,3806 @@
             <p:ph type="title"/>
           </p:nvPr>
         </p:nvSpPr>
-        <p:spPr/>
+        <p:spPr>
+          <a:xfrm>
+            <a:off x="608903" y="0"/>
+            <a:ext cx="12192000" cy="1325563"/>
+          </a:xfrm>
+        </p:spPr>
         <p:txBody>
-          <a:bodyPr/>
+          <a:bodyPr>
+            <a:normAutofit/>
+          </a:bodyPr>
           <a:lstStyle/>
           <a:p>
             <a:r>
-              <a:rPr lang="en-US" dirty="0" err="1"/>
-              <a:t>Testovi</a:t>
-            </a:r>
-            <a:endParaRPr lang="en-US" dirty="0"/>
+              <a:rPr lang="en-US" sz="2400" dirty="0"/>
+              <a:t>Checkpoints i </a:t>
+            </a:r>
+            <a:r>
+              <a:rPr lang="en-US" sz="2400" dirty="0" err="1"/>
+              <a:t>uzorkovanje</a:t>
+            </a:r>
+            <a:r>
+              <a:rPr lang="en-US" sz="2400" dirty="0"/>
+              <a:t> SA </a:t>
+            </a:r>
+            <a:r>
+              <a:rPr lang="en-US" sz="2400" dirty="0" err="1"/>
+              <a:t>na</a:t>
+            </a:r>
+            <a:r>
+              <a:rPr lang="en-US" sz="2400" dirty="0"/>
+              <a:t> </a:t>
+            </a:r>
+            <a:r>
+              <a:rPr lang="en-US" sz="2400" dirty="0" err="1"/>
+              <a:t>prostom</a:t>
+            </a:r>
+            <a:r>
+              <a:rPr lang="en-US" sz="2400" dirty="0"/>
+              <a:t> </a:t>
+            </a:r>
+            <a:r>
+              <a:rPr lang="en-US" sz="2400" dirty="0" err="1"/>
+              <a:t>primeru</a:t>
+            </a:r>
+            <a:r>
+              <a:rPr lang="en-US" sz="2400" dirty="0"/>
+              <a:t> – BANANA  L : A, N, N, B, $, A, A</a:t>
+            </a:r>
+            <a:br>
+              <a:rPr lang="en-US" sz="2400" dirty="0"/>
+            </a:br>
+            <a:endParaRPr lang="en-US" sz="2400" dirty="0"/>
+          </a:p>
+        </p:txBody>
+      </p:sp>
+      <p:cxnSp>
+        <p:nvCxnSpPr>
+          <p:cNvPr id="5" name="Straight Connector 4">
+            <a:extLst>
+              <a:ext uri="{FF2B5EF4-FFF2-40B4-BE49-F238E27FC236}">
+                <a16:creationId xmlns:a16="http://schemas.microsoft.com/office/drawing/2014/main" id="{3D0304D5-C948-4925-15E3-439C78A614EF}"/>
+              </a:ext>
+            </a:extLst>
+          </p:cNvPr>
+          <p:cNvCxnSpPr>
+            <a:cxnSpLocks/>
+          </p:cNvCxnSpPr>
+          <p:nvPr/>
+        </p:nvCxnSpPr>
+        <p:spPr>
+          <a:xfrm>
+            <a:off x="6096000" y="1175092"/>
+            <a:ext cx="0" cy="5272007"/>
+          </a:xfrm>
+          <a:prstGeom prst="line">
+            <a:avLst/>
+          </a:prstGeom>
+        </p:spPr>
+        <p:style>
+          <a:lnRef idx="2">
+            <a:schemeClr val="accent1"/>
+          </a:lnRef>
+          <a:fillRef idx="0">
+            <a:schemeClr val="accent1"/>
+          </a:fillRef>
+          <a:effectRef idx="1">
+            <a:schemeClr val="accent1"/>
+          </a:effectRef>
+          <a:fontRef idx="minor">
+            <a:schemeClr val="tx1"/>
+          </a:fontRef>
+        </p:style>
+      </p:cxnSp>
+      <p:graphicFrame>
+        <p:nvGraphicFramePr>
+          <p:cNvPr id="9" name="Table 8">
+            <a:extLst>
+              <a:ext uri="{FF2B5EF4-FFF2-40B4-BE49-F238E27FC236}">
+                <a16:creationId xmlns:a16="http://schemas.microsoft.com/office/drawing/2014/main" id="{F1144A2F-CED9-46F6-4FD8-BA22B2B508A9}"/>
+              </a:ext>
+            </a:extLst>
+          </p:cNvPr>
+          <p:cNvGraphicFramePr>
+            <a:graphicFrameLocks noGrp="1"/>
+          </p:cNvGraphicFramePr>
+          <p:nvPr>
+            <p:extLst>
+              <p:ext uri="{D42A27DB-BD31-4B8C-83A1-F6EECF244321}">
+                <p14:modId xmlns:p14="http://schemas.microsoft.com/office/powerpoint/2010/main" val="2968103391"/>
+              </p:ext>
+            </p:extLst>
+          </p:nvPr>
+        </p:nvGraphicFramePr>
+        <p:xfrm>
+          <a:off x="1016939" y="1175092"/>
+          <a:ext cx="3852720" cy="1074420"/>
+        </p:xfrm>
+        <a:graphic>
+          <a:graphicData uri="http://schemas.openxmlformats.org/drawingml/2006/table">
+            <a:tbl>
+              <a:tblPr>
+                <a:tableStyleId>{BC89EF96-8CEA-46FF-86C4-4CE0E7609802}</a:tableStyleId>
+              </a:tblPr>
+              <a:tblGrid>
+                <a:gridCol w="362268">
+                  <a:extLst>
+                    <a:ext uri="{9D8B030D-6E8A-4147-A177-3AD203B41FA5}">
+                      <a16:colId xmlns:a16="http://schemas.microsoft.com/office/drawing/2014/main" val="504391349"/>
+                    </a:ext>
+                  </a:extLst>
+                </a:gridCol>
+                <a:gridCol w="872613">
+                  <a:extLst>
+                    <a:ext uri="{9D8B030D-6E8A-4147-A177-3AD203B41FA5}">
+                      <a16:colId xmlns:a16="http://schemas.microsoft.com/office/drawing/2014/main" val="3595451701"/>
+                    </a:ext>
+                  </a:extLst>
+                </a:gridCol>
+                <a:gridCol w="872613">
+                  <a:extLst>
+                    <a:ext uri="{9D8B030D-6E8A-4147-A177-3AD203B41FA5}">
+                      <a16:colId xmlns:a16="http://schemas.microsoft.com/office/drawing/2014/main" val="1036463801"/>
+                    </a:ext>
+                  </a:extLst>
+                </a:gridCol>
+                <a:gridCol w="872613">
+                  <a:extLst>
+                    <a:ext uri="{9D8B030D-6E8A-4147-A177-3AD203B41FA5}">
+                      <a16:colId xmlns:a16="http://schemas.microsoft.com/office/drawing/2014/main" val="1187070211"/>
+                    </a:ext>
+                  </a:extLst>
+                </a:gridCol>
+                <a:gridCol w="872613">
+                  <a:extLst>
+                    <a:ext uri="{9D8B030D-6E8A-4147-A177-3AD203B41FA5}">
+                      <a16:colId xmlns:a16="http://schemas.microsoft.com/office/drawing/2014/main" val="4254431964"/>
+                    </a:ext>
+                  </a:extLst>
+                </a:gridCol>
+              </a:tblGrid>
+              <a:tr h="0">
+                <a:tc>
+                  <a:txBody>
+                    <a:bodyPr/>
+                    <a:lstStyle/>
+                    <a:p>
+                      <a:pPr>
+                        <a:lnSpc>
+                          <a:spcPts val="1500"/>
+                        </a:lnSpc>
+                        <a:buNone/>
+                      </a:pPr>
+                      <a:r>
+                        <a:rPr lang="en-US" b="1" dirty="0" err="1">
+                          <a:effectLst/>
+                        </a:rPr>
+                        <a:t>i</a:t>
+                      </a:r>
+                      <a:r>
+                        <a:rPr lang="en-US" b="1" dirty="0">
+                          <a:effectLst/>
+                        </a:rPr>
+                        <a:t> </a:t>
+                      </a:r>
+                    </a:p>
+                    <a:p>
+                      <a:pPr>
+                        <a:lnSpc>
+                          <a:spcPts val="1500"/>
+                        </a:lnSpc>
+                        <a:buNone/>
+                      </a:pPr>
+                      <a:endParaRPr lang="en-US" b="1" dirty="0">
+                        <a:effectLst/>
+                        <a:latin typeface="Inter"/>
+                      </a:endParaRPr>
+                    </a:p>
+                  </a:txBody>
+                  <a:tcPr anchor="ctr"/>
+                </a:tc>
+                <a:tc>
+                  <a:txBody>
+                    <a:bodyPr/>
+                    <a:lstStyle/>
+                    <a:p>
+                      <a:pPr>
+                        <a:lnSpc>
+                          <a:spcPts val="1500"/>
+                        </a:lnSpc>
+                        <a:buNone/>
+                      </a:pPr>
+                      <a:r>
+                        <a:rPr lang="en-US" b="1">
+                          <a:effectLst/>
+                        </a:rPr>
+                        <a:t>Occ($)</a:t>
+                      </a:r>
+                      <a:endParaRPr lang="en-US" b="1">
+                        <a:effectLst/>
+                        <a:latin typeface="Inter"/>
+                      </a:endParaRPr>
+                    </a:p>
+                  </a:txBody>
+                  <a:tcPr anchor="ctr"/>
+                </a:tc>
+                <a:tc>
+                  <a:txBody>
+                    <a:bodyPr/>
+                    <a:lstStyle/>
+                    <a:p>
+                      <a:pPr>
+                        <a:lnSpc>
+                          <a:spcPts val="1500"/>
+                        </a:lnSpc>
+                        <a:buNone/>
+                      </a:pPr>
+                      <a:r>
+                        <a:rPr lang="en-US" b="1">
+                          <a:effectLst/>
+                        </a:rPr>
+                        <a:t>Occ(A)</a:t>
+                      </a:r>
+                      <a:endParaRPr lang="en-US" b="1">
+                        <a:effectLst/>
+                        <a:latin typeface="Inter"/>
+                      </a:endParaRPr>
+                    </a:p>
+                  </a:txBody>
+                  <a:tcPr anchor="ctr"/>
+                </a:tc>
+                <a:tc>
+                  <a:txBody>
+                    <a:bodyPr/>
+                    <a:lstStyle/>
+                    <a:p>
+                      <a:pPr>
+                        <a:lnSpc>
+                          <a:spcPts val="1500"/>
+                        </a:lnSpc>
+                        <a:buNone/>
+                      </a:pPr>
+                      <a:r>
+                        <a:rPr lang="en-US" b="1">
+                          <a:effectLst/>
+                        </a:rPr>
+                        <a:t>Occ(B)</a:t>
+                      </a:r>
+                      <a:endParaRPr lang="en-US" b="1">
+                        <a:effectLst/>
+                        <a:latin typeface="Inter"/>
+                      </a:endParaRPr>
+                    </a:p>
+                  </a:txBody>
+                  <a:tcPr anchor="ctr"/>
+                </a:tc>
+                <a:tc>
+                  <a:txBody>
+                    <a:bodyPr/>
+                    <a:lstStyle/>
+                    <a:p>
+                      <a:pPr>
+                        <a:lnSpc>
+                          <a:spcPts val="1500"/>
+                        </a:lnSpc>
+                        <a:buNone/>
+                      </a:pPr>
+                      <a:r>
+                        <a:rPr lang="en-US" b="1">
+                          <a:effectLst/>
+                        </a:rPr>
+                        <a:t>Occ(N)</a:t>
+                      </a:r>
+                      <a:endParaRPr lang="en-US" b="1">
+                        <a:effectLst/>
+                        <a:latin typeface="Inter"/>
+                      </a:endParaRPr>
+                    </a:p>
+                  </a:txBody>
+                  <a:tcPr anchor="ctr"/>
+                </a:tc>
+                <a:extLst>
+                  <a:ext uri="{0D108BD9-81ED-4DB2-BD59-A6C34878D82A}">
+                    <a16:rowId xmlns:a16="http://schemas.microsoft.com/office/drawing/2014/main" val="390899931"/>
+                  </a:ext>
+                </a:extLst>
+              </a:tr>
+              <a:tr h="0">
+                <a:tc>
+                  <a:txBody>
+                    <a:bodyPr/>
+                    <a:lstStyle/>
+                    <a:p>
+                      <a:pPr>
+                        <a:lnSpc>
+                          <a:spcPts val="1500"/>
+                        </a:lnSpc>
+                        <a:buNone/>
+                      </a:pPr>
+                      <a:r>
+                        <a:rPr lang="en-US" b="0" dirty="0">
+                          <a:effectLst/>
+                          <a:latin typeface="Inter"/>
+                        </a:rPr>
+                        <a:t>0</a:t>
+                      </a:r>
+                    </a:p>
+                  </a:txBody>
+                  <a:tcPr anchor="ctr"/>
+                </a:tc>
+                <a:tc>
+                  <a:txBody>
+                    <a:bodyPr/>
+                    <a:lstStyle/>
+                    <a:p>
+                      <a:pPr>
+                        <a:lnSpc>
+                          <a:spcPts val="1500"/>
+                        </a:lnSpc>
+                        <a:buNone/>
+                      </a:pPr>
+                      <a:r>
+                        <a:rPr lang="en-US" b="0">
+                          <a:effectLst/>
+                        </a:rPr>
+                        <a:t>0</a:t>
+                      </a:r>
+                      <a:endParaRPr lang="en-US" b="0">
+                        <a:effectLst/>
+                        <a:latin typeface="Inter"/>
+                      </a:endParaRPr>
+                    </a:p>
+                  </a:txBody>
+                  <a:tcPr anchor="ctr"/>
+                </a:tc>
+                <a:tc>
+                  <a:txBody>
+                    <a:bodyPr/>
+                    <a:lstStyle/>
+                    <a:p>
+                      <a:pPr>
+                        <a:lnSpc>
+                          <a:spcPts val="1500"/>
+                        </a:lnSpc>
+                        <a:buNone/>
+                      </a:pPr>
+                      <a:r>
+                        <a:rPr lang="en-US" b="0" dirty="0">
+                          <a:effectLst/>
+                        </a:rPr>
+                        <a:t>1</a:t>
+                      </a:r>
+                      <a:endParaRPr lang="en-US" b="0" dirty="0">
+                        <a:effectLst/>
+                        <a:latin typeface="Inter"/>
+                      </a:endParaRPr>
+                    </a:p>
+                  </a:txBody>
+                  <a:tcPr anchor="ctr"/>
+                </a:tc>
+                <a:tc>
+                  <a:txBody>
+                    <a:bodyPr/>
+                    <a:lstStyle/>
+                    <a:p>
+                      <a:pPr>
+                        <a:lnSpc>
+                          <a:spcPts val="1500"/>
+                        </a:lnSpc>
+                        <a:buNone/>
+                      </a:pPr>
+                      <a:r>
+                        <a:rPr lang="en-US" b="0">
+                          <a:effectLst/>
+                        </a:rPr>
+                        <a:t>0</a:t>
+                      </a:r>
+                      <a:endParaRPr lang="en-US" b="0">
+                        <a:effectLst/>
+                        <a:latin typeface="Inter"/>
+                      </a:endParaRPr>
+                    </a:p>
+                  </a:txBody>
+                  <a:tcPr anchor="ctr"/>
+                </a:tc>
+                <a:tc>
+                  <a:txBody>
+                    <a:bodyPr/>
+                    <a:lstStyle/>
+                    <a:p>
+                      <a:pPr>
+                        <a:lnSpc>
+                          <a:spcPts val="1500"/>
+                        </a:lnSpc>
+                        <a:buNone/>
+                      </a:pPr>
+                      <a:r>
+                        <a:rPr lang="en-US" b="0">
+                          <a:effectLst/>
+                        </a:rPr>
+                        <a:t>0</a:t>
+                      </a:r>
+                      <a:endParaRPr lang="en-US" b="0">
+                        <a:effectLst/>
+                        <a:latin typeface="Inter"/>
+                      </a:endParaRPr>
+                    </a:p>
+                  </a:txBody>
+                  <a:tcPr anchor="ctr"/>
+                </a:tc>
+                <a:extLst>
+                  <a:ext uri="{0D108BD9-81ED-4DB2-BD59-A6C34878D82A}">
+                    <a16:rowId xmlns:a16="http://schemas.microsoft.com/office/drawing/2014/main" val="634322110"/>
+                  </a:ext>
+                </a:extLst>
+              </a:tr>
+              <a:tr h="0">
+                <a:tc>
+                  <a:txBody>
+                    <a:bodyPr/>
+                    <a:lstStyle/>
+                    <a:p>
+                      <a:pPr>
+                        <a:lnSpc>
+                          <a:spcPts val="1500"/>
+                        </a:lnSpc>
+                        <a:buNone/>
+                      </a:pPr>
+                      <a:r>
+                        <a:rPr lang="en-US" b="0">
+                          <a:effectLst/>
+                        </a:rPr>
+                        <a:t>4</a:t>
+                      </a:r>
+                      <a:endParaRPr lang="en-US" b="0">
+                        <a:effectLst/>
+                        <a:latin typeface="Inter"/>
+                      </a:endParaRPr>
+                    </a:p>
+                  </a:txBody>
+                  <a:tcPr anchor="ctr"/>
+                </a:tc>
+                <a:tc>
+                  <a:txBody>
+                    <a:bodyPr/>
+                    <a:lstStyle/>
+                    <a:p>
+                      <a:pPr>
+                        <a:lnSpc>
+                          <a:spcPts val="1500"/>
+                        </a:lnSpc>
+                        <a:buNone/>
+                      </a:pPr>
+                      <a:r>
+                        <a:rPr lang="en-US" b="0">
+                          <a:effectLst/>
+                        </a:rPr>
+                        <a:t>1</a:t>
+                      </a:r>
+                      <a:endParaRPr lang="en-US" b="0">
+                        <a:effectLst/>
+                        <a:latin typeface="Inter"/>
+                      </a:endParaRPr>
+                    </a:p>
+                  </a:txBody>
+                  <a:tcPr anchor="ctr"/>
+                </a:tc>
+                <a:tc>
+                  <a:txBody>
+                    <a:bodyPr/>
+                    <a:lstStyle/>
+                    <a:p>
+                      <a:pPr>
+                        <a:lnSpc>
+                          <a:spcPts val="1500"/>
+                        </a:lnSpc>
+                        <a:buNone/>
+                      </a:pPr>
+                      <a:r>
+                        <a:rPr lang="en-US" b="0" dirty="0">
+                          <a:effectLst/>
+                          <a:latin typeface="Inter"/>
+                        </a:rPr>
+                        <a:t>1</a:t>
+                      </a:r>
+                    </a:p>
+                  </a:txBody>
+                  <a:tcPr anchor="ctr"/>
+                </a:tc>
+                <a:tc>
+                  <a:txBody>
+                    <a:bodyPr/>
+                    <a:lstStyle/>
+                    <a:p>
+                      <a:pPr>
+                        <a:lnSpc>
+                          <a:spcPts val="1500"/>
+                        </a:lnSpc>
+                        <a:buNone/>
+                      </a:pPr>
+                      <a:r>
+                        <a:rPr lang="en-US" b="0">
+                          <a:effectLst/>
+                        </a:rPr>
+                        <a:t>1</a:t>
+                      </a:r>
+                      <a:endParaRPr lang="en-US" b="0">
+                        <a:effectLst/>
+                        <a:latin typeface="Inter"/>
+                      </a:endParaRPr>
+                    </a:p>
+                  </a:txBody>
+                  <a:tcPr anchor="ctr"/>
+                </a:tc>
+                <a:tc>
+                  <a:txBody>
+                    <a:bodyPr/>
+                    <a:lstStyle/>
+                    <a:p>
+                      <a:pPr>
+                        <a:lnSpc>
+                          <a:spcPts val="1500"/>
+                        </a:lnSpc>
+                        <a:buNone/>
+                      </a:pPr>
+                      <a:r>
+                        <a:rPr lang="en-US" b="0" dirty="0">
+                          <a:effectLst/>
+                        </a:rPr>
+                        <a:t>2</a:t>
+                      </a:r>
+                      <a:endParaRPr lang="en-US" b="0" dirty="0">
+                        <a:effectLst/>
+                        <a:latin typeface="Inter"/>
+                      </a:endParaRPr>
+                    </a:p>
+                  </a:txBody>
+                  <a:tcPr anchor="ctr"/>
+                </a:tc>
+                <a:extLst>
+                  <a:ext uri="{0D108BD9-81ED-4DB2-BD59-A6C34878D82A}">
+                    <a16:rowId xmlns:a16="http://schemas.microsoft.com/office/drawing/2014/main" val="3011890546"/>
+                  </a:ext>
+                </a:extLst>
+              </a:tr>
+            </a:tbl>
+          </a:graphicData>
+        </a:graphic>
+      </p:graphicFrame>
+      <p:sp>
+        <p:nvSpPr>
+          <p:cNvPr id="10" name="TextBox 9">
+            <a:extLst>
+              <a:ext uri="{FF2B5EF4-FFF2-40B4-BE49-F238E27FC236}">
+                <a16:creationId xmlns:a16="http://schemas.microsoft.com/office/drawing/2014/main" id="{C566551E-1E06-ADFC-9BC4-44D2EEB44349}"/>
+              </a:ext>
+            </a:extLst>
+          </p:cNvPr>
+          <p:cNvSpPr txBox="1"/>
+          <p:nvPr/>
+        </p:nvSpPr>
+        <p:spPr>
+          <a:xfrm>
+            <a:off x="399852" y="2381542"/>
+            <a:ext cx="5411033" cy="1323439"/>
+          </a:xfrm>
+          <a:prstGeom prst="rect">
+            <a:avLst/>
+          </a:prstGeom>
+          <a:noFill/>
+        </p:spPr>
+        <p:txBody>
+          <a:bodyPr wrap="none" rtlCol="0">
+            <a:spAutoFit/>
+          </a:bodyPr>
+          <a:lstStyle/>
+          <a:p>
+            <a:r>
+              <a:rPr lang="en-US" sz="2000" dirty="0"/>
+              <a:t>Occ(‘A’, 6) = ?</a:t>
+            </a:r>
+          </a:p>
+          <a:p>
+            <a:r>
+              <a:rPr lang="en-US" sz="2000" dirty="0"/>
+              <a:t>Occ(‘A’, 4) = 1</a:t>
+            </a:r>
+          </a:p>
+          <a:p>
+            <a:r>
+              <a:rPr lang="en-US" sz="2000" dirty="0"/>
+              <a:t>Occ(‘A’, 6) = Occ(‘A’, 4) + (L[5]==‘A’) + (L[6]==‘A’) </a:t>
+            </a:r>
+          </a:p>
+          <a:p>
+            <a:r>
+              <a:rPr lang="en-US" sz="2000" dirty="0"/>
+              <a:t>Occ(‘A’, 6) = 3</a:t>
+            </a:r>
+          </a:p>
+        </p:txBody>
+      </p:sp>
+      <p:graphicFrame>
+        <p:nvGraphicFramePr>
+          <p:cNvPr id="11" name="Table 10">
+            <a:extLst>
+              <a:ext uri="{FF2B5EF4-FFF2-40B4-BE49-F238E27FC236}">
+                <a16:creationId xmlns:a16="http://schemas.microsoft.com/office/drawing/2014/main" id="{4C017D1F-6EE7-989D-F2F1-90835ED28F64}"/>
+              </a:ext>
+            </a:extLst>
+          </p:cNvPr>
+          <p:cNvGraphicFramePr>
+            <a:graphicFrameLocks noGrp="1"/>
+          </p:cNvGraphicFramePr>
+          <p:nvPr>
+            <p:extLst>
+              <p:ext uri="{D42A27DB-BD31-4B8C-83A1-F6EECF244321}">
+                <p14:modId xmlns:p14="http://schemas.microsoft.com/office/powerpoint/2010/main" val="2112273492"/>
+              </p:ext>
+            </p:extLst>
+          </p:nvPr>
+        </p:nvGraphicFramePr>
+        <p:xfrm>
+          <a:off x="1016939" y="3902146"/>
+          <a:ext cx="4060682" cy="2547620"/>
+        </p:xfrm>
+        <a:graphic>
+          <a:graphicData uri="http://schemas.openxmlformats.org/drawingml/2006/table">
+            <a:tbl>
+              <a:tblPr>
+                <a:tableStyleId>{BC89EF96-8CEA-46FF-86C4-4CE0E7609802}</a:tableStyleId>
+              </a:tblPr>
+              <a:tblGrid>
+                <a:gridCol w="570230">
+                  <a:extLst>
+                    <a:ext uri="{9D8B030D-6E8A-4147-A177-3AD203B41FA5}">
+                      <a16:colId xmlns:a16="http://schemas.microsoft.com/office/drawing/2014/main" val="504391349"/>
+                    </a:ext>
+                  </a:extLst>
+                </a:gridCol>
+                <a:gridCol w="872613">
+                  <a:extLst>
+                    <a:ext uri="{9D8B030D-6E8A-4147-A177-3AD203B41FA5}">
+                      <a16:colId xmlns:a16="http://schemas.microsoft.com/office/drawing/2014/main" val="3595451701"/>
+                    </a:ext>
+                  </a:extLst>
+                </a:gridCol>
+                <a:gridCol w="872613">
+                  <a:extLst>
+                    <a:ext uri="{9D8B030D-6E8A-4147-A177-3AD203B41FA5}">
+                      <a16:colId xmlns:a16="http://schemas.microsoft.com/office/drawing/2014/main" val="1036463801"/>
+                    </a:ext>
+                  </a:extLst>
+                </a:gridCol>
+                <a:gridCol w="872613">
+                  <a:extLst>
+                    <a:ext uri="{9D8B030D-6E8A-4147-A177-3AD203B41FA5}">
+                      <a16:colId xmlns:a16="http://schemas.microsoft.com/office/drawing/2014/main" val="1187070211"/>
+                    </a:ext>
+                  </a:extLst>
+                </a:gridCol>
+                <a:gridCol w="872613">
+                  <a:extLst>
+                    <a:ext uri="{9D8B030D-6E8A-4147-A177-3AD203B41FA5}">
+                      <a16:colId xmlns:a16="http://schemas.microsoft.com/office/drawing/2014/main" val="4254431964"/>
+                    </a:ext>
+                  </a:extLst>
+                </a:gridCol>
+              </a:tblGrid>
+              <a:tr h="0">
+                <a:tc>
+                  <a:txBody>
+                    <a:bodyPr/>
+                    <a:lstStyle/>
+                    <a:p>
+                      <a:pPr>
+                        <a:lnSpc>
+                          <a:spcPts val="1500"/>
+                        </a:lnSpc>
+                        <a:buNone/>
+                      </a:pPr>
+                      <a:r>
+                        <a:rPr lang="en-US" b="1" dirty="0" err="1">
+                          <a:effectLst/>
+                        </a:rPr>
+                        <a:t>i</a:t>
+                      </a:r>
+                      <a:endParaRPr lang="en-US" b="1" dirty="0">
+                        <a:effectLst/>
+                      </a:endParaRPr>
+                    </a:p>
+                    <a:p>
+                      <a:pPr>
+                        <a:lnSpc>
+                          <a:spcPts val="1500"/>
+                        </a:lnSpc>
+                        <a:buNone/>
+                      </a:pPr>
+                      <a:endParaRPr lang="en-US" b="1" dirty="0">
+                        <a:effectLst/>
+                        <a:latin typeface="Inter"/>
+                      </a:endParaRPr>
+                    </a:p>
+                  </a:txBody>
+                  <a:tcPr anchor="ctr"/>
+                </a:tc>
+                <a:tc>
+                  <a:txBody>
+                    <a:bodyPr/>
+                    <a:lstStyle/>
+                    <a:p>
+                      <a:pPr>
+                        <a:lnSpc>
+                          <a:spcPts val="1500"/>
+                        </a:lnSpc>
+                        <a:buNone/>
+                      </a:pPr>
+                      <a:r>
+                        <a:rPr lang="en-US" b="1" dirty="0">
+                          <a:effectLst/>
+                        </a:rPr>
+                        <a:t>Occ($)</a:t>
+                      </a:r>
+                      <a:endParaRPr lang="en-US" b="1" dirty="0">
+                        <a:effectLst/>
+                        <a:latin typeface="Inter"/>
+                      </a:endParaRPr>
+                    </a:p>
+                  </a:txBody>
+                  <a:tcPr anchor="ctr"/>
+                </a:tc>
+                <a:tc>
+                  <a:txBody>
+                    <a:bodyPr/>
+                    <a:lstStyle/>
+                    <a:p>
+                      <a:pPr>
+                        <a:lnSpc>
+                          <a:spcPts val="1500"/>
+                        </a:lnSpc>
+                        <a:buNone/>
+                      </a:pPr>
+                      <a:r>
+                        <a:rPr lang="en-US" b="1">
+                          <a:effectLst/>
+                        </a:rPr>
+                        <a:t>Occ(A)</a:t>
+                      </a:r>
+                      <a:endParaRPr lang="en-US" b="1">
+                        <a:effectLst/>
+                        <a:latin typeface="Inter"/>
+                      </a:endParaRPr>
+                    </a:p>
+                  </a:txBody>
+                  <a:tcPr anchor="ctr"/>
+                </a:tc>
+                <a:tc>
+                  <a:txBody>
+                    <a:bodyPr/>
+                    <a:lstStyle/>
+                    <a:p>
+                      <a:pPr>
+                        <a:lnSpc>
+                          <a:spcPts val="1500"/>
+                        </a:lnSpc>
+                        <a:buNone/>
+                      </a:pPr>
+                      <a:r>
+                        <a:rPr lang="en-US" b="1">
+                          <a:effectLst/>
+                        </a:rPr>
+                        <a:t>Occ(B)</a:t>
+                      </a:r>
+                      <a:endParaRPr lang="en-US" b="1">
+                        <a:effectLst/>
+                        <a:latin typeface="Inter"/>
+                      </a:endParaRPr>
+                    </a:p>
+                  </a:txBody>
+                  <a:tcPr anchor="ctr"/>
+                </a:tc>
+                <a:tc>
+                  <a:txBody>
+                    <a:bodyPr/>
+                    <a:lstStyle/>
+                    <a:p>
+                      <a:pPr>
+                        <a:lnSpc>
+                          <a:spcPts val="1500"/>
+                        </a:lnSpc>
+                        <a:buNone/>
+                      </a:pPr>
+                      <a:r>
+                        <a:rPr lang="en-US" b="1">
+                          <a:effectLst/>
+                        </a:rPr>
+                        <a:t>Occ(N)</a:t>
+                      </a:r>
+                      <a:endParaRPr lang="en-US" b="1">
+                        <a:effectLst/>
+                        <a:latin typeface="Inter"/>
+                      </a:endParaRPr>
+                    </a:p>
+                  </a:txBody>
+                  <a:tcPr anchor="ctr"/>
+                </a:tc>
+                <a:extLst>
+                  <a:ext uri="{0D108BD9-81ED-4DB2-BD59-A6C34878D82A}">
+                    <a16:rowId xmlns:a16="http://schemas.microsoft.com/office/drawing/2014/main" val="390899931"/>
+                  </a:ext>
+                </a:extLst>
+              </a:tr>
+              <a:tr h="0">
+                <a:tc>
+                  <a:txBody>
+                    <a:bodyPr/>
+                    <a:lstStyle/>
+                    <a:p>
+                      <a:pPr>
+                        <a:lnSpc>
+                          <a:spcPts val="1500"/>
+                        </a:lnSpc>
+                        <a:buNone/>
+                      </a:pPr>
+                      <a:r>
+                        <a:rPr lang="en-US" b="0" dirty="0">
+                          <a:effectLst/>
+                          <a:latin typeface="Inter"/>
+                        </a:rPr>
+                        <a:t>0</a:t>
+                      </a:r>
+                    </a:p>
+                  </a:txBody>
+                  <a:tcPr anchor="ctr"/>
+                </a:tc>
+                <a:tc>
+                  <a:txBody>
+                    <a:bodyPr/>
+                    <a:lstStyle/>
+                    <a:p>
+                      <a:pPr>
+                        <a:lnSpc>
+                          <a:spcPts val="1500"/>
+                        </a:lnSpc>
+                        <a:buNone/>
+                      </a:pPr>
+                      <a:r>
+                        <a:rPr lang="en-US" b="0">
+                          <a:effectLst/>
+                        </a:rPr>
+                        <a:t>0</a:t>
+                      </a:r>
+                      <a:endParaRPr lang="en-US" b="0">
+                        <a:effectLst/>
+                        <a:latin typeface="Inter"/>
+                      </a:endParaRPr>
+                    </a:p>
+                  </a:txBody>
+                  <a:tcPr anchor="ctr"/>
+                </a:tc>
+                <a:tc>
+                  <a:txBody>
+                    <a:bodyPr/>
+                    <a:lstStyle/>
+                    <a:p>
+                      <a:pPr>
+                        <a:lnSpc>
+                          <a:spcPts val="1500"/>
+                        </a:lnSpc>
+                        <a:buNone/>
+                      </a:pPr>
+                      <a:r>
+                        <a:rPr lang="en-US" b="0">
+                          <a:effectLst/>
+                        </a:rPr>
+                        <a:t>1</a:t>
+                      </a:r>
+                      <a:endParaRPr lang="en-US" b="0">
+                        <a:effectLst/>
+                        <a:latin typeface="Inter"/>
+                      </a:endParaRPr>
+                    </a:p>
+                  </a:txBody>
+                  <a:tcPr anchor="ctr"/>
+                </a:tc>
+                <a:tc>
+                  <a:txBody>
+                    <a:bodyPr/>
+                    <a:lstStyle/>
+                    <a:p>
+                      <a:pPr>
+                        <a:lnSpc>
+                          <a:spcPts val="1500"/>
+                        </a:lnSpc>
+                        <a:buNone/>
+                      </a:pPr>
+                      <a:r>
+                        <a:rPr lang="en-US" b="0">
+                          <a:effectLst/>
+                        </a:rPr>
+                        <a:t>0</a:t>
+                      </a:r>
+                      <a:endParaRPr lang="en-US" b="0">
+                        <a:effectLst/>
+                        <a:latin typeface="Inter"/>
+                      </a:endParaRPr>
+                    </a:p>
+                  </a:txBody>
+                  <a:tcPr anchor="ctr"/>
+                </a:tc>
+                <a:tc>
+                  <a:txBody>
+                    <a:bodyPr/>
+                    <a:lstStyle/>
+                    <a:p>
+                      <a:pPr>
+                        <a:lnSpc>
+                          <a:spcPts val="1500"/>
+                        </a:lnSpc>
+                        <a:buNone/>
+                      </a:pPr>
+                      <a:r>
+                        <a:rPr lang="en-US" b="0">
+                          <a:effectLst/>
+                        </a:rPr>
+                        <a:t>0</a:t>
+                      </a:r>
+                      <a:endParaRPr lang="en-US" b="0">
+                        <a:effectLst/>
+                        <a:latin typeface="Inter"/>
+                      </a:endParaRPr>
+                    </a:p>
+                  </a:txBody>
+                  <a:tcPr anchor="ctr"/>
+                </a:tc>
+                <a:extLst>
+                  <a:ext uri="{0D108BD9-81ED-4DB2-BD59-A6C34878D82A}">
+                    <a16:rowId xmlns:a16="http://schemas.microsoft.com/office/drawing/2014/main" val="634322110"/>
+                  </a:ext>
+                </a:extLst>
+              </a:tr>
+              <a:tr h="0">
+                <a:tc>
+                  <a:txBody>
+                    <a:bodyPr/>
+                    <a:lstStyle/>
+                    <a:p>
+                      <a:pPr>
+                        <a:lnSpc>
+                          <a:spcPts val="1500"/>
+                        </a:lnSpc>
+                        <a:buNone/>
+                      </a:pPr>
+                      <a:r>
+                        <a:rPr lang="en-US" b="0" dirty="0">
+                          <a:effectLst/>
+                          <a:latin typeface="Inter"/>
+                        </a:rPr>
+                        <a:t>1</a:t>
+                      </a:r>
+                    </a:p>
+                  </a:txBody>
+                  <a:tcPr anchor="ctr"/>
+                </a:tc>
+                <a:tc>
+                  <a:txBody>
+                    <a:bodyPr/>
+                    <a:lstStyle/>
+                    <a:p>
+                      <a:pPr>
+                        <a:lnSpc>
+                          <a:spcPts val="1500"/>
+                        </a:lnSpc>
+                        <a:buNone/>
+                      </a:pPr>
+                      <a:r>
+                        <a:rPr lang="en-US" b="0" dirty="0">
+                          <a:effectLst/>
+                        </a:rPr>
+                        <a:t>0</a:t>
+                      </a:r>
+                      <a:endParaRPr lang="en-US" b="0" dirty="0">
+                        <a:effectLst/>
+                        <a:latin typeface="Inter"/>
+                      </a:endParaRPr>
+                    </a:p>
+                  </a:txBody>
+                  <a:tcPr anchor="ctr"/>
+                </a:tc>
+                <a:tc>
+                  <a:txBody>
+                    <a:bodyPr/>
+                    <a:lstStyle/>
+                    <a:p>
+                      <a:pPr>
+                        <a:lnSpc>
+                          <a:spcPts val="1500"/>
+                        </a:lnSpc>
+                        <a:buNone/>
+                      </a:pPr>
+                      <a:r>
+                        <a:rPr lang="en-US" b="0">
+                          <a:effectLst/>
+                        </a:rPr>
+                        <a:t>1</a:t>
+                      </a:r>
+                      <a:endParaRPr lang="en-US" b="0">
+                        <a:effectLst/>
+                        <a:latin typeface="Inter"/>
+                      </a:endParaRPr>
+                    </a:p>
+                  </a:txBody>
+                  <a:tcPr anchor="ctr"/>
+                </a:tc>
+                <a:tc>
+                  <a:txBody>
+                    <a:bodyPr/>
+                    <a:lstStyle/>
+                    <a:p>
+                      <a:pPr>
+                        <a:lnSpc>
+                          <a:spcPts val="1500"/>
+                        </a:lnSpc>
+                        <a:buNone/>
+                      </a:pPr>
+                      <a:r>
+                        <a:rPr lang="en-US" b="0">
+                          <a:effectLst/>
+                        </a:rPr>
+                        <a:t>0</a:t>
+                      </a:r>
+                      <a:endParaRPr lang="en-US" b="0">
+                        <a:effectLst/>
+                        <a:latin typeface="Inter"/>
+                      </a:endParaRPr>
+                    </a:p>
+                  </a:txBody>
+                  <a:tcPr anchor="ctr"/>
+                </a:tc>
+                <a:tc>
+                  <a:txBody>
+                    <a:bodyPr/>
+                    <a:lstStyle/>
+                    <a:p>
+                      <a:pPr>
+                        <a:lnSpc>
+                          <a:spcPts val="1500"/>
+                        </a:lnSpc>
+                        <a:buNone/>
+                      </a:pPr>
+                      <a:r>
+                        <a:rPr lang="en-US" b="0">
+                          <a:effectLst/>
+                        </a:rPr>
+                        <a:t>1</a:t>
+                      </a:r>
+                      <a:endParaRPr lang="en-US" b="0">
+                        <a:effectLst/>
+                        <a:latin typeface="Inter"/>
+                      </a:endParaRPr>
+                    </a:p>
+                  </a:txBody>
+                  <a:tcPr anchor="ctr"/>
+                </a:tc>
+                <a:extLst>
+                  <a:ext uri="{0D108BD9-81ED-4DB2-BD59-A6C34878D82A}">
+                    <a16:rowId xmlns:a16="http://schemas.microsoft.com/office/drawing/2014/main" val="3011890546"/>
+                  </a:ext>
+                </a:extLst>
+              </a:tr>
+              <a:tr h="0">
+                <a:tc>
+                  <a:txBody>
+                    <a:bodyPr/>
+                    <a:lstStyle/>
+                    <a:p>
+                      <a:pPr>
+                        <a:lnSpc>
+                          <a:spcPts val="1500"/>
+                        </a:lnSpc>
+                        <a:buNone/>
+                      </a:pPr>
+                      <a:r>
+                        <a:rPr lang="en-US" b="0" dirty="0">
+                          <a:effectLst/>
+                          <a:latin typeface="Inter"/>
+                        </a:rPr>
+                        <a:t>2</a:t>
+                      </a:r>
+                    </a:p>
+                  </a:txBody>
+                  <a:tcPr anchor="ctr"/>
+                </a:tc>
+                <a:tc>
+                  <a:txBody>
+                    <a:bodyPr/>
+                    <a:lstStyle/>
+                    <a:p>
+                      <a:pPr>
+                        <a:lnSpc>
+                          <a:spcPts val="1500"/>
+                        </a:lnSpc>
+                        <a:buNone/>
+                      </a:pPr>
+                      <a:r>
+                        <a:rPr lang="en-US" b="0">
+                          <a:effectLst/>
+                        </a:rPr>
+                        <a:t>0</a:t>
+                      </a:r>
+                      <a:endParaRPr lang="en-US" b="0">
+                        <a:effectLst/>
+                        <a:latin typeface="Inter"/>
+                      </a:endParaRPr>
+                    </a:p>
+                  </a:txBody>
+                  <a:tcPr anchor="ctr"/>
+                </a:tc>
+                <a:tc>
+                  <a:txBody>
+                    <a:bodyPr/>
+                    <a:lstStyle/>
+                    <a:p>
+                      <a:pPr>
+                        <a:lnSpc>
+                          <a:spcPts val="1500"/>
+                        </a:lnSpc>
+                        <a:buNone/>
+                      </a:pPr>
+                      <a:r>
+                        <a:rPr lang="en-US" b="0">
+                          <a:effectLst/>
+                        </a:rPr>
+                        <a:t>1</a:t>
+                      </a:r>
+                      <a:endParaRPr lang="en-US" b="0">
+                        <a:effectLst/>
+                        <a:latin typeface="Inter"/>
+                      </a:endParaRPr>
+                    </a:p>
+                  </a:txBody>
+                  <a:tcPr anchor="ctr"/>
+                </a:tc>
+                <a:tc>
+                  <a:txBody>
+                    <a:bodyPr/>
+                    <a:lstStyle/>
+                    <a:p>
+                      <a:pPr>
+                        <a:lnSpc>
+                          <a:spcPts val="1500"/>
+                        </a:lnSpc>
+                        <a:buNone/>
+                      </a:pPr>
+                      <a:r>
+                        <a:rPr lang="en-US" b="0">
+                          <a:effectLst/>
+                        </a:rPr>
+                        <a:t>0</a:t>
+                      </a:r>
+                      <a:endParaRPr lang="en-US" b="0">
+                        <a:effectLst/>
+                        <a:latin typeface="Inter"/>
+                      </a:endParaRPr>
+                    </a:p>
+                  </a:txBody>
+                  <a:tcPr anchor="ctr"/>
+                </a:tc>
+                <a:tc>
+                  <a:txBody>
+                    <a:bodyPr/>
+                    <a:lstStyle/>
+                    <a:p>
+                      <a:pPr>
+                        <a:lnSpc>
+                          <a:spcPts val="1500"/>
+                        </a:lnSpc>
+                        <a:buNone/>
+                      </a:pPr>
+                      <a:r>
+                        <a:rPr lang="en-US" b="0">
+                          <a:effectLst/>
+                        </a:rPr>
+                        <a:t>2</a:t>
+                      </a:r>
+                      <a:endParaRPr lang="en-US" b="0">
+                        <a:effectLst/>
+                        <a:latin typeface="Inter"/>
+                      </a:endParaRPr>
+                    </a:p>
+                  </a:txBody>
+                  <a:tcPr anchor="ctr"/>
+                </a:tc>
+                <a:extLst>
+                  <a:ext uri="{0D108BD9-81ED-4DB2-BD59-A6C34878D82A}">
+                    <a16:rowId xmlns:a16="http://schemas.microsoft.com/office/drawing/2014/main" val="1188285922"/>
+                  </a:ext>
+                </a:extLst>
+              </a:tr>
+              <a:tr h="0">
+                <a:tc>
+                  <a:txBody>
+                    <a:bodyPr/>
+                    <a:lstStyle/>
+                    <a:p>
+                      <a:pPr>
+                        <a:lnSpc>
+                          <a:spcPts val="1500"/>
+                        </a:lnSpc>
+                        <a:buNone/>
+                      </a:pPr>
+                      <a:r>
+                        <a:rPr lang="en-US" b="0" dirty="0">
+                          <a:effectLst/>
+                          <a:latin typeface="Inter"/>
+                        </a:rPr>
+                        <a:t>3</a:t>
+                      </a:r>
+                    </a:p>
+                  </a:txBody>
+                  <a:tcPr anchor="ctr"/>
+                </a:tc>
+                <a:tc>
+                  <a:txBody>
+                    <a:bodyPr/>
+                    <a:lstStyle/>
+                    <a:p>
+                      <a:pPr>
+                        <a:lnSpc>
+                          <a:spcPts val="1500"/>
+                        </a:lnSpc>
+                        <a:buNone/>
+                      </a:pPr>
+                      <a:r>
+                        <a:rPr lang="en-US" b="0">
+                          <a:effectLst/>
+                        </a:rPr>
+                        <a:t>0</a:t>
+                      </a:r>
+                      <a:endParaRPr lang="en-US" b="0">
+                        <a:effectLst/>
+                        <a:latin typeface="Inter"/>
+                      </a:endParaRPr>
+                    </a:p>
+                  </a:txBody>
+                  <a:tcPr anchor="ctr"/>
+                </a:tc>
+                <a:tc>
+                  <a:txBody>
+                    <a:bodyPr/>
+                    <a:lstStyle/>
+                    <a:p>
+                      <a:pPr>
+                        <a:lnSpc>
+                          <a:spcPts val="1500"/>
+                        </a:lnSpc>
+                        <a:buNone/>
+                      </a:pPr>
+                      <a:r>
+                        <a:rPr lang="en-US" b="0">
+                          <a:effectLst/>
+                        </a:rPr>
+                        <a:t>1</a:t>
+                      </a:r>
+                      <a:endParaRPr lang="en-US" b="0">
+                        <a:effectLst/>
+                        <a:latin typeface="Inter"/>
+                      </a:endParaRPr>
+                    </a:p>
+                  </a:txBody>
+                  <a:tcPr anchor="ctr"/>
+                </a:tc>
+                <a:tc>
+                  <a:txBody>
+                    <a:bodyPr/>
+                    <a:lstStyle/>
+                    <a:p>
+                      <a:pPr>
+                        <a:lnSpc>
+                          <a:spcPts val="1500"/>
+                        </a:lnSpc>
+                        <a:buNone/>
+                      </a:pPr>
+                      <a:r>
+                        <a:rPr lang="en-US" b="0">
+                          <a:effectLst/>
+                        </a:rPr>
+                        <a:t>1</a:t>
+                      </a:r>
+                      <a:endParaRPr lang="en-US" b="0">
+                        <a:effectLst/>
+                        <a:latin typeface="Inter"/>
+                      </a:endParaRPr>
+                    </a:p>
+                  </a:txBody>
+                  <a:tcPr anchor="ctr"/>
+                </a:tc>
+                <a:tc>
+                  <a:txBody>
+                    <a:bodyPr/>
+                    <a:lstStyle/>
+                    <a:p>
+                      <a:pPr>
+                        <a:lnSpc>
+                          <a:spcPts val="1500"/>
+                        </a:lnSpc>
+                        <a:buNone/>
+                      </a:pPr>
+                      <a:r>
+                        <a:rPr lang="en-US" b="0">
+                          <a:effectLst/>
+                        </a:rPr>
+                        <a:t>2</a:t>
+                      </a:r>
+                      <a:endParaRPr lang="en-US" b="0">
+                        <a:effectLst/>
+                        <a:latin typeface="Inter"/>
+                      </a:endParaRPr>
+                    </a:p>
+                  </a:txBody>
+                  <a:tcPr anchor="ctr"/>
+                </a:tc>
+                <a:extLst>
+                  <a:ext uri="{0D108BD9-81ED-4DB2-BD59-A6C34878D82A}">
+                    <a16:rowId xmlns:a16="http://schemas.microsoft.com/office/drawing/2014/main" val="739378522"/>
+                  </a:ext>
+                </a:extLst>
+              </a:tr>
+              <a:tr h="0">
+                <a:tc>
+                  <a:txBody>
+                    <a:bodyPr/>
+                    <a:lstStyle/>
+                    <a:p>
+                      <a:pPr>
+                        <a:lnSpc>
+                          <a:spcPts val="1500"/>
+                        </a:lnSpc>
+                        <a:buNone/>
+                      </a:pPr>
+                      <a:r>
+                        <a:rPr lang="en-US" b="0" dirty="0">
+                          <a:effectLst/>
+                          <a:latin typeface="Inter"/>
+                        </a:rPr>
+                        <a:t>4</a:t>
+                      </a:r>
+                    </a:p>
+                  </a:txBody>
+                  <a:tcPr anchor="ctr"/>
+                </a:tc>
+                <a:tc>
+                  <a:txBody>
+                    <a:bodyPr/>
+                    <a:lstStyle/>
+                    <a:p>
+                      <a:pPr>
+                        <a:lnSpc>
+                          <a:spcPts val="1500"/>
+                        </a:lnSpc>
+                        <a:buNone/>
+                      </a:pPr>
+                      <a:r>
+                        <a:rPr lang="en-US" b="0" dirty="0">
+                          <a:effectLst/>
+                        </a:rPr>
+                        <a:t>1</a:t>
+                      </a:r>
+                      <a:endParaRPr lang="en-US" b="0" dirty="0">
+                        <a:effectLst/>
+                        <a:latin typeface="Inter"/>
+                      </a:endParaRPr>
+                    </a:p>
+                  </a:txBody>
+                  <a:tcPr anchor="ctr"/>
+                </a:tc>
+                <a:tc>
+                  <a:txBody>
+                    <a:bodyPr/>
+                    <a:lstStyle/>
+                    <a:p>
+                      <a:pPr>
+                        <a:lnSpc>
+                          <a:spcPts val="1500"/>
+                        </a:lnSpc>
+                        <a:buNone/>
+                      </a:pPr>
+                      <a:r>
+                        <a:rPr lang="en-US" b="0">
+                          <a:effectLst/>
+                        </a:rPr>
+                        <a:t>1</a:t>
+                      </a:r>
+                      <a:endParaRPr lang="en-US" b="0">
+                        <a:effectLst/>
+                        <a:latin typeface="Inter"/>
+                      </a:endParaRPr>
+                    </a:p>
+                  </a:txBody>
+                  <a:tcPr anchor="ctr"/>
+                </a:tc>
+                <a:tc>
+                  <a:txBody>
+                    <a:bodyPr/>
+                    <a:lstStyle/>
+                    <a:p>
+                      <a:pPr>
+                        <a:lnSpc>
+                          <a:spcPts val="1500"/>
+                        </a:lnSpc>
+                        <a:buNone/>
+                      </a:pPr>
+                      <a:r>
+                        <a:rPr lang="en-US" b="0">
+                          <a:effectLst/>
+                        </a:rPr>
+                        <a:t>1</a:t>
+                      </a:r>
+                      <a:endParaRPr lang="en-US" b="0">
+                        <a:effectLst/>
+                        <a:latin typeface="Inter"/>
+                      </a:endParaRPr>
+                    </a:p>
+                  </a:txBody>
+                  <a:tcPr anchor="ctr"/>
+                </a:tc>
+                <a:tc>
+                  <a:txBody>
+                    <a:bodyPr/>
+                    <a:lstStyle/>
+                    <a:p>
+                      <a:pPr>
+                        <a:lnSpc>
+                          <a:spcPts val="1500"/>
+                        </a:lnSpc>
+                        <a:buNone/>
+                      </a:pPr>
+                      <a:r>
+                        <a:rPr lang="en-US" b="0">
+                          <a:effectLst/>
+                        </a:rPr>
+                        <a:t>2</a:t>
+                      </a:r>
+                      <a:endParaRPr lang="en-US" b="0">
+                        <a:effectLst/>
+                        <a:latin typeface="Inter"/>
+                      </a:endParaRPr>
+                    </a:p>
+                  </a:txBody>
+                  <a:tcPr anchor="ctr"/>
+                </a:tc>
+                <a:extLst>
+                  <a:ext uri="{0D108BD9-81ED-4DB2-BD59-A6C34878D82A}">
+                    <a16:rowId xmlns:a16="http://schemas.microsoft.com/office/drawing/2014/main" val="1216407578"/>
+                  </a:ext>
+                </a:extLst>
+              </a:tr>
+              <a:tr h="0">
+                <a:tc>
+                  <a:txBody>
+                    <a:bodyPr/>
+                    <a:lstStyle/>
+                    <a:p>
+                      <a:pPr>
+                        <a:lnSpc>
+                          <a:spcPts val="1500"/>
+                        </a:lnSpc>
+                        <a:buNone/>
+                      </a:pPr>
+                      <a:r>
+                        <a:rPr lang="en-US" b="0" dirty="0">
+                          <a:effectLst/>
+                          <a:latin typeface="Inter"/>
+                        </a:rPr>
+                        <a:t>5</a:t>
+                      </a:r>
+                    </a:p>
+                  </a:txBody>
+                  <a:tcPr anchor="ctr"/>
+                </a:tc>
+                <a:tc>
+                  <a:txBody>
+                    <a:bodyPr/>
+                    <a:lstStyle/>
+                    <a:p>
+                      <a:pPr>
+                        <a:lnSpc>
+                          <a:spcPts val="1500"/>
+                        </a:lnSpc>
+                        <a:buNone/>
+                      </a:pPr>
+                      <a:r>
+                        <a:rPr lang="en-US" b="0">
+                          <a:effectLst/>
+                        </a:rPr>
+                        <a:t>1</a:t>
+                      </a:r>
+                      <a:endParaRPr lang="en-US" b="0">
+                        <a:effectLst/>
+                        <a:latin typeface="Inter"/>
+                      </a:endParaRPr>
+                    </a:p>
+                  </a:txBody>
+                  <a:tcPr anchor="ctr"/>
+                </a:tc>
+                <a:tc>
+                  <a:txBody>
+                    <a:bodyPr/>
+                    <a:lstStyle/>
+                    <a:p>
+                      <a:pPr>
+                        <a:lnSpc>
+                          <a:spcPts val="1500"/>
+                        </a:lnSpc>
+                        <a:buNone/>
+                      </a:pPr>
+                      <a:r>
+                        <a:rPr lang="en-US" b="0">
+                          <a:effectLst/>
+                        </a:rPr>
+                        <a:t>2</a:t>
+                      </a:r>
+                      <a:endParaRPr lang="en-US" b="0">
+                        <a:effectLst/>
+                        <a:latin typeface="Inter"/>
+                      </a:endParaRPr>
+                    </a:p>
+                  </a:txBody>
+                  <a:tcPr anchor="ctr"/>
+                </a:tc>
+                <a:tc>
+                  <a:txBody>
+                    <a:bodyPr/>
+                    <a:lstStyle/>
+                    <a:p>
+                      <a:pPr>
+                        <a:lnSpc>
+                          <a:spcPts val="1500"/>
+                        </a:lnSpc>
+                        <a:buNone/>
+                      </a:pPr>
+                      <a:r>
+                        <a:rPr lang="en-US" b="0">
+                          <a:effectLst/>
+                        </a:rPr>
+                        <a:t>1</a:t>
+                      </a:r>
+                      <a:endParaRPr lang="en-US" b="0">
+                        <a:effectLst/>
+                        <a:latin typeface="Inter"/>
+                      </a:endParaRPr>
+                    </a:p>
+                  </a:txBody>
+                  <a:tcPr anchor="ctr"/>
+                </a:tc>
+                <a:tc>
+                  <a:txBody>
+                    <a:bodyPr/>
+                    <a:lstStyle/>
+                    <a:p>
+                      <a:pPr>
+                        <a:lnSpc>
+                          <a:spcPts val="1500"/>
+                        </a:lnSpc>
+                        <a:buNone/>
+                      </a:pPr>
+                      <a:r>
+                        <a:rPr lang="en-US" b="0">
+                          <a:effectLst/>
+                        </a:rPr>
+                        <a:t>2</a:t>
+                      </a:r>
+                      <a:endParaRPr lang="en-US" b="0">
+                        <a:effectLst/>
+                        <a:latin typeface="Inter"/>
+                      </a:endParaRPr>
+                    </a:p>
+                  </a:txBody>
+                  <a:tcPr anchor="ctr"/>
+                </a:tc>
+                <a:extLst>
+                  <a:ext uri="{0D108BD9-81ED-4DB2-BD59-A6C34878D82A}">
+                    <a16:rowId xmlns:a16="http://schemas.microsoft.com/office/drawing/2014/main" val="2265272650"/>
+                  </a:ext>
+                </a:extLst>
+              </a:tr>
+              <a:tr h="0">
+                <a:tc>
+                  <a:txBody>
+                    <a:bodyPr/>
+                    <a:lstStyle/>
+                    <a:p>
+                      <a:pPr>
+                        <a:lnSpc>
+                          <a:spcPts val="1500"/>
+                        </a:lnSpc>
+                        <a:buNone/>
+                      </a:pPr>
+                      <a:r>
+                        <a:rPr lang="en-US" b="0" dirty="0">
+                          <a:effectLst/>
+                          <a:latin typeface="Inter"/>
+                        </a:rPr>
+                        <a:t>6</a:t>
+                      </a:r>
+                    </a:p>
+                  </a:txBody>
+                  <a:tcPr anchor="ctr"/>
+                </a:tc>
+                <a:tc>
+                  <a:txBody>
+                    <a:bodyPr/>
+                    <a:lstStyle/>
+                    <a:p>
+                      <a:pPr>
+                        <a:lnSpc>
+                          <a:spcPts val="1500"/>
+                        </a:lnSpc>
+                        <a:buNone/>
+                      </a:pPr>
+                      <a:r>
+                        <a:rPr lang="en-US" b="0">
+                          <a:effectLst/>
+                        </a:rPr>
+                        <a:t>1</a:t>
+                      </a:r>
+                      <a:endParaRPr lang="en-US" b="0">
+                        <a:effectLst/>
+                        <a:latin typeface="Inter"/>
+                      </a:endParaRPr>
+                    </a:p>
+                  </a:txBody>
+                  <a:tcPr anchor="ctr"/>
+                </a:tc>
+                <a:tc>
+                  <a:txBody>
+                    <a:bodyPr/>
+                    <a:lstStyle/>
+                    <a:p>
+                      <a:pPr>
+                        <a:lnSpc>
+                          <a:spcPts val="1500"/>
+                        </a:lnSpc>
+                        <a:buNone/>
+                      </a:pPr>
+                      <a:r>
+                        <a:rPr lang="en-US" b="0">
+                          <a:effectLst/>
+                        </a:rPr>
+                        <a:t>3</a:t>
+                      </a:r>
+                      <a:endParaRPr lang="en-US" b="0">
+                        <a:effectLst/>
+                        <a:latin typeface="Inter"/>
+                      </a:endParaRPr>
+                    </a:p>
+                  </a:txBody>
+                  <a:tcPr anchor="ctr"/>
+                </a:tc>
+                <a:tc>
+                  <a:txBody>
+                    <a:bodyPr/>
+                    <a:lstStyle/>
+                    <a:p>
+                      <a:pPr>
+                        <a:lnSpc>
+                          <a:spcPts val="1500"/>
+                        </a:lnSpc>
+                        <a:buNone/>
+                      </a:pPr>
+                      <a:r>
+                        <a:rPr lang="en-US" b="0">
+                          <a:effectLst/>
+                        </a:rPr>
+                        <a:t>1</a:t>
+                      </a:r>
+                      <a:endParaRPr lang="en-US" b="0">
+                        <a:effectLst/>
+                        <a:latin typeface="Inter"/>
+                      </a:endParaRPr>
+                    </a:p>
+                  </a:txBody>
+                  <a:tcPr anchor="ctr"/>
+                </a:tc>
+                <a:tc>
+                  <a:txBody>
+                    <a:bodyPr/>
+                    <a:lstStyle/>
+                    <a:p>
+                      <a:pPr>
+                        <a:lnSpc>
+                          <a:spcPts val="1500"/>
+                        </a:lnSpc>
+                        <a:buNone/>
+                      </a:pPr>
+                      <a:r>
+                        <a:rPr lang="en-US" b="0" dirty="0">
+                          <a:effectLst/>
+                        </a:rPr>
+                        <a:t>2</a:t>
+                      </a:r>
+                      <a:endParaRPr lang="en-US" b="0" dirty="0">
+                        <a:effectLst/>
+                        <a:latin typeface="Inter"/>
+                      </a:endParaRPr>
+                    </a:p>
+                  </a:txBody>
+                  <a:tcPr anchor="ctr"/>
+                </a:tc>
+                <a:extLst>
+                  <a:ext uri="{0D108BD9-81ED-4DB2-BD59-A6C34878D82A}">
+                    <a16:rowId xmlns:a16="http://schemas.microsoft.com/office/drawing/2014/main" val="1530667241"/>
+                  </a:ext>
+                </a:extLst>
+              </a:tr>
+            </a:tbl>
+          </a:graphicData>
+        </a:graphic>
+      </p:graphicFrame>
+      <p:sp>
+        <p:nvSpPr>
+          <p:cNvPr id="12" name="Rectangle 11">
+            <a:extLst>
+              <a:ext uri="{FF2B5EF4-FFF2-40B4-BE49-F238E27FC236}">
+                <a16:creationId xmlns:a16="http://schemas.microsoft.com/office/drawing/2014/main" id="{C9948AA4-B9AA-AFA9-7950-015192603358}"/>
+              </a:ext>
+            </a:extLst>
+          </p:cNvPr>
+          <p:cNvSpPr/>
+          <p:nvPr/>
+        </p:nvSpPr>
+        <p:spPr>
+          <a:xfrm>
+            <a:off x="1016939" y="4687746"/>
+            <a:ext cx="4060682" cy="879677"/>
+          </a:xfrm>
+          <a:prstGeom prst="rect">
+            <a:avLst/>
+          </a:prstGeom>
+          <a:solidFill>
+            <a:srgbClr val="99CCFF">
+              <a:alpha val="16863"/>
+            </a:srgbClr>
+          </a:solidFill>
+        </p:spPr>
+        <p:style>
+          <a:lnRef idx="1">
+            <a:schemeClr val="accent2"/>
+          </a:lnRef>
+          <a:fillRef idx="2">
+            <a:schemeClr val="accent2"/>
+          </a:fillRef>
+          <a:effectRef idx="1">
+            <a:schemeClr val="accent2"/>
+          </a:effectRef>
+          <a:fontRef idx="minor">
+            <a:schemeClr val="dk1"/>
+          </a:fontRef>
+        </p:style>
+        <p:txBody>
+          <a:bodyPr rtlCol="0" anchor="ctr"/>
+          <a:lstStyle/>
+          <a:p>
+            <a:pPr algn="ctr"/>
+            <a:endParaRPr lang="en-US"/>
           </a:p>
         </p:txBody>
       </p:sp>
       <p:sp>
         <p:nvSpPr>
-          <p:cNvPr id="3" name="Content Placeholder 2">
+          <p:cNvPr id="14" name="Rectangle 13">
             <a:extLst>
               <a:ext uri="{FF2B5EF4-FFF2-40B4-BE49-F238E27FC236}">
-                <a16:creationId xmlns:a16="http://schemas.microsoft.com/office/drawing/2014/main" id="{991A9790-95CE-2D89-3868-95BA17EDDC2C}"/>
+                <a16:creationId xmlns:a16="http://schemas.microsoft.com/office/drawing/2014/main" id="{F6F1A002-2774-67D5-E4D1-B686807A37DB}"/>
+              </a:ext>
+            </a:extLst>
+          </p:cNvPr>
+          <p:cNvSpPr/>
+          <p:nvPr/>
+        </p:nvSpPr>
+        <p:spPr>
+          <a:xfrm>
+            <a:off x="1016939" y="5835939"/>
+            <a:ext cx="4060682" cy="333368"/>
+          </a:xfrm>
+          <a:prstGeom prst="rect">
+            <a:avLst/>
+          </a:prstGeom>
+          <a:solidFill>
+            <a:srgbClr val="99CCFF">
+              <a:alpha val="16863"/>
+            </a:srgbClr>
+          </a:solidFill>
+        </p:spPr>
+        <p:style>
+          <a:lnRef idx="1">
+            <a:schemeClr val="accent2"/>
+          </a:lnRef>
+          <a:fillRef idx="2">
+            <a:schemeClr val="accent2"/>
+          </a:fillRef>
+          <a:effectRef idx="1">
+            <a:schemeClr val="accent2"/>
+          </a:effectRef>
+          <a:fontRef idx="minor">
+            <a:schemeClr val="dk1"/>
+          </a:fontRef>
+        </p:style>
+        <p:txBody>
+          <a:bodyPr rtlCol="0" anchor="ctr"/>
+          <a:lstStyle/>
+          <a:p>
+            <a:pPr algn="ctr"/>
+            <a:endParaRPr lang="en-US"/>
+          </a:p>
+        </p:txBody>
+      </p:sp>
+      <p:sp>
+        <p:nvSpPr>
+          <p:cNvPr id="15" name="Rectangle 14">
+            <a:extLst>
+              <a:ext uri="{FF2B5EF4-FFF2-40B4-BE49-F238E27FC236}">
+                <a16:creationId xmlns:a16="http://schemas.microsoft.com/office/drawing/2014/main" id="{64A70BAA-E7A8-DE50-B2B7-A3D0F0C975F0}"/>
+              </a:ext>
+            </a:extLst>
+          </p:cNvPr>
+          <p:cNvSpPr/>
+          <p:nvPr/>
+        </p:nvSpPr>
+        <p:spPr>
+          <a:xfrm>
+            <a:off x="1016939" y="6181477"/>
+            <a:ext cx="4060682" cy="268516"/>
+          </a:xfrm>
+          <a:prstGeom prst="rect">
+            <a:avLst/>
+          </a:prstGeom>
+          <a:solidFill>
+            <a:srgbClr val="92D050">
+              <a:alpha val="50196"/>
+            </a:srgbClr>
+          </a:solidFill>
+        </p:spPr>
+        <p:style>
+          <a:lnRef idx="1">
+            <a:schemeClr val="accent2"/>
+          </a:lnRef>
+          <a:fillRef idx="2">
+            <a:schemeClr val="accent2"/>
+          </a:fillRef>
+          <a:effectRef idx="1">
+            <a:schemeClr val="accent2"/>
+          </a:effectRef>
+          <a:fontRef idx="minor">
+            <a:schemeClr val="dk1"/>
+          </a:fontRef>
+        </p:style>
+        <p:txBody>
+          <a:bodyPr rtlCol="0" anchor="ctr"/>
+          <a:lstStyle/>
+          <a:p>
+            <a:pPr algn="ctr"/>
+            <a:endParaRPr lang="en-US" dirty="0"/>
+          </a:p>
+        </p:txBody>
+      </p:sp>
+      <p:graphicFrame>
+        <p:nvGraphicFramePr>
+          <p:cNvPr id="16" name="Table 15">
+            <a:extLst>
+              <a:ext uri="{FF2B5EF4-FFF2-40B4-BE49-F238E27FC236}">
+                <a16:creationId xmlns:a16="http://schemas.microsoft.com/office/drawing/2014/main" id="{EB78A196-B731-7867-596E-BA90529FED8E}"/>
+              </a:ext>
+            </a:extLst>
+          </p:cNvPr>
+          <p:cNvGraphicFramePr>
+            <a:graphicFrameLocks noGrp="1"/>
+          </p:cNvGraphicFramePr>
+          <p:nvPr>
+            <p:extLst>
+              <p:ext uri="{D42A27DB-BD31-4B8C-83A1-F6EECF244321}">
+                <p14:modId xmlns:p14="http://schemas.microsoft.com/office/powerpoint/2010/main" val="2816827500"/>
+              </p:ext>
+            </p:extLst>
+          </p:nvPr>
+        </p:nvGraphicFramePr>
+        <p:xfrm>
+          <a:off x="6990018" y="1266142"/>
+          <a:ext cx="664647" cy="2546858"/>
+        </p:xfrm>
+        <a:graphic>
+          <a:graphicData uri="http://schemas.openxmlformats.org/drawingml/2006/table">
+            <a:tbl>
+              <a:tblPr>
+                <a:tableStyleId>{BC89EF96-8CEA-46FF-86C4-4CE0E7609802}</a:tableStyleId>
+              </a:tblPr>
+              <a:tblGrid>
+                <a:gridCol w="664647">
+                  <a:extLst>
+                    <a:ext uri="{9D8B030D-6E8A-4147-A177-3AD203B41FA5}">
+                      <a16:colId xmlns:a16="http://schemas.microsoft.com/office/drawing/2014/main" val="1392908172"/>
+                    </a:ext>
+                  </a:extLst>
+                </a:gridCol>
+              </a:tblGrid>
+              <a:tr h="0">
+                <a:tc>
+                  <a:txBody>
+                    <a:bodyPr/>
+                    <a:lstStyle/>
+                    <a:p>
+                      <a:pPr>
+                        <a:lnSpc>
+                          <a:spcPts val="1500"/>
+                        </a:lnSpc>
+                        <a:buNone/>
+                      </a:pPr>
+                      <a:r>
+                        <a:rPr lang="en-US" b="1" dirty="0">
+                          <a:effectLst/>
+                        </a:rPr>
+                        <a:t>SA </a:t>
+                      </a:r>
+                    </a:p>
+                    <a:p>
+                      <a:pPr>
+                        <a:lnSpc>
+                          <a:spcPts val="1500"/>
+                        </a:lnSpc>
+                        <a:buNone/>
+                      </a:pPr>
+                      <a:endParaRPr lang="en-US" b="1" dirty="0">
+                        <a:effectLst/>
+                        <a:latin typeface="Inter"/>
+                      </a:endParaRPr>
+                    </a:p>
+                  </a:txBody>
+                  <a:tcPr anchor="ctr"/>
+                </a:tc>
+                <a:extLst>
+                  <a:ext uri="{0D108BD9-81ED-4DB2-BD59-A6C34878D82A}">
+                    <a16:rowId xmlns:a16="http://schemas.microsoft.com/office/drawing/2014/main" val="3667177975"/>
+                  </a:ext>
+                </a:extLst>
+              </a:tr>
+              <a:tr h="0">
+                <a:tc>
+                  <a:txBody>
+                    <a:bodyPr/>
+                    <a:lstStyle/>
+                    <a:p>
+                      <a:pPr>
+                        <a:lnSpc>
+                          <a:spcPts val="1500"/>
+                        </a:lnSpc>
+                        <a:buNone/>
+                      </a:pPr>
+                      <a:r>
+                        <a:rPr lang="en-US" b="0" dirty="0">
+                          <a:effectLst/>
+                        </a:rPr>
+                        <a:t>6</a:t>
+                      </a:r>
+                      <a:endParaRPr lang="en-US" b="0" dirty="0">
+                        <a:effectLst/>
+                        <a:latin typeface="Inter"/>
+                      </a:endParaRPr>
+                    </a:p>
+                  </a:txBody>
+                  <a:tcPr anchor="ctr"/>
+                </a:tc>
+                <a:extLst>
+                  <a:ext uri="{0D108BD9-81ED-4DB2-BD59-A6C34878D82A}">
+                    <a16:rowId xmlns:a16="http://schemas.microsoft.com/office/drawing/2014/main" val="3205448798"/>
+                  </a:ext>
+                </a:extLst>
+              </a:tr>
+              <a:tr h="0">
+                <a:tc>
+                  <a:txBody>
+                    <a:bodyPr/>
+                    <a:lstStyle/>
+                    <a:p>
+                      <a:pPr>
+                        <a:lnSpc>
+                          <a:spcPts val="1500"/>
+                        </a:lnSpc>
+                        <a:buNone/>
+                      </a:pPr>
+                      <a:r>
+                        <a:rPr lang="en-US" b="0" dirty="0">
+                          <a:effectLst/>
+                          <a:latin typeface="Inter"/>
+                        </a:rPr>
+                        <a:t>/</a:t>
+                      </a:r>
+                    </a:p>
+                  </a:txBody>
+                  <a:tcPr anchor="ctr"/>
+                </a:tc>
+                <a:extLst>
+                  <a:ext uri="{0D108BD9-81ED-4DB2-BD59-A6C34878D82A}">
+                    <a16:rowId xmlns:a16="http://schemas.microsoft.com/office/drawing/2014/main" val="1718354026"/>
+                  </a:ext>
+                </a:extLst>
+              </a:tr>
+              <a:tr h="0">
+                <a:tc>
+                  <a:txBody>
+                    <a:bodyPr/>
+                    <a:lstStyle/>
+                    <a:p>
+                      <a:pPr>
+                        <a:lnSpc>
+                          <a:spcPts val="1500"/>
+                        </a:lnSpc>
+                        <a:buNone/>
+                      </a:pPr>
+                      <a:r>
+                        <a:rPr lang="en-US" b="0" dirty="0">
+                          <a:effectLst/>
+                          <a:latin typeface="Inter"/>
+                        </a:rPr>
+                        <a:t>/</a:t>
+                      </a:r>
+                    </a:p>
+                  </a:txBody>
+                  <a:tcPr anchor="ctr"/>
+                </a:tc>
+                <a:extLst>
+                  <a:ext uri="{0D108BD9-81ED-4DB2-BD59-A6C34878D82A}">
+                    <a16:rowId xmlns:a16="http://schemas.microsoft.com/office/drawing/2014/main" val="2652163244"/>
+                  </a:ext>
+                </a:extLst>
+              </a:tr>
+              <a:tr h="0">
+                <a:tc>
+                  <a:txBody>
+                    <a:bodyPr/>
+                    <a:lstStyle/>
+                    <a:p>
+                      <a:pPr>
+                        <a:lnSpc>
+                          <a:spcPts val="1500"/>
+                        </a:lnSpc>
+                        <a:buNone/>
+                      </a:pPr>
+                      <a:r>
+                        <a:rPr lang="en-US" b="0" dirty="0">
+                          <a:effectLst/>
+                          <a:latin typeface="Inter"/>
+                        </a:rPr>
+                        <a:t>/</a:t>
+                      </a:r>
+                    </a:p>
+                  </a:txBody>
+                  <a:tcPr anchor="ctr"/>
+                </a:tc>
+                <a:extLst>
+                  <a:ext uri="{0D108BD9-81ED-4DB2-BD59-A6C34878D82A}">
+                    <a16:rowId xmlns:a16="http://schemas.microsoft.com/office/drawing/2014/main" val="3304165063"/>
+                  </a:ext>
+                </a:extLst>
+              </a:tr>
+              <a:tr h="0">
+                <a:tc>
+                  <a:txBody>
+                    <a:bodyPr/>
+                    <a:lstStyle/>
+                    <a:p>
+                      <a:pPr>
+                        <a:lnSpc>
+                          <a:spcPts val="1500"/>
+                        </a:lnSpc>
+                        <a:buNone/>
+                      </a:pPr>
+                      <a:r>
+                        <a:rPr lang="en-US" b="0" dirty="0">
+                          <a:effectLst/>
+                        </a:rPr>
+                        <a:t>0</a:t>
+                      </a:r>
+                      <a:endParaRPr lang="en-US" b="0" dirty="0">
+                        <a:effectLst/>
+                        <a:latin typeface="Inter"/>
+                      </a:endParaRPr>
+                    </a:p>
+                  </a:txBody>
+                  <a:tcPr anchor="ctr"/>
+                </a:tc>
+                <a:extLst>
+                  <a:ext uri="{0D108BD9-81ED-4DB2-BD59-A6C34878D82A}">
+                    <a16:rowId xmlns:a16="http://schemas.microsoft.com/office/drawing/2014/main" val="3904092080"/>
+                  </a:ext>
+                </a:extLst>
+              </a:tr>
+              <a:tr h="0">
+                <a:tc>
+                  <a:txBody>
+                    <a:bodyPr/>
+                    <a:lstStyle/>
+                    <a:p>
+                      <a:pPr>
+                        <a:lnSpc>
+                          <a:spcPts val="1500"/>
+                        </a:lnSpc>
+                        <a:buNone/>
+                      </a:pPr>
+                      <a:r>
+                        <a:rPr lang="en-US" b="0" dirty="0">
+                          <a:effectLst/>
+                          <a:latin typeface="Inter"/>
+                        </a:rPr>
+                        <a:t>/</a:t>
+                      </a:r>
+                    </a:p>
+                  </a:txBody>
+                  <a:tcPr anchor="ctr"/>
+                </a:tc>
+                <a:extLst>
+                  <a:ext uri="{0D108BD9-81ED-4DB2-BD59-A6C34878D82A}">
+                    <a16:rowId xmlns:a16="http://schemas.microsoft.com/office/drawing/2014/main" val="2411291410"/>
+                  </a:ext>
+                </a:extLst>
+              </a:tr>
+              <a:tr h="0">
+                <a:tc>
+                  <a:txBody>
+                    <a:bodyPr/>
+                    <a:lstStyle/>
+                    <a:p>
+                      <a:pPr>
+                        <a:lnSpc>
+                          <a:spcPts val="1500"/>
+                        </a:lnSpc>
+                        <a:buNone/>
+                      </a:pPr>
+                      <a:r>
+                        <a:rPr lang="en-US" b="0" dirty="0">
+                          <a:effectLst/>
+                          <a:latin typeface="Inter"/>
+                        </a:rPr>
+                        <a:t>/</a:t>
+                      </a:r>
+                    </a:p>
+                  </a:txBody>
+                  <a:tcPr anchor="ctr"/>
+                </a:tc>
+                <a:extLst>
+                  <a:ext uri="{0D108BD9-81ED-4DB2-BD59-A6C34878D82A}">
+                    <a16:rowId xmlns:a16="http://schemas.microsoft.com/office/drawing/2014/main" val="3866069921"/>
+                  </a:ext>
+                </a:extLst>
+              </a:tr>
+            </a:tbl>
+          </a:graphicData>
+        </a:graphic>
+      </p:graphicFrame>
+      <p:graphicFrame>
+        <p:nvGraphicFramePr>
+          <p:cNvPr id="17" name="Table 16">
+            <a:extLst>
+              <a:ext uri="{FF2B5EF4-FFF2-40B4-BE49-F238E27FC236}">
+                <a16:creationId xmlns:a16="http://schemas.microsoft.com/office/drawing/2014/main" id="{824E9915-E748-D3FA-A56C-45A7EF906B98}"/>
+              </a:ext>
+            </a:extLst>
+          </p:cNvPr>
+          <p:cNvGraphicFramePr>
+            <a:graphicFrameLocks noGrp="1"/>
+          </p:cNvGraphicFramePr>
+          <p:nvPr>
+            <p:extLst>
+              <p:ext uri="{D42A27DB-BD31-4B8C-83A1-F6EECF244321}">
+                <p14:modId xmlns:p14="http://schemas.microsoft.com/office/powerpoint/2010/main" val="425041233"/>
+              </p:ext>
+            </p:extLst>
+          </p:nvPr>
+        </p:nvGraphicFramePr>
+        <p:xfrm>
+          <a:off x="6419788" y="1263475"/>
+          <a:ext cx="570230" cy="2547620"/>
+        </p:xfrm>
+        <a:graphic>
+          <a:graphicData uri="http://schemas.openxmlformats.org/drawingml/2006/table">
+            <a:tbl>
+              <a:tblPr>
+                <a:tableStyleId>{BC89EF96-8CEA-46FF-86C4-4CE0E7609802}</a:tableStyleId>
+              </a:tblPr>
+              <a:tblGrid>
+                <a:gridCol w="570230">
+                  <a:extLst>
+                    <a:ext uri="{9D8B030D-6E8A-4147-A177-3AD203B41FA5}">
+                      <a16:colId xmlns:a16="http://schemas.microsoft.com/office/drawing/2014/main" val="2212543004"/>
+                    </a:ext>
+                  </a:extLst>
+                </a:gridCol>
+              </a:tblGrid>
+              <a:tr h="0">
+                <a:tc>
+                  <a:txBody>
+                    <a:bodyPr/>
+                    <a:lstStyle/>
+                    <a:p>
+                      <a:pPr>
+                        <a:lnSpc>
+                          <a:spcPts val="1500"/>
+                        </a:lnSpc>
+                        <a:buNone/>
+                      </a:pPr>
+                      <a:r>
+                        <a:rPr lang="en-US" b="1" dirty="0" err="1">
+                          <a:effectLst/>
+                        </a:rPr>
+                        <a:t>i</a:t>
+                      </a:r>
+                      <a:endParaRPr lang="en-US" b="1" dirty="0">
+                        <a:effectLst/>
+                      </a:endParaRPr>
+                    </a:p>
+                    <a:p>
+                      <a:pPr>
+                        <a:lnSpc>
+                          <a:spcPts val="1500"/>
+                        </a:lnSpc>
+                        <a:buNone/>
+                      </a:pPr>
+                      <a:endParaRPr lang="en-US" b="1" dirty="0">
+                        <a:effectLst/>
+                        <a:latin typeface="Inter"/>
+                      </a:endParaRPr>
+                    </a:p>
+                  </a:txBody>
+                  <a:tcPr anchor="ctr"/>
+                </a:tc>
+                <a:extLst>
+                  <a:ext uri="{0D108BD9-81ED-4DB2-BD59-A6C34878D82A}">
+                    <a16:rowId xmlns:a16="http://schemas.microsoft.com/office/drawing/2014/main" val="2007379012"/>
+                  </a:ext>
+                </a:extLst>
+              </a:tr>
+              <a:tr h="0">
+                <a:tc>
+                  <a:txBody>
+                    <a:bodyPr/>
+                    <a:lstStyle/>
+                    <a:p>
+                      <a:pPr>
+                        <a:lnSpc>
+                          <a:spcPts val="1500"/>
+                        </a:lnSpc>
+                        <a:buNone/>
+                      </a:pPr>
+                      <a:r>
+                        <a:rPr lang="en-US" b="0" dirty="0">
+                          <a:effectLst/>
+                          <a:latin typeface="Inter"/>
+                        </a:rPr>
+                        <a:t>0</a:t>
+                      </a:r>
+                    </a:p>
+                  </a:txBody>
+                  <a:tcPr anchor="ctr"/>
+                </a:tc>
+                <a:extLst>
+                  <a:ext uri="{0D108BD9-81ED-4DB2-BD59-A6C34878D82A}">
+                    <a16:rowId xmlns:a16="http://schemas.microsoft.com/office/drawing/2014/main" val="3101438026"/>
+                  </a:ext>
+                </a:extLst>
+              </a:tr>
+              <a:tr h="0">
+                <a:tc>
+                  <a:txBody>
+                    <a:bodyPr/>
+                    <a:lstStyle/>
+                    <a:p>
+                      <a:pPr>
+                        <a:lnSpc>
+                          <a:spcPts val="1500"/>
+                        </a:lnSpc>
+                        <a:buNone/>
+                      </a:pPr>
+                      <a:r>
+                        <a:rPr lang="en-US" b="0" dirty="0">
+                          <a:effectLst/>
+                          <a:latin typeface="Inter"/>
+                        </a:rPr>
+                        <a:t>1</a:t>
+                      </a:r>
+                    </a:p>
+                  </a:txBody>
+                  <a:tcPr anchor="ctr"/>
+                </a:tc>
+                <a:extLst>
+                  <a:ext uri="{0D108BD9-81ED-4DB2-BD59-A6C34878D82A}">
+                    <a16:rowId xmlns:a16="http://schemas.microsoft.com/office/drawing/2014/main" val="211447457"/>
+                  </a:ext>
+                </a:extLst>
+              </a:tr>
+              <a:tr h="0">
+                <a:tc>
+                  <a:txBody>
+                    <a:bodyPr/>
+                    <a:lstStyle/>
+                    <a:p>
+                      <a:pPr>
+                        <a:lnSpc>
+                          <a:spcPts val="1500"/>
+                        </a:lnSpc>
+                        <a:buNone/>
+                      </a:pPr>
+                      <a:r>
+                        <a:rPr lang="en-US" b="0" dirty="0">
+                          <a:effectLst/>
+                          <a:latin typeface="Inter"/>
+                        </a:rPr>
+                        <a:t>2</a:t>
+                      </a:r>
+                    </a:p>
+                  </a:txBody>
+                  <a:tcPr anchor="ctr"/>
+                </a:tc>
+                <a:extLst>
+                  <a:ext uri="{0D108BD9-81ED-4DB2-BD59-A6C34878D82A}">
+                    <a16:rowId xmlns:a16="http://schemas.microsoft.com/office/drawing/2014/main" val="3579164848"/>
+                  </a:ext>
+                </a:extLst>
+              </a:tr>
+              <a:tr h="0">
+                <a:tc>
+                  <a:txBody>
+                    <a:bodyPr/>
+                    <a:lstStyle/>
+                    <a:p>
+                      <a:pPr>
+                        <a:lnSpc>
+                          <a:spcPts val="1500"/>
+                        </a:lnSpc>
+                        <a:buNone/>
+                      </a:pPr>
+                      <a:r>
+                        <a:rPr lang="en-US" b="0" dirty="0">
+                          <a:effectLst/>
+                          <a:latin typeface="Inter"/>
+                        </a:rPr>
+                        <a:t>3</a:t>
+                      </a:r>
+                    </a:p>
+                  </a:txBody>
+                  <a:tcPr anchor="ctr"/>
+                </a:tc>
+                <a:extLst>
+                  <a:ext uri="{0D108BD9-81ED-4DB2-BD59-A6C34878D82A}">
+                    <a16:rowId xmlns:a16="http://schemas.microsoft.com/office/drawing/2014/main" val="2564831045"/>
+                  </a:ext>
+                </a:extLst>
+              </a:tr>
+              <a:tr h="0">
+                <a:tc>
+                  <a:txBody>
+                    <a:bodyPr/>
+                    <a:lstStyle/>
+                    <a:p>
+                      <a:pPr>
+                        <a:lnSpc>
+                          <a:spcPts val="1500"/>
+                        </a:lnSpc>
+                        <a:buNone/>
+                      </a:pPr>
+                      <a:r>
+                        <a:rPr lang="en-US" b="0" dirty="0">
+                          <a:effectLst/>
+                          <a:latin typeface="Inter"/>
+                        </a:rPr>
+                        <a:t>4</a:t>
+                      </a:r>
+                    </a:p>
+                  </a:txBody>
+                  <a:tcPr anchor="ctr"/>
+                </a:tc>
+                <a:extLst>
+                  <a:ext uri="{0D108BD9-81ED-4DB2-BD59-A6C34878D82A}">
+                    <a16:rowId xmlns:a16="http://schemas.microsoft.com/office/drawing/2014/main" val="514296459"/>
+                  </a:ext>
+                </a:extLst>
+              </a:tr>
+              <a:tr h="0">
+                <a:tc>
+                  <a:txBody>
+                    <a:bodyPr/>
+                    <a:lstStyle/>
+                    <a:p>
+                      <a:pPr>
+                        <a:lnSpc>
+                          <a:spcPts val="1500"/>
+                        </a:lnSpc>
+                        <a:buNone/>
+                      </a:pPr>
+                      <a:r>
+                        <a:rPr lang="en-US" b="0" dirty="0">
+                          <a:effectLst/>
+                          <a:latin typeface="Inter"/>
+                        </a:rPr>
+                        <a:t>5</a:t>
+                      </a:r>
+                    </a:p>
+                  </a:txBody>
+                  <a:tcPr anchor="ctr"/>
+                </a:tc>
+                <a:extLst>
+                  <a:ext uri="{0D108BD9-81ED-4DB2-BD59-A6C34878D82A}">
+                    <a16:rowId xmlns:a16="http://schemas.microsoft.com/office/drawing/2014/main" val="1300777517"/>
+                  </a:ext>
+                </a:extLst>
+              </a:tr>
+              <a:tr h="0">
+                <a:tc>
+                  <a:txBody>
+                    <a:bodyPr/>
+                    <a:lstStyle/>
+                    <a:p>
+                      <a:pPr>
+                        <a:lnSpc>
+                          <a:spcPts val="1500"/>
+                        </a:lnSpc>
+                        <a:buNone/>
+                      </a:pPr>
+                      <a:r>
+                        <a:rPr lang="en-US" b="0" dirty="0">
+                          <a:effectLst/>
+                          <a:latin typeface="Inter"/>
+                        </a:rPr>
+                        <a:t>6</a:t>
+                      </a:r>
+                    </a:p>
+                  </a:txBody>
+                  <a:tcPr anchor="ctr"/>
+                </a:tc>
+                <a:extLst>
+                  <a:ext uri="{0D108BD9-81ED-4DB2-BD59-A6C34878D82A}">
+                    <a16:rowId xmlns:a16="http://schemas.microsoft.com/office/drawing/2014/main" val="4046470264"/>
+                  </a:ext>
+                </a:extLst>
+              </a:tr>
+            </a:tbl>
+          </a:graphicData>
+        </a:graphic>
+      </p:graphicFrame>
+      <p:sp>
+        <p:nvSpPr>
+          <p:cNvPr id="18" name="TextBox 17">
+            <a:extLst>
+              <a:ext uri="{FF2B5EF4-FFF2-40B4-BE49-F238E27FC236}">
+                <a16:creationId xmlns:a16="http://schemas.microsoft.com/office/drawing/2014/main" id="{25E0E83B-6C0B-AE01-C9CC-3EF50CEF84A9}"/>
+              </a:ext>
+            </a:extLst>
+          </p:cNvPr>
+          <p:cNvSpPr txBox="1"/>
+          <p:nvPr/>
+        </p:nvSpPr>
+        <p:spPr>
+          <a:xfrm>
+            <a:off x="7654665" y="989546"/>
+            <a:ext cx="4544321" cy="2862322"/>
+          </a:xfrm>
+          <a:prstGeom prst="rect">
+            <a:avLst/>
+          </a:prstGeom>
+          <a:noFill/>
+        </p:spPr>
+        <p:txBody>
+          <a:bodyPr wrap="none" rtlCol="0">
+            <a:spAutoFit/>
+          </a:bodyPr>
+          <a:lstStyle/>
+          <a:p>
+            <a:r>
+              <a:rPr lang="en-US" sz="2000" dirty="0"/>
+              <a:t>SA[3] = ?</a:t>
+            </a:r>
+          </a:p>
+          <a:p>
+            <a:endParaRPr lang="en-US" sz="2000" dirty="0"/>
+          </a:p>
+          <a:p>
+            <a:r>
+              <a:rPr lang="en-US" sz="2000" dirty="0"/>
+              <a:t>L[3]  = B</a:t>
+            </a:r>
+          </a:p>
+          <a:p>
+            <a:r>
+              <a:rPr lang="en-US" sz="2000" dirty="0"/>
+              <a:t>C[‘B’] = 4,  Occ[‘B’, 3] = 1</a:t>
+            </a:r>
+          </a:p>
+          <a:p>
+            <a:r>
+              <a:rPr lang="en-US" sz="2000" dirty="0"/>
+              <a:t>Korak: 4+1-1 = 4</a:t>
+            </a:r>
+          </a:p>
+          <a:p>
+            <a:endParaRPr lang="en-US" sz="2000" dirty="0"/>
+          </a:p>
+          <a:p>
+            <a:r>
+              <a:rPr lang="en-US" sz="2000" dirty="0"/>
+              <a:t>SA[4] = 0</a:t>
+            </a:r>
+          </a:p>
+          <a:p>
+            <a:r>
+              <a:rPr lang="en-US" sz="2000" dirty="0" err="1"/>
+              <a:t>Broj</a:t>
+            </a:r>
+            <a:r>
+              <a:rPr lang="en-US" sz="2000" dirty="0"/>
+              <a:t> </a:t>
+            </a:r>
+            <a:r>
+              <a:rPr lang="en-US" sz="2000" dirty="0" err="1"/>
+              <a:t>koraka</a:t>
+            </a:r>
+            <a:r>
+              <a:rPr lang="en-US" sz="2000" dirty="0"/>
+              <a:t>: 1</a:t>
+            </a:r>
+          </a:p>
+          <a:p>
+            <a:r>
+              <a:rPr lang="sv-SE" sz="2000" dirty="0"/>
+              <a:t>SA[3] = SA[4] + broj_koraka = 0 + 1 = 1</a:t>
+            </a:r>
+          </a:p>
+        </p:txBody>
+      </p:sp>
+      <p:graphicFrame>
+        <p:nvGraphicFramePr>
+          <p:cNvPr id="20" name="Table 19">
+            <a:extLst>
+              <a:ext uri="{FF2B5EF4-FFF2-40B4-BE49-F238E27FC236}">
+                <a16:creationId xmlns:a16="http://schemas.microsoft.com/office/drawing/2014/main" id="{9107D42B-5F96-FD96-5EEC-DDCCD76F590D}"/>
+              </a:ext>
+            </a:extLst>
+          </p:cNvPr>
+          <p:cNvGraphicFramePr>
+            <a:graphicFrameLocks noGrp="1"/>
+          </p:cNvGraphicFramePr>
+          <p:nvPr>
+            <p:extLst>
+              <p:ext uri="{D42A27DB-BD31-4B8C-83A1-F6EECF244321}">
+                <p14:modId xmlns:p14="http://schemas.microsoft.com/office/powerpoint/2010/main" val="2314628605"/>
+              </p:ext>
+            </p:extLst>
+          </p:nvPr>
+        </p:nvGraphicFramePr>
+        <p:xfrm>
+          <a:off x="6303962" y="4760960"/>
+          <a:ext cx="2488176" cy="1661795"/>
+        </p:xfrm>
+        <a:graphic>
+          <a:graphicData uri="http://schemas.openxmlformats.org/drawingml/2006/table">
+            <a:tbl>
+              <a:tblPr>
+                <a:tableStyleId>{BC89EF96-8CEA-46FF-86C4-4CE0E7609802}</a:tableStyleId>
+              </a:tblPr>
+              <a:tblGrid>
+                <a:gridCol w="1244088">
+                  <a:extLst>
+                    <a:ext uri="{9D8B030D-6E8A-4147-A177-3AD203B41FA5}">
+                      <a16:colId xmlns:a16="http://schemas.microsoft.com/office/drawing/2014/main" val="1336144197"/>
+                    </a:ext>
+                  </a:extLst>
+                </a:gridCol>
+                <a:gridCol w="1244088">
+                  <a:extLst>
+                    <a:ext uri="{9D8B030D-6E8A-4147-A177-3AD203B41FA5}">
+                      <a16:colId xmlns:a16="http://schemas.microsoft.com/office/drawing/2014/main" val="3068645966"/>
+                    </a:ext>
+                  </a:extLst>
+                </a:gridCol>
+              </a:tblGrid>
+              <a:tr h="0">
+                <a:tc>
+                  <a:txBody>
+                    <a:bodyPr/>
+                    <a:lstStyle/>
+                    <a:p>
+                      <a:pPr>
+                        <a:lnSpc>
+                          <a:spcPts val="1500"/>
+                        </a:lnSpc>
+                        <a:buNone/>
+                      </a:pPr>
+                      <a:r>
+                        <a:rPr lang="en-US" b="1">
+                          <a:effectLst/>
+                        </a:rPr>
+                        <a:t>Karakter</a:t>
+                      </a:r>
+                      <a:endParaRPr lang="en-US" b="1">
+                        <a:effectLst/>
+                        <a:latin typeface="Inter"/>
+                      </a:endParaRPr>
+                    </a:p>
+                  </a:txBody>
+                  <a:tcPr anchor="ctr"/>
+                </a:tc>
+                <a:tc>
+                  <a:txBody>
+                    <a:bodyPr/>
+                    <a:lstStyle/>
+                    <a:p>
+                      <a:pPr>
+                        <a:lnSpc>
+                          <a:spcPts val="1500"/>
+                        </a:lnSpc>
+                        <a:buNone/>
+                      </a:pPr>
+                      <a:r>
+                        <a:rPr lang="en-US" b="1">
+                          <a:effectLst/>
+                        </a:rPr>
+                        <a:t>Indeks u F koloni</a:t>
+                      </a:r>
+                      <a:endParaRPr lang="en-US" b="1">
+                        <a:effectLst/>
+                        <a:latin typeface="Inter"/>
+                      </a:endParaRPr>
+                    </a:p>
+                  </a:txBody>
+                  <a:tcPr anchor="ctr"/>
+                </a:tc>
+                <a:extLst>
+                  <a:ext uri="{0D108BD9-81ED-4DB2-BD59-A6C34878D82A}">
+                    <a16:rowId xmlns:a16="http://schemas.microsoft.com/office/drawing/2014/main" val="1267396140"/>
+                  </a:ext>
+                </a:extLst>
+              </a:tr>
+              <a:tr h="0">
+                <a:tc>
+                  <a:txBody>
+                    <a:bodyPr/>
+                    <a:lstStyle/>
+                    <a:p>
+                      <a:pPr>
+                        <a:lnSpc>
+                          <a:spcPts val="1500"/>
+                        </a:lnSpc>
+                        <a:buNone/>
+                      </a:pPr>
+                      <a:r>
+                        <a:rPr lang="en-US" b="0" dirty="0">
+                          <a:effectLst/>
+                        </a:rPr>
+                        <a:t>$</a:t>
+                      </a:r>
+                      <a:endParaRPr lang="en-US" b="0" dirty="0">
+                        <a:effectLst/>
+                        <a:latin typeface="Inter"/>
+                      </a:endParaRPr>
+                    </a:p>
+                  </a:txBody>
+                  <a:tcPr anchor="ctr"/>
+                </a:tc>
+                <a:tc>
+                  <a:txBody>
+                    <a:bodyPr/>
+                    <a:lstStyle/>
+                    <a:p>
+                      <a:pPr>
+                        <a:lnSpc>
+                          <a:spcPts val="1500"/>
+                        </a:lnSpc>
+                        <a:buNone/>
+                      </a:pPr>
+                      <a:r>
+                        <a:rPr lang="en-US" b="0">
+                          <a:effectLst/>
+                        </a:rPr>
+                        <a:t>0</a:t>
+                      </a:r>
+                      <a:endParaRPr lang="en-US" b="0">
+                        <a:effectLst/>
+                        <a:latin typeface="Inter"/>
+                      </a:endParaRPr>
+                    </a:p>
+                  </a:txBody>
+                  <a:tcPr anchor="ctr"/>
+                </a:tc>
+                <a:extLst>
+                  <a:ext uri="{0D108BD9-81ED-4DB2-BD59-A6C34878D82A}">
+                    <a16:rowId xmlns:a16="http://schemas.microsoft.com/office/drawing/2014/main" val="1257054142"/>
+                  </a:ext>
+                </a:extLst>
+              </a:tr>
+              <a:tr h="0">
+                <a:tc>
+                  <a:txBody>
+                    <a:bodyPr/>
+                    <a:lstStyle/>
+                    <a:p>
+                      <a:pPr>
+                        <a:lnSpc>
+                          <a:spcPts val="1500"/>
+                        </a:lnSpc>
+                        <a:buNone/>
+                      </a:pPr>
+                      <a:r>
+                        <a:rPr lang="en-US" b="0">
+                          <a:effectLst/>
+                        </a:rPr>
+                        <a:t>A</a:t>
+                      </a:r>
+                      <a:endParaRPr lang="en-US" b="0">
+                        <a:effectLst/>
+                        <a:latin typeface="Inter"/>
+                      </a:endParaRPr>
+                    </a:p>
+                  </a:txBody>
+                  <a:tcPr anchor="ctr"/>
+                </a:tc>
+                <a:tc>
+                  <a:txBody>
+                    <a:bodyPr/>
+                    <a:lstStyle/>
+                    <a:p>
+                      <a:pPr>
+                        <a:lnSpc>
+                          <a:spcPts val="1500"/>
+                        </a:lnSpc>
+                        <a:buNone/>
+                      </a:pPr>
+                      <a:r>
+                        <a:rPr lang="en-US" b="0">
+                          <a:effectLst/>
+                        </a:rPr>
+                        <a:t>1</a:t>
+                      </a:r>
+                      <a:endParaRPr lang="en-US" b="0">
+                        <a:effectLst/>
+                        <a:latin typeface="Inter"/>
+                      </a:endParaRPr>
+                    </a:p>
+                  </a:txBody>
+                  <a:tcPr anchor="ctr"/>
+                </a:tc>
+                <a:extLst>
+                  <a:ext uri="{0D108BD9-81ED-4DB2-BD59-A6C34878D82A}">
+                    <a16:rowId xmlns:a16="http://schemas.microsoft.com/office/drawing/2014/main" val="3207787163"/>
+                  </a:ext>
+                </a:extLst>
+              </a:tr>
+              <a:tr h="0">
+                <a:tc>
+                  <a:txBody>
+                    <a:bodyPr/>
+                    <a:lstStyle/>
+                    <a:p>
+                      <a:pPr>
+                        <a:lnSpc>
+                          <a:spcPts val="1500"/>
+                        </a:lnSpc>
+                        <a:buNone/>
+                      </a:pPr>
+                      <a:r>
+                        <a:rPr lang="en-US" b="0" dirty="0">
+                          <a:effectLst/>
+                        </a:rPr>
+                        <a:t>B</a:t>
+                      </a:r>
+                      <a:endParaRPr lang="en-US" b="0" dirty="0">
+                        <a:effectLst/>
+                        <a:latin typeface="Inter"/>
+                      </a:endParaRPr>
+                    </a:p>
+                  </a:txBody>
+                  <a:tcPr anchor="ctr"/>
+                </a:tc>
+                <a:tc>
+                  <a:txBody>
+                    <a:bodyPr/>
+                    <a:lstStyle/>
+                    <a:p>
+                      <a:pPr>
+                        <a:lnSpc>
+                          <a:spcPts val="1500"/>
+                        </a:lnSpc>
+                        <a:buNone/>
+                      </a:pPr>
+                      <a:r>
+                        <a:rPr lang="en-US" b="0">
+                          <a:effectLst/>
+                        </a:rPr>
+                        <a:t>4</a:t>
+                      </a:r>
+                      <a:endParaRPr lang="en-US" b="0">
+                        <a:effectLst/>
+                        <a:latin typeface="Inter"/>
+                      </a:endParaRPr>
+                    </a:p>
+                  </a:txBody>
+                  <a:tcPr anchor="ctr"/>
+                </a:tc>
+                <a:extLst>
+                  <a:ext uri="{0D108BD9-81ED-4DB2-BD59-A6C34878D82A}">
+                    <a16:rowId xmlns:a16="http://schemas.microsoft.com/office/drawing/2014/main" val="2552129843"/>
+                  </a:ext>
+                </a:extLst>
+              </a:tr>
+              <a:tr h="0">
+                <a:tc>
+                  <a:txBody>
+                    <a:bodyPr/>
+                    <a:lstStyle/>
+                    <a:p>
+                      <a:pPr>
+                        <a:lnSpc>
+                          <a:spcPts val="1500"/>
+                        </a:lnSpc>
+                        <a:buNone/>
+                      </a:pPr>
+                      <a:r>
+                        <a:rPr lang="en-US" b="0">
+                          <a:effectLst/>
+                        </a:rPr>
+                        <a:t>N</a:t>
+                      </a:r>
+                      <a:endParaRPr lang="en-US" b="0">
+                        <a:effectLst/>
+                        <a:latin typeface="Inter"/>
+                      </a:endParaRPr>
+                    </a:p>
+                  </a:txBody>
+                  <a:tcPr anchor="ctr"/>
+                </a:tc>
+                <a:tc>
+                  <a:txBody>
+                    <a:bodyPr/>
+                    <a:lstStyle/>
+                    <a:p>
+                      <a:pPr>
+                        <a:lnSpc>
+                          <a:spcPts val="1500"/>
+                        </a:lnSpc>
+                        <a:buNone/>
+                      </a:pPr>
+                      <a:r>
+                        <a:rPr lang="en-US" b="0" dirty="0">
+                          <a:effectLst/>
+                        </a:rPr>
+                        <a:t>5</a:t>
+                      </a:r>
+                      <a:endParaRPr lang="en-US" b="0" dirty="0">
+                        <a:effectLst/>
+                        <a:latin typeface="Inter"/>
+                      </a:endParaRPr>
+                    </a:p>
+                  </a:txBody>
+                  <a:tcPr anchor="ctr"/>
+                </a:tc>
+                <a:extLst>
+                  <a:ext uri="{0D108BD9-81ED-4DB2-BD59-A6C34878D82A}">
+                    <a16:rowId xmlns:a16="http://schemas.microsoft.com/office/drawing/2014/main" val="3516001094"/>
+                  </a:ext>
+                </a:extLst>
+              </a:tr>
+            </a:tbl>
+          </a:graphicData>
+        </a:graphic>
+      </p:graphicFrame>
+      <p:graphicFrame>
+        <p:nvGraphicFramePr>
+          <p:cNvPr id="21" name="Table 20">
+            <a:extLst>
+              <a:ext uri="{FF2B5EF4-FFF2-40B4-BE49-F238E27FC236}">
+                <a16:creationId xmlns:a16="http://schemas.microsoft.com/office/drawing/2014/main" id="{284F0D00-2B34-D278-5773-40079B21E3D7}"/>
+              </a:ext>
+            </a:extLst>
+          </p:cNvPr>
+          <p:cNvGraphicFramePr>
+            <a:graphicFrameLocks noGrp="1"/>
+          </p:cNvGraphicFramePr>
+          <p:nvPr>
+            <p:extLst>
+              <p:ext uri="{D42A27DB-BD31-4B8C-83A1-F6EECF244321}">
+                <p14:modId xmlns:p14="http://schemas.microsoft.com/office/powerpoint/2010/main" val="1167174408"/>
+              </p:ext>
+            </p:extLst>
+          </p:nvPr>
+        </p:nvGraphicFramePr>
+        <p:xfrm>
+          <a:off x="10873451" y="3903479"/>
+          <a:ext cx="872613" cy="2544953"/>
+        </p:xfrm>
+        <a:graphic>
+          <a:graphicData uri="http://schemas.openxmlformats.org/drawingml/2006/table">
+            <a:tbl>
+              <a:tblPr>
+                <a:tableStyleId>{BC89EF96-8CEA-46FF-86C4-4CE0E7609802}</a:tableStyleId>
+              </a:tblPr>
+              <a:tblGrid>
+                <a:gridCol w="872613">
+                  <a:extLst>
+                    <a:ext uri="{9D8B030D-6E8A-4147-A177-3AD203B41FA5}">
+                      <a16:colId xmlns:a16="http://schemas.microsoft.com/office/drawing/2014/main" val="3286371940"/>
+                    </a:ext>
+                  </a:extLst>
+                </a:gridCol>
+              </a:tblGrid>
+              <a:tr h="0">
+                <a:tc>
+                  <a:txBody>
+                    <a:bodyPr/>
+                    <a:lstStyle/>
+                    <a:p>
+                      <a:pPr>
+                        <a:lnSpc>
+                          <a:spcPts val="1500"/>
+                        </a:lnSpc>
+                        <a:buNone/>
+                      </a:pPr>
+                      <a:r>
+                        <a:rPr lang="en-US" b="1" dirty="0">
+                          <a:effectLst/>
+                        </a:rPr>
+                        <a:t>SA </a:t>
+                      </a:r>
+                    </a:p>
+                    <a:p>
+                      <a:pPr>
+                        <a:lnSpc>
+                          <a:spcPts val="1500"/>
+                        </a:lnSpc>
+                        <a:buNone/>
+                      </a:pPr>
+                      <a:endParaRPr lang="en-US" b="1" dirty="0">
+                        <a:effectLst/>
+                        <a:latin typeface="Inter"/>
+                      </a:endParaRPr>
+                    </a:p>
+                  </a:txBody>
+                  <a:tcPr anchor="ctr"/>
+                </a:tc>
+                <a:extLst>
+                  <a:ext uri="{0D108BD9-81ED-4DB2-BD59-A6C34878D82A}">
+                    <a16:rowId xmlns:a16="http://schemas.microsoft.com/office/drawing/2014/main" val="3895116374"/>
+                  </a:ext>
+                </a:extLst>
+              </a:tr>
+              <a:tr h="0">
+                <a:tc>
+                  <a:txBody>
+                    <a:bodyPr/>
+                    <a:lstStyle/>
+                    <a:p>
+                      <a:pPr>
+                        <a:lnSpc>
+                          <a:spcPts val="1500"/>
+                        </a:lnSpc>
+                        <a:buNone/>
+                      </a:pPr>
+                      <a:r>
+                        <a:rPr lang="en-US" b="0" dirty="0">
+                          <a:effectLst/>
+                        </a:rPr>
+                        <a:t>6</a:t>
+                      </a:r>
+                      <a:endParaRPr lang="en-US" b="0" dirty="0">
+                        <a:effectLst/>
+                        <a:latin typeface="Inter"/>
+                      </a:endParaRPr>
+                    </a:p>
+                  </a:txBody>
+                  <a:tcPr anchor="ctr"/>
+                </a:tc>
+                <a:extLst>
+                  <a:ext uri="{0D108BD9-81ED-4DB2-BD59-A6C34878D82A}">
+                    <a16:rowId xmlns:a16="http://schemas.microsoft.com/office/drawing/2014/main" val="3796575038"/>
+                  </a:ext>
+                </a:extLst>
+              </a:tr>
+              <a:tr h="0">
+                <a:tc>
+                  <a:txBody>
+                    <a:bodyPr/>
+                    <a:lstStyle/>
+                    <a:p>
+                      <a:pPr>
+                        <a:lnSpc>
+                          <a:spcPts val="1500"/>
+                        </a:lnSpc>
+                        <a:buNone/>
+                      </a:pPr>
+                      <a:r>
+                        <a:rPr lang="en-US" b="0" dirty="0">
+                          <a:effectLst/>
+                        </a:rPr>
+                        <a:t>5</a:t>
+                      </a:r>
+                      <a:endParaRPr lang="en-US" b="0" dirty="0">
+                        <a:effectLst/>
+                        <a:latin typeface="Inter"/>
+                      </a:endParaRPr>
+                    </a:p>
+                  </a:txBody>
+                  <a:tcPr anchor="ctr"/>
+                </a:tc>
+                <a:extLst>
+                  <a:ext uri="{0D108BD9-81ED-4DB2-BD59-A6C34878D82A}">
+                    <a16:rowId xmlns:a16="http://schemas.microsoft.com/office/drawing/2014/main" val="3205809457"/>
+                  </a:ext>
+                </a:extLst>
+              </a:tr>
+              <a:tr h="0">
+                <a:tc>
+                  <a:txBody>
+                    <a:bodyPr/>
+                    <a:lstStyle/>
+                    <a:p>
+                      <a:pPr>
+                        <a:lnSpc>
+                          <a:spcPts val="1500"/>
+                        </a:lnSpc>
+                        <a:buNone/>
+                      </a:pPr>
+                      <a:r>
+                        <a:rPr lang="en-US" b="0">
+                          <a:effectLst/>
+                        </a:rPr>
+                        <a:t>3</a:t>
+                      </a:r>
+                      <a:endParaRPr lang="en-US" b="0">
+                        <a:effectLst/>
+                        <a:latin typeface="Inter"/>
+                      </a:endParaRPr>
+                    </a:p>
+                  </a:txBody>
+                  <a:tcPr anchor="ctr"/>
+                </a:tc>
+                <a:extLst>
+                  <a:ext uri="{0D108BD9-81ED-4DB2-BD59-A6C34878D82A}">
+                    <a16:rowId xmlns:a16="http://schemas.microsoft.com/office/drawing/2014/main" val="340785162"/>
+                  </a:ext>
+                </a:extLst>
+              </a:tr>
+              <a:tr h="0">
+                <a:tc>
+                  <a:txBody>
+                    <a:bodyPr/>
+                    <a:lstStyle/>
+                    <a:p>
+                      <a:pPr>
+                        <a:lnSpc>
+                          <a:spcPts val="1500"/>
+                        </a:lnSpc>
+                        <a:buNone/>
+                      </a:pPr>
+                      <a:r>
+                        <a:rPr lang="en-US" b="0">
+                          <a:effectLst/>
+                        </a:rPr>
+                        <a:t>1</a:t>
+                      </a:r>
+                      <a:endParaRPr lang="en-US" b="0">
+                        <a:effectLst/>
+                        <a:latin typeface="Inter"/>
+                      </a:endParaRPr>
+                    </a:p>
+                  </a:txBody>
+                  <a:tcPr anchor="ctr"/>
+                </a:tc>
+                <a:extLst>
+                  <a:ext uri="{0D108BD9-81ED-4DB2-BD59-A6C34878D82A}">
+                    <a16:rowId xmlns:a16="http://schemas.microsoft.com/office/drawing/2014/main" val="2801156376"/>
+                  </a:ext>
+                </a:extLst>
+              </a:tr>
+              <a:tr h="0">
+                <a:tc>
+                  <a:txBody>
+                    <a:bodyPr/>
+                    <a:lstStyle/>
+                    <a:p>
+                      <a:pPr>
+                        <a:lnSpc>
+                          <a:spcPts val="1500"/>
+                        </a:lnSpc>
+                        <a:buNone/>
+                      </a:pPr>
+                      <a:r>
+                        <a:rPr lang="en-US" b="0">
+                          <a:effectLst/>
+                        </a:rPr>
+                        <a:t>0</a:t>
+                      </a:r>
+                      <a:endParaRPr lang="en-US" b="0">
+                        <a:effectLst/>
+                        <a:latin typeface="Inter"/>
+                      </a:endParaRPr>
+                    </a:p>
+                  </a:txBody>
+                  <a:tcPr anchor="ctr"/>
+                </a:tc>
+                <a:extLst>
+                  <a:ext uri="{0D108BD9-81ED-4DB2-BD59-A6C34878D82A}">
+                    <a16:rowId xmlns:a16="http://schemas.microsoft.com/office/drawing/2014/main" val="4018781269"/>
+                  </a:ext>
+                </a:extLst>
+              </a:tr>
+              <a:tr h="0">
+                <a:tc>
+                  <a:txBody>
+                    <a:bodyPr/>
+                    <a:lstStyle/>
+                    <a:p>
+                      <a:pPr>
+                        <a:lnSpc>
+                          <a:spcPts val="1500"/>
+                        </a:lnSpc>
+                        <a:buNone/>
+                      </a:pPr>
+                      <a:r>
+                        <a:rPr lang="en-US" b="0">
+                          <a:effectLst/>
+                        </a:rPr>
+                        <a:t>4</a:t>
+                      </a:r>
+                      <a:endParaRPr lang="en-US" b="0">
+                        <a:effectLst/>
+                        <a:latin typeface="Inter"/>
+                      </a:endParaRPr>
+                    </a:p>
+                  </a:txBody>
+                  <a:tcPr anchor="ctr"/>
+                </a:tc>
+                <a:extLst>
+                  <a:ext uri="{0D108BD9-81ED-4DB2-BD59-A6C34878D82A}">
+                    <a16:rowId xmlns:a16="http://schemas.microsoft.com/office/drawing/2014/main" val="2698093245"/>
+                  </a:ext>
+                </a:extLst>
+              </a:tr>
+              <a:tr h="0">
+                <a:tc>
+                  <a:txBody>
+                    <a:bodyPr/>
+                    <a:lstStyle/>
+                    <a:p>
+                      <a:pPr>
+                        <a:lnSpc>
+                          <a:spcPts val="1500"/>
+                        </a:lnSpc>
+                        <a:buNone/>
+                      </a:pPr>
+                      <a:r>
+                        <a:rPr lang="en-US" b="0" dirty="0">
+                          <a:effectLst/>
+                        </a:rPr>
+                        <a:t>2</a:t>
+                      </a:r>
+                      <a:endParaRPr lang="en-US" b="0" dirty="0">
+                        <a:effectLst/>
+                        <a:latin typeface="Inter"/>
+                      </a:endParaRPr>
+                    </a:p>
+                  </a:txBody>
+                  <a:tcPr anchor="ctr"/>
+                </a:tc>
+                <a:extLst>
+                  <a:ext uri="{0D108BD9-81ED-4DB2-BD59-A6C34878D82A}">
+                    <a16:rowId xmlns:a16="http://schemas.microsoft.com/office/drawing/2014/main" val="514019644"/>
+                  </a:ext>
+                </a:extLst>
+              </a:tr>
+            </a:tbl>
+          </a:graphicData>
+        </a:graphic>
+      </p:graphicFrame>
+      <p:graphicFrame>
+        <p:nvGraphicFramePr>
+          <p:cNvPr id="22" name="Table 21">
+            <a:extLst>
+              <a:ext uri="{FF2B5EF4-FFF2-40B4-BE49-F238E27FC236}">
+                <a16:creationId xmlns:a16="http://schemas.microsoft.com/office/drawing/2014/main" id="{5747571B-59BC-5A77-CEBF-52D7785B5D6E}"/>
+              </a:ext>
+            </a:extLst>
+          </p:cNvPr>
+          <p:cNvGraphicFramePr>
+            <a:graphicFrameLocks noGrp="1"/>
+          </p:cNvGraphicFramePr>
+          <p:nvPr>
+            <p:extLst>
+              <p:ext uri="{D42A27DB-BD31-4B8C-83A1-F6EECF244321}">
+                <p14:modId xmlns:p14="http://schemas.microsoft.com/office/powerpoint/2010/main" val="3529654880"/>
+              </p:ext>
+            </p:extLst>
+          </p:nvPr>
+        </p:nvGraphicFramePr>
+        <p:xfrm>
+          <a:off x="10303221" y="3899479"/>
+          <a:ext cx="570230" cy="2547620"/>
+        </p:xfrm>
+        <a:graphic>
+          <a:graphicData uri="http://schemas.openxmlformats.org/drawingml/2006/table">
+            <a:tbl>
+              <a:tblPr>
+                <a:tableStyleId>{BC89EF96-8CEA-46FF-86C4-4CE0E7609802}</a:tableStyleId>
+              </a:tblPr>
+              <a:tblGrid>
+                <a:gridCol w="570230">
+                  <a:extLst>
+                    <a:ext uri="{9D8B030D-6E8A-4147-A177-3AD203B41FA5}">
+                      <a16:colId xmlns:a16="http://schemas.microsoft.com/office/drawing/2014/main" val="350860864"/>
+                    </a:ext>
+                  </a:extLst>
+                </a:gridCol>
+              </a:tblGrid>
+              <a:tr h="0">
+                <a:tc>
+                  <a:txBody>
+                    <a:bodyPr/>
+                    <a:lstStyle/>
+                    <a:p>
+                      <a:pPr>
+                        <a:lnSpc>
+                          <a:spcPts val="1500"/>
+                        </a:lnSpc>
+                        <a:buNone/>
+                      </a:pPr>
+                      <a:r>
+                        <a:rPr lang="en-US" b="1" dirty="0" err="1">
+                          <a:effectLst/>
+                        </a:rPr>
+                        <a:t>i</a:t>
+                      </a:r>
+                      <a:endParaRPr lang="en-US" b="1" dirty="0">
+                        <a:effectLst/>
+                      </a:endParaRPr>
+                    </a:p>
+                    <a:p>
+                      <a:pPr>
+                        <a:lnSpc>
+                          <a:spcPts val="1500"/>
+                        </a:lnSpc>
+                        <a:buNone/>
+                      </a:pPr>
+                      <a:endParaRPr lang="en-US" b="1" dirty="0">
+                        <a:effectLst/>
+                        <a:latin typeface="Inter"/>
+                      </a:endParaRPr>
+                    </a:p>
+                  </a:txBody>
+                  <a:tcPr anchor="ctr"/>
+                </a:tc>
+                <a:extLst>
+                  <a:ext uri="{0D108BD9-81ED-4DB2-BD59-A6C34878D82A}">
+                    <a16:rowId xmlns:a16="http://schemas.microsoft.com/office/drawing/2014/main" val="1714269444"/>
+                  </a:ext>
+                </a:extLst>
+              </a:tr>
+              <a:tr h="0">
+                <a:tc>
+                  <a:txBody>
+                    <a:bodyPr/>
+                    <a:lstStyle/>
+                    <a:p>
+                      <a:pPr>
+                        <a:lnSpc>
+                          <a:spcPts val="1500"/>
+                        </a:lnSpc>
+                        <a:buNone/>
+                      </a:pPr>
+                      <a:r>
+                        <a:rPr lang="en-US" b="0" dirty="0">
+                          <a:effectLst/>
+                          <a:latin typeface="Inter"/>
+                        </a:rPr>
+                        <a:t>0</a:t>
+                      </a:r>
+                    </a:p>
+                  </a:txBody>
+                  <a:tcPr anchor="ctr"/>
+                </a:tc>
+                <a:extLst>
+                  <a:ext uri="{0D108BD9-81ED-4DB2-BD59-A6C34878D82A}">
+                    <a16:rowId xmlns:a16="http://schemas.microsoft.com/office/drawing/2014/main" val="2463328470"/>
+                  </a:ext>
+                </a:extLst>
+              </a:tr>
+              <a:tr h="0">
+                <a:tc>
+                  <a:txBody>
+                    <a:bodyPr/>
+                    <a:lstStyle/>
+                    <a:p>
+                      <a:pPr>
+                        <a:lnSpc>
+                          <a:spcPts val="1500"/>
+                        </a:lnSpc>
+                        <a:buNone/>
+                      </a:pPr>
+                      <a:r>
+                        <a:rPr lang="en-US" b="0" dirty="0">
+                          <a:effectLst/>
+                          <a:latin typeface="Inter"/>
+                        </a:rPr>
+                        <a:t>1</a:t>
+                      </a:r>
+                    </a:p>
+                  </a:txBody>
+                  <a:tcPr anchor="ctr"/>
+                </a:tc>
+                <a:extLst>
+                  <a:ext uri="{0D108BD9-81ED-4DB2-BD59-A6C34878D82A}">
+                    <a16:rowId xmlns:a16="http://schemas.microsoft.com/office/drawing/2014/main" val="1232575507"/>
+                  </a:ext>
+                </a:extLst>
+              </a:tr>
+              <a:tr h="0">
+                <a:tc>
+                  <a:txBody>
+                    <a:bodyPr/>
+                    <a:lstStyle/>
+                    <a:p>
+                      <a:pPr>
+                        <a:lnSpc>
+                          <a:spcPts val="1500"/>
+                        </a:lnSpc>
+                        <a:buNone/>
+                      </a:pPr>
+                      <a:r>
+                        <a:rPr lang="en-US" b="0" dirty="0">
+                          <a:effectLst/>
+                          <a:latin typeface="Inter"/>
+                        </a:rPr>
+                        <a:t>2</a:t>
+                      </a:r>
+                    </a:p>
+                  </a:txBody>
+                  <a:tcPr anchor="ctr"/>
+                </a:tc>
+                <a:extLst>
+                  <a:ext uri="{0D108BD9-81ED-4DB2-BD59-A6C34878D82A}">
+                    <a16:rowId xmlns:a16="http://schemas.microsoft.com/office/drawing/2014/main" val="1047201677"/>
+                  </a:ext>
+                </a:extLst>
+              </a:tr>
+              <a:tr h="0">
+                <a:tc>
+                  <a:txBody>
+                    <a:bodyPr/>
+                    <a:lstStyle/>
+                    <a:p>
+                      <a:pPr>
+                        <a:lnSpc>
+                          <a:spcPts val="1500"/>
+                        </a:lnSpc>
+                        <a:buNone/>
+                      </a:pPr>
+                      <a:r>
+                        <a:rPr lang="en-US" b="0" dirty="0">
+                          <a:effectLst/>
+                          <a:latin typeface="Inter"/>
+                        </a:rPr>
+                        <a:t>3</a:t>
+                      </a:r>
+                    </a:p>
+                  </a:txBody>
+                  <a:tcPr anchor="ctr"/>
+                </a:tc>
+                <a:extLst>
+                  <a:ext uri="{0D108BD9-81ED-4DB2-BD59-A6C34878D82A}">
+                    <a16:rowId xmlns:a16="http://schemas.microsoft.com/office/drawing/2014/main" val="701883195"/>
+                  </a:ext>
+                </a:extLst>
+              </a:tr>
+              <a:tr h="0">
+                <a:tc>
+                  <a:txBody>
+                    <a:bodyPr/>
+                    <a:lstStyle/>
+                    <a:p>
+                      <a:pPr>
+                        <a:lnSpc>
+                          <a:spcPts val="1500"/>
+                        </a:lnSpc>
+                        <a:buNone/>
+                      </a:pPr>
+                      <a:r>
+                        <a:rPr lang="en-US" b="0" dirty="0">
+                          <a:effectLst/>
+                          <a:latin typeface="Inter"/>
+                        </a:rPr>
+                        <a:t>4</a:t>
+                      </a:r>
+                    </a:p>
+                  </a:txBody>
+                  <a:tcPr anchor="ctr"/>
+                </a:tc>
+                <a:extLst>
+                  <a:ext uri="{0D108BD9-81ED-4DB2-BD59-A6C34878D82A}">
+                    <a16:rowId xmlns:a16="http://schemas.microsoft.com/office/drawing/2014/main" val="992285104"/>
+                  </a:ext>
+                </a:extLst>
+              </a:tr>
+              <a:tr h="0">
+                <a:tc>
+                  <a:txBody>
+                    <a:bodyPr/>
+                    <a:lstStyle/>
+                    <a:p>
+                      <a:pPr>
+                        <a:lnSpc>
+                          <a:spcPts val="1500"/>
+                        </a:lnSpc>
+                        <a:buNone/>
+                      </a:pPr>
+                      <a:r>
+                        <a:rPr lang="en-US" b="0" dirty="0">
+                          <a:effectLst/>
+                          <a:latin typeface="Inter"/>
+                        </a:rPr>
+                        <a:t>5</a:t>
+                      </a:r>
+                    </a:p>
+                  </a:txBody>
+                  <a:tcPr anchor="ctr"/>
+                </a:tc>
+                <a:extLst>
+                  <a:ext uri="{0D108BD9-81ED-4DB2-BD59-A6C34878D82A}">
+                    <a16:rowId xmlns:a16="http://schemas.microsoft.com/office/drawing/2014/main" val="2835239810"/>
+                  </a:ext>
+                </a:extLst>
+              </a:tr>
+              <a:tr h="0">
+                <a:tc>
+                  <a:txBody>
+                    <a:bodyPr/>
+                    <a:lstStyle/>
+                    <a:p>
+                      <a:pPr>
+                        <a:lnSpc>
+                          <a:spcPts val="1500"/>
+                        </a:lnSpc>
+                        <a:buNone/>
+                      </a:pPr>
+                      <a:r>
+                        <a:rPr lang="en-US" b="0" dirty="0">
+                          <a:effectLst/>
+                          <a:latin typeface="Inter"/>
+                        </a:rPr>
+                        <a:t>6</a:t>
+                      </a:r>
+                    </a:p>
+                  </a:txBody>
+                  <a:tcPr anchor="ctr"/>
+                </a:tc>
+                <a:extLst>
+                  <a:ext uri="{0D108BD9-81ED-4DB2-BD59-A6C34878D82A}">
+                    <a16:rowId xmlns:a16="http://schemas.microsoft.com/office/drawing/2014/main" val="1613421487"/>
+                  </a:ext>
+                </a:extLst>
+              </a:tr>
+            </a:tbl>
+          </a:graphicData>
+        </a:graphic>
+      </p:graphicFrame>
+      <p:sp>
+        <p:nvSpPr>
+          <p:cNvPr id="23" name="Rectangle 22">
+            <a:extLst>
+              <a:ext uri="{FF2B5EF4-FFF2-40B4-BE49-F238E27FC236}">
+                <a16:creationId xmlns:a16="http://schemas.microsoft.com/office/drawing/2014/main" id="{1989ACD9-6DD8-5346-6E54-5B7034000E14}"/>
+              </a:ext>
+            </a:extLst>
+          </p:cNvPr>
+          <p:cNvSpPr/>
+          <p:nvPr/>
+        </p:nvSpPr>
+        <p:spPr>
+          <a:xfrm>
+            <a:off x="10303220" y="3898147"/>
+            <a:ext cx="1442843" cy="477083"/>
+          </a:xfrm>
+          <a:prstGeom prst="rect">
+            <a:avLst/>
+          </a:prstGeom>
+          <a:solidFill>
+            <a:srgbClr val="99CCFF">
+              <a:alpha val="16863"/>
+            </a:srgbClr>
+          </a:solidFill>
+        </p:spPr>
+        <p:style>
+          <a:lnRef idx="1">
+            <a:schemeClr val="accent2"/>
+          </a:lnRef>
+          <a:fillRef idx="2">
+            <a:schemeClr val="accent2"/>
+          </a:fillRef>
+          <a:effectRef idx="1">
+            <a:schemeClr val="accent2"/>
+          </a:effectRef>
+          <a:fontRef idx="minor">
+            <a:schemeClr val="dk1"/>
+          </a:fontRef>
+        </p:style>
+        <p:txBody>
+          <a:bodyPr rtlCol="0" anchor="ctr"/>
+          <a:lstStyle/>
+          <a:p>
+            <a:pPr algn="ctr"/>
+            <a:endParaRPr lang="en-US"/>
+          </a:p>
+        </p:txBody>
+      </p:sp>
+      <p:sp>
+        <p:nvSpPr>
+          <p:cNvPr id="24" name="Rectangle 23">
+            <a:extLst>
+              <a:ext uri="{FF2B5EF4-FFF2-40B4-BE49-F238E27FC236}">
+                <a16:creationId xmlns:a16="http://schemas.microsoft.com/office/drawing/2014/main" id="{AE920475-7A61-C333-0AD2-329D2A4BC20C}"/>
+              </a:ext>
+            </a:extLst>
+          </p:cNvPr>
+          <p:cNvSpPr/>
+          <p:nvPr/>
+        </p:nvSpPr>
+        <p:spPr>
+          <a:xfrm>
+            <a:off x="10303218" y="4696452"/>
+            <a:ext cx="1442843" cy="581091"/>
+          </a:xfrm>
+          <a:prstGeom prst="rect">
+            <a:avLst/>
+          </a:prstGeom>
+          <a:solidFill>
+            <a:srgbClr val="99CCFF">
+              <a:alpha val="16863"/>
+            </a:srgbClr>
+          </a:solidFill>
+        </p:spPr>
+        <p:style>
+          <a:lnRef idx="1">
+            <a:schemeClr val="accent2"/>
+          </a:lnRef>
+          <a:fillRef idx="2">
+            <a:schemeClr val="accent2"/>
+          </a:fillRef>
+          <a:effectRef idx="1">
+            <a:schemeClr val="accent2"/>
+          </a:effectRef>
+          <a:fontRef idx="minor">
+            <a:schemeClr val="dk1"/>
+          </a:fontRef>
+        </p:style>
+        <p:txBody>
+          <a:bodyPr rtlCol="0" anchor="ctr"/>
+          <a:lstStyle/>
+          <a:p>
+            <a:pPr algn="ctr"/>
+            <a:endParaRPr lang="en-US"/>
+          </a:p>
+        </p:txBody>
+      </p:sp>
+      <p:sp>
+        <p:nvSpPr>
+          <p:cNvPr id="25" name="Rectangle 24">
+            <a:extLst>
+              <a:ext uri="{FF2B5EF4-FFF2-40B4-BE49-F238E27FC236}">
+                <a16:creationId xmlns:a16="http://schemas.microsoft.com/office/drawing/2014/main" id="{2473564D-76AE-781E-723F-5500460AF9F4}"/>
+              </a:ext>
+            </a:extLst>
+          </p:cNvPr>
+          <p:cNvSpPr/>
+          <p:nvPr/>
+        </p:nvSpPr>
+        <p:spPr>
+          <a:xfrm>
+            <a:off x="10303220" y="5841664"/>
+            <a:ext cx="1442843" cy="581091"/>
+          </a:xfrm>
+          <a:prstGeom prst="rect">
+            <a:avLst/>
+          </a:prstGeom>
+          <a:solidFill>
+            <a:srgbClr val="99CCFF">
+              <a:alpha val="16863"/>
+            </a:srgbClr>
+          </a:solidFill>
+        </p:spPr>
+        <p:style>
+          <a:lnRef idx="1">
+            <a:schemeClr val="accent2"/>
+          </a:lnRef>
+          <a:fillRef idx="2">
+            <a:schemeClr val="accent2"/>
+          </a:fillRef>
+          <a:effectRef idx="1">
+            <a:schemeClr val="accent2"/>
+          </a:effectRef>
+          <a:fontRef idx="minor">
+            <a:schemeClr val="dk1"/>
+          </a:fontRef>
+        </p:style>
+        <p:txBody>
+          <a:bodyPr rtlCol="0" anchor="ctr"/>
+          <a:lstStyle/>
+          <a:p>
+            <a:pPr algn="ctr"/>
+            <a:endParaRPr lang="en-US"/>
+          </a:p>
+        </p:txBody>
+      </p:sp>
+      <p:sp>
+        <p:nvSpPr>
+          <p:cNvPr id="26" name="Rectangle 25">
+            <a:extLst>
+              <a:ext uri="{FF2B5EF4-FFF2-40B4-BE49-F238E27FC236}">
+                <a16:creationId xmlns:a16="http://schemas.microsoft.com/office/drawing/2014/main" id="{5800939E-DC1F-2CC7-3089-A24D215E3F4B}"/>
+              </a:ext>
+            </a:extLst>
+          </p:cNvPr>
+          <p:cNvSpPr/>
+          <p:nvPr/>
+        </p:nvSpPr>
+        <p:spPr>
+          <a:xfrm>
+            <a:off x="10303219" y="5286861"/>
+            <a:ext cx="1442843" cy="280561"/>
+          </a:xfrm>
+          <a:prstGeom prst="rect">
+            <a:avLst/>
+          </a:prstGeom>
+          <a:solidFill>
+            <a:srgbClr val="92D050">
+              <a:alpha val="50196"/>
+            </a:srgbClr>
+          </a:solidFill>
+        </p:spPr>
+        <p:style>
+          <a:lnRef idx="1">
+            <a:schemeClr val="accent2"/>
+          </a:lnRef>
+          <a:fillRef idx="2">
+            <a:schemeClr val="accent2"/>
+          </a:fillRef>
+          <a:effectRef idx="1">
+            <a:schemeClr val="accent2"/>
+          </a:effectRef>
+          <a:fontRef idx="minor">
+            <a:schemeClr val="dk1"/>
+          </a:fontRef>
+        </p:style>
+        <p:txBody>
+          <a:bodyPr rtlCol="0" anchor="ctr"/>
+          <a:lstStyle/>
+          <a:p>
+            <a:pPr algn="ctr"/>
+            <a:endParaRPr lang="en-US" dirty="0"/>
+          </a:p>
+        </p:txBody>
+      </p:sp>
+    </p:spTree>
+    <p:extLst>
+      <p:ext uri="{BB962C8B-B14F-4D97-AF65-F5344CB8AC3E}">
+        <p14:creationId xmlns:p14="http://schemas.microsoft.com/office/powerpoint/2010/main" val="4037590552"/>
+      </p:ext>
+    </p:extLst>
+  </p:cSld>
+  <p:clrMapOvr>
+    <a:masterClrMapping/>
+  </p:clrMapOvr>
+</p:sld>
+</file>
+
+<file path=ppt/slides/slide6.xml><?xml version="1.0" encoding="utf-8"?>
+<p:sld xmlns:a="http://schemas.openxmlformats.org/drawingml/2006/main" xmlns:r="http://schemas.openxmlformats.org/officeDocument/2006/relationships" xmlns:p="http://schemas.openxmlformats.org/presentationml/2006/main">
+  <p:cSld>
+    <p:spTree>
+      <p:nvGrpSpPr>
+        <p:cNvPr id="1" name=""/>
+        <p:cNvGrpSpPr/>
+        <p:nvPr/>
+      </p:nvGrpSpPr>
+      <p:grpSpPr>
+        <a:xfrm>
+          <a:off x="0" y="0"/>
+          <a:ext cx="0" cy="0"/>
+          <a:chOff x="0" y="0"/>
+          <a:chExt cx="0" cy="0"/>
+        </a:xfrm>
+      </p:grpSpPr>
+      <p:pic>
+        <p:nvPicPr>
+          <p:cNvPr id="5" name="Content Placeholder 4" descr="A group of graphs and charts&#10;&#10;AI-generated content may be incorrect.">
+            <a:extLst>
+              <a:ext uri="{FF2B5EF4-FFF2-40B4-BE49-F238E27FC236}">
+                <a16:creationId xmlns:a16="http://schemas.microsoft.com/office/drawing/2014/main" id="{78DD5D66-2F29-818C-9A10-621697CB96C3}"/>
+              </a:ext>
+            </a:extLst>
+          </p:cNvPr>
+          <p:cNvPicPr>
+            <a:picLocks noGrp="1" noChangeAspect="1"/>
+          </p:cNvPicPr>
+          <p:nvPr>
+            <p:ph idx="1"/>
+          </p:nvPr>
+        </p:nvPicPr>
+        <p:blipFill>
+          <a:blip r:embed="rId2">
+            <a:extLst>
+              <a:ext uri="{28A0092B-C50C-407E-A947-70E740481C1C}">
+                <a14:useLocalDpi xmlns:a14="http://schemas.microsoft.com/office/drawing/2010/main" val="0"/>
+              </a:ext>
+            </a:extLst>
+          </a:blip>
+          <a:stretch>
+            <a:fillRect/>
+          </a:stretch>
+        </p:blipFill>
+        <p:spPr>
+          <a:xfrm>
+            <a:off x="3508168" y="131606"/>
+            <a:ext cx="7536899" cy="6594788"/>
+          </a:xfrm>
+        </p:spPr>
+      </p:pic>
+      <p:pic>
+        <p:nvPicPr>
+          <p:cNvPr id="16" name="Picture 4" descr="Food-Info.net&gt; The Coffee Plant">
+            <a:extLst>
+              <a:ext uri="{FF2B5EF4-FFF2-40B4-BE49-F238E27FC236}">
+                <a16:creationId xmlns:a16="http://schemas.microsoft.com/office/drawing/2014/main" id="{CFBB554F-0F0B-21D8-3165-7CC60D4CC3B3}"/>
+              </a:ext>
+            </a:extLst>
+          </p:cNvPr>
+          <p:cNvPicPr>
+            <a:picLocks noChangeAspect="1" noChangeArrowheads="1"/>
+          </p:cNvPicPr>
+          <p:nvPr/>
+        </p:nvPicPr>
+        <p:blipFill>
+          <a:blip r:embed="rId3">
+            <a:extLst>
+              <a:ext uri="{28A0092B-C50C-407E-A947-70E740481C1C}">
+                <a14:useLocalDpi xmlns:a14="http://schemas.microsoft.com/office/drawing/2010/main" val="0"/>
+              </a:ext>
+            </a:extLst>
+          </a:blip>
+          <a:srcRect/>
+          <a:stretch>
+            <a:fillRect/>
+          </a:stretch>
+        </p:blipFill>
+        <p:spPr bwMode="auto">
+          <a:xfrm>
+            <a:off x="793976" y="2429742"/>
+            <a:ext cx="2040785" cy="2322608"/>
+          </a:xfrm>
+          <a:prstGeom prst="rect">
+            <a:avLst/>
+          </a:prstGeom>
+          <a:noFill/>
+          <a:extLst>
+            <a:ext uri="{909E8E84-426E-40DD-AFC4-6F175D3DCCD1}">
+              <a14:hiddenFill xmlns:a14="http://schemas.microsoft.com/office/drawing/2010/main">
+                <a:solidFill>
+                  <a:srgbClr val="FFFFFF"/>
+                </a:solidFill>
+              </a14:hiddenFill>
+            </a:ext>
+          </a:extLst>
+        </p:spPr>
+      </p:pic>
+      <p:sp>
+        <p:nvSpPr>
+          <p:cNvPr id="17" name="Title 1">
+            <a:extLst>
+              <a:ext uri="{FF2B5EF4-FFF2-40B4-BE49-F238E27FC236}">
+                <a16:creationId xmlns:a16="http://schemas.microsoft.com/office/drawing/2014/main" id="{35E7F73C-CFC7-B561-7A86-59BDF99D5751}"/>
               </a:ext>
             </a:extLst>
           </p:cNvPr>
@@ -12067,22 +17690,1695 @@
             <a:spLocks noGrp="1"/>
           </p:cNvSpPr>
           <p:nvPr>
-            <p:ph idx="1"/>
+            <p:ph type="title"/>
           </p:nvPr>
         </p:nvSpPr>
-        <p:spPr/>
+        <p:spPr>
+          <a:xfrm>
+            <a:off x="120569" y="0"/>
+            <a:ext cx="10515600" cy="1325563"/>
+          </a:xfrm>
+        </p:spPr>
         <p:txBody>
           <a:bodyPr/>
           <a:lstStyle/>
           <a:p>
-            <a:endParaRPr lang="en-US"/>
+            <a:r>
+              <a:rPr lang="en-US" dirty="0" err="1"/>
+              <a:t>Rezultati</a:t>
+            </a:r>
+            <a:endParaRPr lang="en-US" dirty="0"/>
           </a:p>
         </p:txBody>
       </p:sp>
     </p:spTree>
     <p:extLst>
       <p:ext uri="{BB962C8B-B14F-4D97-AF65-F5344CB8AC3E}">
-        <p14:creationId xmlns:p14="http://schemas.microsoft.com/office/powerpoint/2010/main" val="2711858765"/>
+        <p14:creationId xmlns:p14="http://schemas.microsoft.com/office/powerpoint/2010/main" val="2449023716"/>
+      </p:ext>
+    </p:extLst>
+  </p:cSld>
+  <p:clrMapOvr>
+    <a:masterClrMapping/>
+  </p:clrMapOvr>
+</p:sld>
+</file>
+
+<file path=ppt/slides/slide7.xml><?xml version="1.0" encoding="utf-8"?>
+<p:sld xmlns:a="http://schemas.openxmlformats.org/drawingml/2006/main" xmlns:r="http://schemas.openxmlformats.org/officeDocument/2006/relationships" xmlns:p="http://schemas.openxmlformats.org/presentationml/2006/main">
+  <p:cSld>
+    <p:bg>
+      <p:bgPr>
+        <a:solidFill>
+          <a:schemeClr val="bg1"/>
+        </a:solidFill>
+        <a:effectLst/>
+      </p:bgPr>
+    </p:bg>
+    <p:spTree>
+      <p:nvGrpSpPr>
+        <p:cNvPr id="1" name="">
+          <a:extLst>
+            <a:ext uri="{FF2B5EF4-FFF2-40B4-BE49-F238E27FC236}">
+              <a16:creationId xmlns:a16="http://schemas.microsoft.com/office/drawing/2014/main" id="{C97C0A90-7A50-4CC1-C50D-351EEFB6EE8D}"/>
+            </a:ext>
+          </a:extLst>
+        </p:cNvPr>
+        <p:cNvGrpSpPr/>
+        <p:nvPr/>
+      </p:nvGrpSpPr>
+      <p:grpSpPr>
+        <a:xfrm>
+          <a:off x="0" y="0"/>
+          <a:ext cx="0" cy="0"/>
+          <a:chOff x="0" y="0"/>
+          <a:chExt cx="0" cy="0"/>
+        </a:xfrm>
+      </p:grpSpPr>
+      <p:sp>
+        <p:nvSpPr>
+          <p:cNvPr id="10" name="Rectangle 9">
+            <a:extLst>
+              <a:ext uri="{FF2B5EF4-FFF2-40B4-BE49-F238E27FC236}">
+                <a16:creationId xmlns:a16="http://schemas.microsoft.com/office/drawing/2014/main" id="{E2DBE28B-F44D-FF1E-8E05-8E764B8395A0}"/>
+              </a:ext>
+              <a:ext uri="{C183D7F6-B498-43B3-948B-1728B52AA6E4}">
+                <adec:decorative xmlns:adec="http://schemas.microsoft.com/office/drawing/2017/decorative" val="1"/>
+              </a:ext>
+            </a:extLst>
+          </p:cNvPr>
+          <p:cNvSpPr>
+            <a:spLocks noGrp="1" noRot="1" noChangeAspect="1" noMove="1" noResize="1" noEditPoints="1" noAdjustHandles="1" noChangeArrowheads="1" noChangeShapeType="1" noTextEdit="1"/>
+          </p:cNvSpPr>
+          <p:nvPr>
+            <p:extLst>
+              <p:ext uri="{386F3935-93C4-4BCD-93E2-E3B085C9AB24}">
+                <p16:designElem xmlns:p16="http://schemas.microsoft.com/office/powerpoint/2015/main" val="1"/>
+              </p:ext>
+            </p:extLst>
+          </p:nvPr>
+        </p:nvSpPr>
+        <p:spPr>
+          <a:xfrm>
+            <a:off x="0" y="0"/>
+            <a:ext cx="12192000" cy="6858000"/>
+          </a:xfrm>
+          <a:prstGeom prst="rect">
+            <a:avLst/>
+          </a:prstGeom>
+          <a:solidFill>
+            <a:schemeClr val="bg1"/>
+          </a:solidFill>
+          <a:ln>
+            <a:noFill/>
+          </a:ln>
+        </p:spPr>
+        <p:style>
+          <a:lnRef idx="2">
+            <a:schemeClr val="accent1">
+              <a:shade val="50000"/>
+            </a:schemeClr>
+          </a:lnRef>
+          <a:fillRef idx="1">
+            <a:schemeClr val="accent1"/>
+          </a:fillRef>
+          <a:effectRef idx="0">
+            <a:schemeClr val="accent1"/>
+          </a:effectRef>
+          <a:fontRef idx="minor">
+            <a:schemeClr val="lt1"/>
+          </a:fontRef>
+        </p:style>
+        <p:txBody>
+          <a:bodyPr rtlCol="0" anchor="ctr"/>
+          <a:lstStyle/>
+          <a:p>
+            <a:pPr algn="ctr"/>
+            <a:endParaRPr lang="en-US" dirty="0"/>
+          </a:p>
+        </p:txBody>
+      </p:sp>
+      <p:sp>
+        <p:nvSpPr>
+          <p:cNvPr id="12" name="Freeform: Shape 11">
+            <a:extLst>
+              <a:ext uri="{FF2B5EF4-FFF2-40B4-BE49-F238E27FC236}">
+                <a16:creationId xmlns:a16="http://schemas.microsoft.com/office/drawing/2014/main" id="{DB447EBC-0EF1-D910-CF71-CA049A985C1D}"/>
+              </a:ext>
+              <a:ext uri="{C183D7F6-B498-43B3-948B-1728B52AA6E4}">
+                <adec:decorative xmlns:adec="http://schemas.microsoft.com/office/drawing/2017/decorative" val="1"/>
+              </a:ext>
+            </a:extLst>
+          </p:cNvPr>
+          <p:cNvSpPr>
+            <a:spLocks noGrp="1" noRot="1" noChangeAspect="1" noMove="1" noResize="1" noEditPoints="1" noAdjustHandles="1" noChangeArrowheads="1" noChangeShapeType="1" noTextEdit="1"/>
+          </p:cNvSpPr>
+          <p:nvPr>
+            <p:extLst>
+              <p:ext uri="{386F3935-93C4-4BCD-93E2-E3B085C9AB24}">
+                <p16:designElem xmlns:p16="http://schemas.microsoft.com/office/powerpoint/2015/main" val="1"/>
+              </p:ext>
+            </p:extLst>
+          </p:nvPr>
+        </p:nvSpPr>
+        <p:spPr>
+          <a:xfrm rot="18900000" flipH="1">
+            <a:off x="-376156" y="-253670"/>
+            <a:ext cx="1827638" cy="1376989"/>
+          </a:xfrm>
+          <a:custGeom>
+            <a:avLst/>
+            <a:gdLst>
+              <a:gd name="connsiteX0" fmla="*/ 0 w 1827638"/>
+              <a:gd name="connsiteY0" fmla="*/ 987379 h 1376989"/>
+              <a:gd name="connsiteX1" fmla="*/ 987379 w 1827638"/>
+              <a:gd name="connsiteY1" fmla="*/ 0 h 1376989"/>
+              <a:gd name="connsiteX2" fmla="*/ 1827638 w 1827638"/>
+              <a:gd name="connsiteY2" fmla="*/ 840260 h 1376989"/>
+              <a:gd name="connsiteX3" fmla="*/ 1827638 w 1827638"/>
+              <a:gd name="connsiteY3" fmla="*/ 1376989 h 1376989"/>
+              <a:gd name="connsiteX4" fmla="*/ 0 w 1827638"/>
+              <a:gd name="connsiteY4" fmla="*/ 1376989 h 1376989"/>
+            </a:gdLst>
+            <a:ahLst/>
+            <a:cxnLst>
+              <a:cxn ang="0">
+                <a:pos x="connsiteX0" y="connsiteY0"/>
+              </a:cxn>
+              <a:cxn ang="0">
+                <a:pos x="connsiteX1" y="connsiteY1"/>
+              </a:cxn>
+              <a:cxn ang="0">
+                <a:pos x="connsiteX2" y="connsiteY2"/>
+              </a:cxn>
+              <a:cxn ang="0">
+                <a:pos x="connsiteX3" y="connsiteY3"/>
+              </a:cxn>
+              <a:cxn ang="0">
+                <a:pos x="connsiteX4" y="connsiteY4"/>
+              </a:cxn>
+            </a:cxnLst>
+            <a:rect l="l" t="t" r="r" b="b"/>
+            <a:pathLst>
+              <a:path w="1827638" h="1376989">
+                <a:moveTo>
+                  <a:pt x="0" y="987379"/>
+                </a:moveTo>
+                <a:lnTo>
+                  <a:pt x="987379" y="0"/>
+                </a:lnTo>
+                <a:lnTo>
+                  <a:pt x="1827638" y="840260"/>
+                </a:lnTo>
+                <a:lnTo>
+                  <a:pt x="1827638" y="1376989"/>
+                </a:lnTo>
+                <a:lnTo>
+                  <a:pt x="0" y="1376989"/>
+                </a:lnTo>
+                <a:close/>
+              </a:path>
+            </a:pathLst>
+          </a:custGeom>
+          <a:solidFill>
+            <a:schemeClr val="accent1">
+              <a:alpha val="30000"/>
+            </a:schemeClr>
+          </a:solidFill>
+          <a:ln>
+            <a:noFill/>
+          </a:ln>
+        </p:spPr>
+        <p:style>
+          <a:lnRef idx="2">
+            <a:schemeClr val="accent1">
+              <a:shade val="50000"/>
+            </a:schemeClr>
+          </a:lnRef>
+          <a:fillRef idx="1">
+            <a:schemeClr val="accent1"/>
+          </a:fillRef>
+          <a:effectRef idx="0">
+            <a:schemeClr val="accent1"/>
+          </a:effectRef>
+          <a:fontRef idx="minor">
+            <a:schemeClr val="lt1"/>
+          </a:fontRef>
+        </p:style>
+        <p:txBody>
+          <a:bodyPr rtlCol="0" anchor="ctr"/>
+          <a:lstStyle/>
+          <a:p>
+            <a:pPr algn="ctr"/>
+            <a:endParaRPr lang="en-US" dirty="0"/>
+          </a:p>
+        </p:txBody>
+      </p:sp>
+      <p:sp>
+        <p:nvSpPr>
+          <p:cNvPr id="14" name="Rectangle 13">
+            <a:extLst>
+              <a:ext uri="{FF2B5EF4-FFF2-40B4-BE49-F238E27FC236}">
+                <a16:creationId xmlns:a16="http://schemas.microsoft.com/office/drawing/2014/main" id="{459F2088-8DDB-50DC-7F53-7B51A5ED9A6E}"/>
+              </a:ext>
+              <a:ext uri="{C183D7F6-B498-43B3-948B-1728B52AA6E4}">
+                <adec:decorative xmlns:adec="http://schemas.microsoft.com/office/drawing/2017/decorative" val="1"/>
+              </a:ext>
+            </a:extLst>
+          </p:cNvPr>
+          <p:cNvSpPr>
+            <a:spLocks noGrp="1" noRot="1" noChangeAspect="1" noMove="1" noResize="1" noEditPoints="1" noAdjustHandles="1" noChangeArrowheads="1" noChangeShapeType="1" noTextEdit="1"/>
+          </p:cNvSpPr>
+          <p:nvPr>
+            <p:extLst>
+              <p:ext uri="{386F3935-93C4-4BCD-93E2-E3B085C9AB24}">
+                <p16:designElem xmlns:p16="http://schemas.microsoft.com/office/powerpoint/2015/main" val="1"/>
+              </p:ext>
+            </p:extLst>
+          </p:nvPr>
+        </p:nvSpPr>
+        <p:spPr>
+          <a:xfrm rot="18900000" flipH="1">
+            <a:off x="891641" y="422146"/>
+            <a:ext cx="645368" cy="645368"/>
+          </a:xfrm>
+          <a:prstGeom prst="rect">
+            <a:avLst/>
+          </a:prstGeom>
+          <a:solidFill>
+            <a:schemeClr val="accent1">
+              <a:alpha val="30000"/>
+            </a:schemeClr>
+          </a:solidFill>
+          <a:ln>
+            <a:noFill/>
+          </a:ln>
+        </p:spPr>
+        <p:style>
+          <a:lnRef idx="2">
+            <a:schemeClr val="accent1">
+              <a:shade val="50000"/>
+            </a:schemeClr>
+          </a:lnRef>
+          <a:fillRef idx="1">
+            <a:schemeClr val="accent1"/>
+          </a:fillRef>
+          <a:effectRef idx="0">
+            <a:schemeClr val="accent1"/>
+          </a:effectRef>
+          <a:fontRef idx="minor">
+            <a:schemeClr val="lt1"/>
+          </a:fontRef>
+        </p:style>
+        <p:txBody>
+          <a:bodyPr rtlCol="0" anchor="ctr"/>
+          <a:lstStyle/>
+          <a:p>
+            <a:pPr algn="ctr"/>
+            <a:endParaRPr lang="en-US"/>
+          </a:p>
+        </p:txBody>
+      </p:sp>
+      <p:sp>
+        <p:nvSpPr>
+          <p:cNvPr id="16" name="Rectangle 15">
+            <a:extLst>
+              <a:ext uri="{FF2B5EF4-FFF2-40B4-BE49-F238E27FC236}">
+                <a16:creationId xmlns:a16="http://schemas.microsoft.com/office/drawing/2014/main" id="{942F8479-49AA-F00E-BDCF-92A6AA044A34}"/>
+              </a:ext>
+              <a:ext uri="{C183D7F6-B498-43B3-948B-1728B52AA6E4}">
+                <adec:decorative xmlns:adec="http://schemas.microsoft.com/office/drawing/2017/decorative" val="1"/>
+              </a:ext>
+            </a:extLst>
+          </p:cNvPr>
+          <p:cNvSpPr>
+            <a:spLocks noGrp="1" noRot="1" noChangeAspect="1" noMove="1" noResize="1" noEditPoints="1" noAdjustHandles="1" noChangeArrowheads="1" noChangeShapeType="1" noTextEdit="1"/>
+          </p:cNvSpPr>
+          <p:nvPr>
+            <p:extLst>
+              <p:ext uri="{386F3935-93C4-4BCD-93E2-E3B085C9AB24}">
+                <p16:designElem xmlns:p16="http://schemas.microsoft.com/office/powerpoint/2015/main" val="1"/>
+              </p:ext>
+            </p:extLst>
+          </p:nvPr>
+        </p:nvSpPr>
+        <p:spPr>
+          <a:xfrm rot="18900000" flipH="1">
+            <a:off x="10043482" y="655140"/>
+            <a:ext cx="687472" cy="687472"/>
+          </a:xfrm>
+          <a:prstGeom prst="rect">
+            <a:avLst/>
+          </a:prstGeom>
+          <a:solidFill>
+            <a:schemeClr val="accent4">
+              <a:alpha val="30000"/>
+            </a:schemeClr>
+          </a:solidFill>
+          <a:ln>
+            <a:noFill/>
+          </a:ln>
+        </p:spPr>
+        <p:style>
+          <a:lnRef idx="2">
+            <a:schemeClr val="accent1">
+              <a:shade val="50000"/>
+            </a:schemeClr>
+          </a:lnRef>
+          <a:fillRef idx="1">
+            <a:schemeClr val="accent1"/>
+          </a:fillRef>
+          <a:effectRef idx="0">
+            <a:schemeClr val="accent1"/>
+          </a:effectRef>
+          <a:fontRef idx="minor">
+            <a:schemeClr val="lt1"/>
+          </a:fontRef>
+        </p:style>
+        <p:txBody>
+          <a:bodyPr rtlCol="0" anchor="ctr"/>
+          <a:lstStyle/>
+          <a:p>
+            <a:pPr algn="ctr"/>
+            <a:endParaRPr lang="en-US"/>
+          </a:p>
+        </p:txBody>
+      </p:sp>
+      <p:sp>
+        <p:nvSpPr>
+          <p:cNvPr id="18" name="Freeform: Shape 17">
+            <a:extLst>
+              <a:ext uri="{FF2B5EF4-FFF2-40B4-BE49-F238E27FC236}">
+                <a16:creationId xmlns:a16="http://schemas.microsoft.com/office/drawing/2014/main" id="{A1FD43B5-C465-2C50-9822-8FC02205B7BF}"/>
+              </a:ext>
+              <a:ext uri="{C183D7F6-B498-43B3-948B-1728B52AA6E4}">
+                <adec:decorative xmlns:adec="http://schemas.microsoft.com/office/drawing/2017/decorative" val="1"/>
+              </a:ext>
+            </a:extLst>
+          </p:cNvPr>
+          <p:cNvSpPr>
+            <a:spLocks noGrp="1" noRot="1" noChangeAspect="1" noMove="1" noResize="1" noEditPoints="1" noAdjustHandles="1" noChangeArrowheads="1" noChangeShapeType="1" noTextEdit="1"/>
+          </p:cNvSpPr>
+          <p:nvPr>
+            <p:extLst>
+              <p:ext uri="{386F3935-93C4-4BCD-93E2-E3B085C9AB24}">
+                <p16:designElem xmlns:p16="http://schemas.microsoft.com/office/powerpoint/2015/main" val="1"/>
+              </p:ext>
+            </p:extLst>
+          </p:nvPr>
+        </p:nvSpPr>
+        <p:spPr>
+          <a:xfrm rot="10800000" flipH="1">
+            <a:off x="9356643" y="0"/>
+            <a:ext cx="2835357" cy="1480837"/>
+          </a:xfrm>
+          <a:custGeom>
+            <a:avLst/>
+            <a:gdLst>
+              <a:gd name="connsiteX0" fmla="*/ 2835357 w 2835357"/>
+              <a:gd name="connsiteY0" fmla="*/ 1480837 h 1480837"/>
+              <a:gd name="connsiteX1" fmla="*/ 0 w 2835357"/>
+              <a:gd name="connsiteY1" fmla="*/ 1480837 h 1480837"/>
+              <a:gd name="connsiteX2" fmla="*/ 1552727 w 2835357"/>
+              <a:gd name="connsiteY2" fmla="*/ 0 h 1480837"/>
+              <a:gd name="connsiteX3" fmla="*/ 2835357 w 2835357"/>
+              <a:gd name="connsiteY3" fmla="*/ 1223245 h 1480837"/>
+            </a:gdLst>
+            <a:ahLst/>
+            <a:cxnLst>
+              <a:cxn ang="0">
+                <a:pos x="connsiteX0" y="connsiteY0"/>
+              </a:cxn>
+              <a:cxn ang="0">
+                <a:pos x="connsiteX1" y="connsiteY1"/>
+              </a:cxn>
+              <a:cxn ang="0">
+                <a:pos x="connsiteX2" y="connsiteY2"/>
+              </a:cxn>
+              <a:cxn ang="0">
+                <a:pos x="connsiteX3" y="connsiteY3"/>
+              </a:cxn>
+            </a:cxnLst>
+            <a:rect l="l" t="t" r="r" b="b"/>
+            <a:pathLst>
+              <a:path w="2835357" h="1480837">
+                <a:moveTo>
+                  <a:pt x="2835357" y="1480837"/>
+                </a:moveTo>
+                <a:lnTo>
+                  <a:pt x="0" y="1480837"/>
+                </a:lnTo>
+                <a:lnTo>
+                  <a:pt x="1552727" y="0"/>
+                </a:lnTo>
+                <a:lnTo>
+                  <a:pt x="2835357" y="1223245"/>
+                </a:lnTo>
+                <a:close/>
+              </a:path>
+            </a:pathLst>
+          </a:custGeom>
+          <a:solidFill>
+            <a:schemeClr val="accent4">
+              <a:alpha val="30000"/>
+            </a:schemeClr>
+          </a:solidFill>
+          <a:ln>
+            <a:noFill/>
+          </a:ln>
+        </p:spPr>
+        <p:style>
+          <a:lnRef idx="2">
+            <a:schemeClr val="accent1">
+              <a:shade val="50000"/>
+            </a:schemeClr>
+          </a:lnRef>
+          <a:fillRef idx="1">
+            <a:schemeClr val="accent1"/>
+          </a:fillRef>
+          <a:effectRef idx="0">
+            <a:schemeClr val="accent1"/>
+          </a:effectRef>
+          <a:fontRef idx="minor">
+            <a:schemeClr val="lt1"/>
+          </a:fontRef>
+        </p:style>
+        <p:txBody>
+          <a:bodyPr wrap="square" rtlCol="0" anchor="ctr">
+            <a:noAutofit/>
+          </a:bodyPr>
+          <a:lstStyle/>
+          <a:p>
+            <a:pPr algn="ctr"/>
+            <a:endParaRPr lang="en-US" dirty="0"/>
+          </a:p>
+        </p:txBody>
+      </p:sp>
+      <p:sp>
+        <p:nvSpPr>
+          <p:cNvPr id="20" name="Isosceles Triangle 19">
+            <a:extLst>
+              <a:ext uri="{FF2B5EF4-FFF2-40B4-BE49-F238E27FC236}">
+                <a16:creationId xmlns:a16="http://schemas.microsoft.com/office/drawing/2014/main" id="{C1766EB8-F9F9-BEA9-AF37-780A1B2B3954}"/>
+              </a:ext>
+              <a:ext uri="{C183D7F6-B498-43B3-948B-1728B52AA6E4}">
+                <adec:decorative xmlns:adec="http://schemas.microsoft.com/office/drawing/2017/decorative" val="1"/>
+              </a:ext>
+            </a:extLst>
+          </p:cNvPr>
+          <p:cNvSpPr>
+            <a:spLocks noGrp="1" noRot="1" noChangeAspect="1" noMove="1" noResize="1" noEditPoints="1" noAdjustHandles="1" noChangeArrowheads="1" noChangeShapeType="1" noTextEdit="1"/>
+          </p:cNvSpPr>
+          <p:nvPr>
+            <p:extLst>
+              <p:ext uri="{386F3935-93C4-4BCD-93E2-E3B085C9AB24}">
+                <p16:designElem xmlns:p16="http://schemas.microsoft.com/office/powerpoint/2015/main" val="1"/>
+              </p:ext>
+            </p:extLst>
+          </p:nvPr>
+        </p:nvSpPr>
+        <p:spPr>
+          <a:xfrm flipH="1">
+            <a:off x="7976344" y="6115501"/>
+            <a:ext cx="1494513" cy="742499"/>
+          </a:xfrm>
+          <a:prstGeom prst="triangle">
+            <a:avLst/>
+          </a:prstGeom>
+          <a:solidFill>
+            <a:schemeClr val="accent1">
+              <a:alpha val="30000"/>
+            </a:schemeClr>
+          </a:solidFill>
+          <a:ln>
+            <a:noFill/>
+          </a:ln>
+        </p:spPr>
+        <p:style>
+          <a:lnRef idx="2">
+            <a:schemeClr val="accent1">
+              <a:shade val="50000"/>
+            </a:schemeClr>
+          </a:lnRef>
+          <a:fillRef idx="1">
+            <a:schemeClr val="accent1"/>
+          </a:fillRef>
+          <a:effectRef idx="0">
+            <a:schemeClr val="accent1"/>
+          </a:effectRef>
+          <a:fontRef idx="minor">
+            <a:schemeClr val="lt1"/>
+          </a:fontRef>
+        </p:style>
+        <p:txBody>
+          <a:bodyPr rtlCol="0" anchor="ctr"/>
+          <a:lstStyle/>
+          <a:p>
+            <a:pPr algn="ctr"/>
+            <a:endParaRPr lang="en-US"/>
+          </a:p>
+        </p:txBody>
+      </p:sp>
+      <p:sp>
+        <p:nvSpPr>
+          <p:cNvPr id="22" name="Isosceles Triangle 21">
+            <a:extLst>
+              <a:ext uri="{FF2B5EF4-FFF2-40B4-BE49-F238E27FC236}">
+                <a16:creationId xmlns:a16="http://schemas.microsoft.com/office/drawing/2014/main" id="{C04C62BD-C7A1-71A8-B4CC-E9AFE05E8CA1}"/>
+              </a:ext>
+              <a:ext uri="{C183D7F6-B498-43B3-948B-1728B52AA6E4}">
+                <adec:decorative xmlns:adec="http://schemas.microsoft.com/office/drawing/2017/decorative" val="1"/>
+              </a:ext>
+            </a:extLst>
+          </p:cNvPr>
+          <p:cNvSpPr>
+            <a:spLocks noGrp="1" noRot="1" noChangeAspect="1" noMove="1" noResize="1" noEditPoints="1" noAdjustHandles="1" noChangeArrowheads="1" noChangeShapeType="1" noTextEdit="1"/>
+          </p:cNvSpPr>
+          <p:nvPr>
+            <p:extLst>
+              <p:ext uri="{386F3935-93C4-4BCD-93E2-E3B085C9AB24}">
+                <p16:designElem xmlns:p16="http://schemas.microsoft.com/office/powerpoint/2015/main" val="1"/>
+              </p:ext>
+            </p:extLst>
+          </p:nvPr>
+        </p:nvSpPr>
+        <p:spPr>
+          <a:xfrm flipH="1">
+            <a:off x="7604080" y="6453143"/>
+            <a:ext cx="814903" cy="404857"/>
+          </a:xfrm>
+          <a:prstGeom prst="triangle">
+            <a:avLst/>
+          </a:prstGeom>
+          <a:solidFill>
+            <a:schemeClr val="accent1">
+              <a:alpha val="30000"/>
+            </a:schemeClr>
+          </a:solidFill>
+          <a:ln>
+            <a:noFill/>
+          </a:ln>
+        </p:spPr>
+        <p:style>
+          <a:lnRef idx="2">
+            <a:schemeClr val="accent1">
+              <a:shade val="50000"/>
+            </a:schemeClr>
+          </a:lnRef>
+          <a:fillRef idx="1">
+            <a:schemeClr val="accent1"/>
+          </a:fillRef>
+          <a:effectRef idx="0">
+            <a:schemeClr val="accent1"/>
+          </a:effectRef>
+          <a:fontRef idx="minor">
+            <a:schemeClr val="lt1"/>
+          </a:fontRef>
+        </p:style>
+        <p:txBody>
+          <a:bodyPr rtlCol="0" anchor="ctr"/>
+          <a:lstStyle/>
+          <a:p>
+            <a:pPr algn="ctr"/>
+            <a:endParaRPr lang="en-US"/>
+          </a:p>
+        </p:txBody>
+      </p:sp>
+      <p:pic>
+        <p:nvPicPr>
+          <p:cNvPr id="4" name="Content Placeholder 6" descr="A graph with numbers and lines&#10;&#10;AI-generated content may be incorrect.">
+            <a:extLst>
+              <a:ext uri="{FF2B5EF4-FFF2-40B4-BE49-F238E27FC236}">
+                <a16:creationId xmlns:a16="http://schemas.microsoft.com/office/drawing/2014/main" id="{61043ED6-A4BC-2405-C2BD-50711820623D}"/>
+              </a:ext>
+            </a:extLst>
+          </p:cNvPr>
+          <p:cNvPicPr>
+            <a:picLocks noGrp="1" noChangeAspect="1"/>
+          </p:cNvPicPr>
+          <p:nvPr>
+            <p:ph idx="1"/>
+          </p:nvPr>
+        </p:nvPicPr>
+        <p:blipFill>
+          <a:blip r:embed="rId2">
+            <a:extLst>
+              <a:ext uri="{28A0092B-C50C-407E-A947-70E740481C1C}">
+                <a14:useLocalDpi xmlns:a14="http://schemas.microsoft.com/office/drawing/2010/main" val="0"/>
+              </a:ext>
+            </a:extLst>
+          </a:blip>
+          <a:stretch>
+            <a:fillRect/>
+          </a:stretch>
+        </p:blipFill>
+        <p:spPr>
+          <a:xfrm>
+            <a:off x="475512" y="1567832"/>
+            <a:ext cx="11240976" cy="3746991"/>
+          </a:xfrm>
+          <a:prstGeom prst="rect">
+            <a:avLst/>
+          </a:prstGeom>
+        </p:spPr>
+      </p:pic>
+      <p:sp>
+        <p:nvSpPr>
+          <p:cNvPr id="11" name="TextBox 10">
+            <a:extLst>
+              <a:ext uri="{FF2B5EF4-FFF2-40B4-BE49-F238E27FC236}">
+                <a16:creationId xmlns:a16="http://schemas.microsoft.com/office/drawing/2014/main" id="{7D725934-A393-8605-5F23-773A8F51F3AF}"/>
+              </a:ext>
+            </a:extLst>
+          </p:cNvPr>
+          <p:cNvSpPr txBox="1"/>
+          <p:nvPr/>
+        </p:nvSpPr>
+        <p:spPr>
+          <a:xfrm>
+            <a:off x="1762246" y="5092539"/>
+            <a:ext cx="6094070" cy="369332"/>
+          </a:xfrm>
+          <a:prstGeom prst="rect">
+            <a:avLst/>
+          </a:prstGeom>
+          <a:noFill/>
+        </p:spPr>
+        <p:txBody>
+          <a:bodyPr wrap="square">
+            <a:spAutoFit/>
+          </a:bodyPr>
+          <a:lstStyle/>
+          <a:p>
+            <a:r>
+              <a:rPr lang="en-US" dirty="0"/>
+              <a:t>7878</a:t>
+            </a:r>
+            <a:r>
+              <a:rPr lang="en-US" sz="1800" dirty="0"/>
+              <a:t> times </a:t>
+            </a:r>
+            <a:endParaRPr lang="en-US" sz="1800" dirty="0">
+              <a:latin typeface="+mn-lt"/>
+            </a:endParaRPr>
+          </a:p>
+        </p:txBody>
+      </p:sp>
+      <p:sp>
+        <p:nvSpPr>
+          <p:cNvPr id="13" name="TextBox 12">
+            <a:extLst>
+              <a:ext uri="{FF2B5EF4-FFF2-40B4-BE49-F238E27FC236}">
+                <a16:creationId xmlns:a16="http://schemas.microsoft.com/office/drawing/2014/main" id="{62CA16F2-637E-1459-FDD5-7C1B3532A36A}"/>
+              </a:ext>
+            </a:extLst>
+          </p:cNvPr>
+          <p:cNvSpPr txBox="1"/>
+          <p:nvPr/>
+        </p:nvSpPr>
+        <p:spPr>
+          <a:xfrm>
+            <a:off x="5622418" y="5092539"/>
+            <a:ext cx="6094070" cy="369332"/>
+          </a:xfrm>
+          <a:prstGeom prst="rect">
+            <a:avLst/>
+          </a:prstGeom>
+          <a:noFill/>
+        </p:spPr>
+        <p:txBody>
+          <a:bodyPr wrap="square">
+            <a:spAutoFit/>
+          </a:bodyPr>
+          <a:lstStyle/>
+          <a:p>
+            <a:r>
+              <a:rPr lang="en-US" dirty="0"/>
+              <a:t>1396 </a:t>
+            </a:r>
+            <a:r>
+              <a:rPr lang="en-US" sz="1800" dirty="0"/>
+              <a:t>times </a:t>
+            </a:r>
+            <a:endParaRPr lang="en-US" sz="1800" dirty="0">
+              <a:latin typeface="+mn-lt"/>
+            </a:endParaRPr>
+          </a:p>
+        </p:txBody>
+      </p:sp>
+      <p:sp>
+        <p:nvSpPr>
+          <p:cNvPr id="9" name="TextBox 8">
+            <a:extLst>
+              <a:ext uri="{FF2B5EF4-FFF2-40B4-BE49-F238E27FC236}">
+                <a16:creationId xmlns:a16="http://schemas.microsoft.com/office/drawing/2014/main" id="{7B80E0B6-F2B8-3C9B-1326-CDE9E3A72BDE}"/>
+              </a:ext>
+            </a:extLst>
+          </p:cNvPr>
+          <p:cNvSpPr txBox="1"/>
+          <p:nvPr/>
+        </p:nvSpPr>
+        <p:spPr>
+          <a:xfrm>
+            <a:off x="9394141" y="5092539"/>
+            <a:ext cx="6094070" cy="369332"/>
+          </a:xfrm>
+          <a:prstGeom prst="rect">
+            <a:avLst/>
+          </a:prstGeom>
+          <a:noFill/>
+        </p:spPr>
+        <p:txBody>
+          <a:bodyPr wrap="square">
+            <a:spAutoFit/>
+          </a:bodyPr>
+          <a:lstStyle/>
+          <a:p>
+            <a:r>
+              <a:rPr lang="en-US" dirty="0"/>
+              <a:t>0</a:t>
+            </a:r>
+            <a:r>
+              <a:rPr lang="en-US" sz="1800" dirty="0"/>
+              <a:t> times</a:t>
+            </a:r>
+            <a:endParaRPr lang="en-US" sz="1800" dirty="0">
+              <a:latin typeface="+mn-lt"/>
+            </a:endParaRPr>
+          </a:p>
+        </p:txBody>
+      </p:sp>
+    </p:spTree>
+    <p:extLst>
+      <p:ext uri="{BB962C8B-B14F-4D97-AF65-F5344CB8AC3E}">
+        <p14:creationId xmlns:p14="http://schemas.microsoft.com/office/powerpoint/2010/main" val="605469230"/>
+      </p:ext>
+    </p:extLst>
+  </p:cSld>
+  <p:clrMapOvr>
+    <a:masterClrMapping/>
+  </p:clrMapOvr>
+</p:sld>
+</file>
+
+<file path=ppt/slides/slide8.xml><?xml version="1.0" encoding="utf-8"?>
+<p:sld xmlns:a="http://schemas.openxmlformats.org/drawingml/2006/main" xmlns:r="http://schemas.openxmlformats.org/officeDocument/2006/relationships" xmlns:p="http://schemas.openxmlformats.org/presentationml/2006/main">
+  <p:cSld>
+    <p:spTree>
+      <p:nvGrpSpPr>
+        <p:cNvPr id="1" name=""/>
+        <p:cNvGrpSpPr/>
+        <p:nvPr/>
+      </p:nvGrpSpPr>
+      <p:grpSpPr>
+        <a:xfrm>
+          <a:off x="0" y="0"/>
+          <a:ext cx="0" cy="0"/>
+          <a:chOff x="0" y="0"/>
+          <a:chExt cx="0" cy="0"/>
+        </a:xfrm>
+      </p:grpSpPr>
+      <p:pic>
+        <p:nvPicPr>
+          <p:cNvPr id="5" name="Picture 4" descr="A screenshot of a graph&#10;&#10;AI-generated content may be incorrect.">
+            <a:extLst>
+              <a:ext uri="{FF2B5EF4-FFF2-40B4-BE49-F238E27FC236}">
+                <a16:creationId xmlns:a16="http://schemas.microsoft.com/office/drawing/2014/main" id="{38FE2B26-BA33-548D-AC13-BA310DAD27B4}"/>
+              </a:ext>
+            </a:extLst>
+          </p:cNvPr>
+          <p:cNvPicPr>
+            <a:picLocks noChangeAspect="1"/>
+          </p:cNvPicPr>
+          <p:nvPr/>
+        </p:nvPicPr>
+        <p:blipFill>
+          <a:blip r:embed="rId2">
+            <a:extLst>
+              <a:ext uri="{28A0092B-C50C-407E-A947-70E740481C1C}">
+                <a14:useLocalDpi xmlns:a14="http://schemas.microsoft.com/office/drawing/2010/main" val="0"/>
+              </a:ext>
+            </a:extLst>
+          </a:blip>
+          <a:stretch>
+            <a:fillRect/>
+          </a:stretch>
+        </p:blipFill>
+        <p:spPr>
+          <a:xfrm>
+            <a:off x="3832322" y="0"/>
+            <a:ext cx="7837714" cy="6858000"/>
+          </a:xfrm>
+          <a:prstGeom prst="rect">
+            <a:avLst/>
+          </a:prstGeom>
+        </p:spPr>
+      </p:pic>
+      <p:pic>
+        <p:nvPicPr>
+          <p:cNvPr id="6" name="Picture 6" descr="Mus (genus) - Wikipedia">
+            <a:extLst>
+              <a:ext uri="{FF2B5EF4-FFF2-40B4-BE49-F238E27FC236}">
+                <a16:creationId xmlns:a16="http://schemas.microsoft.com/office/drawing/2014/main" id="{BEF43550-DA37-ABAD-4AD8-27C4EC65AD13}"/>
+              </a:ext>
+            </a:extLst>
+          </p:cNvPr>
+          <p:cNvPicPr>
+            <a:picLocks noChangeAspect="1" noChangeArrowheads="1"/>
+          </p:cNvPicPr>
+          <p:nvPr/>
+        </p:nvPicPr>
+        <p:blipFill>
+          <a:blip r:embed="rId3">
+            <a:extLst>
+              <a:ext uri="{BEBA8EAE-BF5A-486C-A8C5-ECC9F3942E4B}">
+                <a14:imgProps xmlns:a14="http://schemas.microsoft.com/office/drawing/2010/main">
+                  <a14:imgLayer r:embed="rId4">
+                    <a14:imgEffect>
+                      <a14:colorTemperature colorTemp="8800"/>
+                    </a14:imgEffect>
+                    <a14:imgEffect>
+                      <a14:saturation sat="66000"/>
+                    </a14:imgEffect>
+                    <a14:imgEffect>
+                      <a14:brightnessContrast contrast="20000"/>
+                    </a14:imgEffect>
+                  </a14:imgLayer>
+                </a14:imgProps>
+              </a:ext>
+              <a:ext uri="{28A0092B-C50C-407E-A947-70E740481C1C}">
+                <a14:useLocalDpi xmlns:a14="http://schemas.microsoft.com/office/drawing/2010/main" val="0"/>
+              </a:ext>
+            </a:extLst>
+          </a:blip>
+          <a:srcRect/>
+          <a:stretch>
+            <a:fillRect/>
+          </a:stretch>
+        </p:blipFill>
+        <p:spPr bwMode="auto">
+          <a:xfrm>
+            <a:off x="652161" y="2600325"/>
+            <a:ext cx="2762250" cy="1657350"/>
+          </a:xfrm>
+          <a:prstGeom prst="rect">
+            <a:avLst/>
+          </a:prstGeom>
+          <a:noFill/>
+          <a:effectLst>
+            <a:softEdge rad="31750"/>
+          </a:effectLst>
+          <a:extLst>
+            <a:ext uri="{909E8E84-426E-40DD-AFC4-6F175D3DCCD1}">
+              <a14:hiddenFill xmlns:a14="http://schemas.microsoft.com/office/drawing/2010/main">
+                <a:solidFill>
+                  <a:srgbClr val="FFFFFF"/>
+                </a:solidFill>
+              </a14:hiddenFill>
+            </a:ext>
+          </a:extLst>
+        </p:spPr>
+      </p:pic>
+      <p:sp>
+        <p:nvSpPr>
+          <p:cNvPr id="7" name="Title 1">
+            <a:extLst>
+              <a:ext uri="{FF2B5EF4-FFF2-40B4-BE49-F238E27FC236}">
+                <a16:creationId xmlns:a16="http://schemas.microsoft.com/office/drawing/2014/main" id="{518FFF9E-1C8D-D028-C3C3-D10BF7284807}"/>
+              </a:ext>
+            </a:extLst>
+          </p:cNvPr>
+          <p:cNvSpPr>
+            <a:spLocks noGrp="1"/>
+          </p:cNvSpPr>
+          <p:nvPr>
+            <p:ph type="title"/>
+          </p:nvPr>
+        </p:nvSpPr>
+        <p:spPr>
+          <a:xfrm>
+            <a:off x="120569" y="0"/>
+            <a:ext cx="10515600" cy="1325563"/>
+          </a:xfrm>
+        </p:spPr>
+        <p:txBody>
+          <a:bodyPr/>
+          <a:lstStyle/>
+          <a:p>
+            <a:r>
+              <a:rPr lang="en-US" dirty="0" err="1"/>
+              <a:t>Rezultati</a:t>
+            </a:r>
+            <a:endParaRPr lang="en-US" dirty="0"/>
+          </a:p>
+        </p:txBody>
+      </p:sp>
+    </p:spTree>
+    <p:extLst>
+      <p:ext uri="{BB962C8B-B14F-4D97-AF65-F5344CB8AC3E}">
+        <p14:creationId xmlns:p14="http://schemas.microsoft.com/office/powerpoint/2010/main" val="1211196458"/>
+      </p:ext>
+    </p:extLst>
+  </p:cSld>
+  <p:clrMapOvr>
+    <a:masterClrMapping/>
+  </p:clrMapOvr>
+</p:sld>
+</file>
+
+<file path=ppt/slides/slide9.xml><?xml version="1.0" encoding="utf-8"?>
+<p:sld xmlns:a="http://schemas.openxmlformats.org/drawingml/2006/main" xmlns:r="http://schemas.openxmlformats.org/officeDocument/2006/relationships" xmlns:p="http://schemas.openxmlformats.org/presentationml/2006/main">
+  <p:cSld>
+    <p:bg>
+      <p:bgPr>
+        <a:solidFill>
+          <a:schemeClr val="bg1"/>
+        </a:solidFill>
+        <a:effectLst/>
+      </p:bgPr>
+    </p:bg>
+    <p:spTree>
+      <p:nvGrpSpPr>
+        <p:cNvPr id="1" name=""/>
+        <p:cNvGrpSpPr/>
+        <p:nvPr/>
+      </p:nvGrpSpPr>
+      <p:grpSpPr>
+        <a:xfrm>
+          <a:off x="0" y="0"/>
+          <a:ext cx="0" cy="0"/>
+          <a:chOff x="0" y="0"/>
+          <a:chExt cx="0" cy="0"/>
+        </a:xfrm>
+      </p:grpSpPr>
+      <p:sp>
+        <p:nvSpPr>
+          <p:cNvPr id="10" name="Rectangle 9">
+            <a:extLst>
+              <a:ext uri="{FF2B5EF4-FFF2-40B4-BE49-F238E27FC236}">
+                <a16:creationId xmlns:a16="http://schemas.microsoft.com/office/drawing/2014/main" id="{F3060C83-F051-4F0E-ABAD-AA0DFC48B218}"/>
+              </a:ext>
+              <a:ext uri="{C183D7F6-B498-43B3-948B-1728B52AA6E4}">
+                <adec:decorative xmlns:adec="http://schemas.microsoft.com/office/drawing/2017/decorative" val="1"/>
+              </a:ext>
+            </a:extLst>
+          </p:cNvPr>
+          <p:cNvSpPr>
+            <a:spLocks noGrp="1" noRot="1" noChangeAspect="1" noMove="1" noResize="1" noEditPoints="1" noAdjustHandles="1" noChangeArrowheads="1" noChangeShapeType="1" noTextEdit="1"/>
+          </p:cNvSpPr>
+          <p:nvPr>
+            <p:extLst>
+              <p:ext uri="{386F3935-93C4-4BCD-93E2-E3B085C9AB24}">
+                <p16:designElem xmlns:p16="http://schemas.microsoft.com/office/powerpoint/2015/main" val="1"/>
+              </p:ext>
+            </p:extLst>
+          </p:nvPr>
+        </p:nvSpPr>
+        <p:spPr>
+          <a:xfrm>
+            <a:off x="0" y="0"/>
+            <a:ext cx="12192000" cy="6858000"/>
+          </a:xfrm>
+          <a:prstGeom prst="rect">
+            <a:avLst/>
+          </a:prstGeom>
+          <a:solidFill>
+            <a:schemeClr val="bg1"/>
+          </a:solidFill>
+          <a:ln>
+            <a:noFill/>
+          </a:ln>
+        </p:spPr>
+        <p:style>
+          <a:lnRef idx="2">
+            <a:schemeClr val="accent1">
+              <a:shade val="50000"/>
+            </a:schemeClr>
+          </a:lnRef>
+          <a:fillRef idx="1">
+            <a:schemeClr val="accent1"/>
+          </a:fillRef>
+          <a:effectRef idx="0">
+            <a:schemeClr val="accent1"/>
+          </a:effectRef>
+          <a:fontRef idx="minor">
+            <a:schemeClr val="lt1"/>
+          </a:fontRef>
+        </p:style>
+        <p:txBody>
+          <a:bodyPr rtlCol="0" anchor="ctr"/>
+          <a:lstStyle/>
+          <a:p>
+            <a:pPr algn="ctr"/>
+            <a:endParaRPr lang="en-US" dirty="0"/>
+          </a:p>
+        </p:txBody>
+      </p:sp>
+      <p:sp>
+        <p:nvSpPr>
+          <p:cNvPr id="12" name="Freeform: Shape 11">
+            <a:extLst>
+              <a:ext uri="{FF2B5EF4-FFF2-40B4-BE49-F238E27FC236}">
+                <a16:creationId xmlns:a16="http://schemas.microsoft.com/office/drawing/2014/main" id="{83C98ABE-055B-441F-B07E-44F97F083C39}"/>
+              </a:ext>
+              <a:ext uri="{C183D7F6-B498-43B3-948B-1728B52AA6E4}">
+                <adec:decorative xmlns:adec="http://schemas.microsoft.com/office/drawing/2017/decorative" val="1"/>
+              </a:ext>
+            </a:extLst>
+          </p:cNvPr>
+          <p:cNvSpPr>
+            <a:spLocks noGrp="1" noRot="1" noChangeAspect="1" noMove="1" noResize="1" noEditPoints="1" noAdjustHandles="1" noChangeArrowheads="1" noChangeShapeType="1" noTextEdit="1"/>
+          </p:cNvSpPr>
+          <p:nvPr>
+            <p:extLst>
+              <p:ext uri="{386F3935-93C4-4BCD-93E2-E3B085C9AB24}">
+                <p16:designElem xmlns:p16="http://schemas.microsoft.com/office/powerpoint/2015/main" val="1"/>
+              </p:ext>
+            </p:extLst>
+          </p:nvPr>
+        </p:nvSpPr>
+        <p:spPr>
+          <a:xfrm rot="18900000" flipH="1">
+            <a:off x="-376156" y="-253670"/>
+            <a:ext cx="1827638" cy="1376989"/>
+          </a:xfrm>
+          <a:custGeom>
+            <a:avLst/>
+            <a:gdLst>
+              <a:gd name="connsiteX0" fmla="*/ 0 w 1827638"/>
+              <a:gd name="connsiteY0" fmla="*/ 987379 h 1376989"/>
+              <a:gd name="connsiteX1" fmla="*/ 987379 w 1827638"/>
+              <a:gd name="connsiteY1" fmla="*/ 0 h 1376989"/>
+              <a:gd name="connsiteX2" fmla="*/ 1827638 w 1827638"/>
+              <a:gd name="connsiteY2" fmla="*/ 840260 h 1376989"/>
+              <a:gd name="connsiteX3" fmla="*/ 1827638 w 1827638"/>
+              <a:gd name="connsiteY3" fmla="*/ 1376989 h 1376989"/>
+              <a:gd name="connsiteX4" fmla="*/ 0 w 1827638"/>
+              <a:gd name="connsiteY4" fmla="*/ 1376989 h 1376989"/>
+            </a:gdLst>
+            <a:ahLst/>
+            <a:cxnLst>
+              <a:cxn ang="0">
+                <a:pos x="connsiteX0" y="connsiteY0"/>
+              </a:cxn>
+              <a:cxn ang="0">
+                <a:pos x="connsiteX1" y="connsiteY1"/>
+              </a:cxn>
+              <a:cxn ang="0">
+                <a:pos x="connsiteX2" y="connsiteY2"/>
+              </a:cxn>
+              <a:cxn ang="0">
+                <a:pos x="connsiteX3" y="connsiteY3"/>
+              </a:cxn>
+              <a:cxn ang="0">
+                <a:pos x="connsiteX4" y="connsiteY4"/>
+              </a:cxn>
+            </a:cxnLst>
+            <a:rect l="l" t="t" r="r" b="b"/>
+            <a:pathLst>
+              <a:path w="1827638" h="1376989">
+                <a:moveTo>
+                  <a:pt x="0" y="987379"/>
+                </a:moveTo>
+                <a:lnTo>
+                  <a:pt x="987379" y="0"/>
+                </a:lnTo>
+                <a:lnTo>
+                  <a:pt x="1827638" y="840260"/>
+                </a:lnTo>
+                <a:lnTo>
+                  <a:pt x="1827638" y="1376989"/>
+                </a:lnTo>
+                <a:lnTo>
+                  <a:pt x="0" y="1376989"/>
+                </a:lnTo>
+                <a:close/>
+              </a:path>
+            </a:pathLst>
+          </a:custGeom>
+          <a:solidFill>
+            <a:schemeClr val="accent1">
+              <a:alpha val="30000"/>
+            </a:schemeClr>
+          </a:solidFill>
+          <a:ln>
+            <a:noFill/>
+          </a:ln>
+        </p:spPr>
+        <p:style>
+          <a:lnRef idx="2">
+            <a:schemeClr val="accent1">
+              <a:shade val="50000"/>
+            </a:schemeClr>
+          </a:lnRef>
+          <a:fillRef idx="1">
+            <a:schemeClr val="accent1"/>
+          </a:fillRef>
+          <a:effectRef idx="0">
+            <a:schemeClr val="accent1"/>
+          </a:effectRef>
+          <a:fontRef idx="minor">
+            <a:schemeClr val="lt1"/>
+          </a:fontRef>
+        </p:style>
+        <p:txBody>
+          <a:bodyPr rtlCol="0" anchor="ctr"/>
+          <a:lstStyle/>
+          <a:p>
+            <a:pPr algn="ctr"/>
+            <a:endParaRPr lang="en-US" dirty="0"/>
+          </a:p>
+        </p:txBody>
+      </p:sp>
+      <p:sp>
+        <p:nvSpPr>
+          <p:cNvPr id="14" name="Rectangle 13">
+            <a:extLst>
+              <a:ext uri="{FF2B5EF4-FFF2-40B4-BE49-F238E27FC236}">
+                <a16:creationId xmlns:a16="http://schemas.microsoft.com/office/drawing/2014/main" id="{29FDB030-9B49-4CED-8CCD-4D99382388AC}"/>
+              </a:ext>
+              <a:ext uri="{C183D7F6-B498-43B3-948B-1728B52AA6E4}">
+                <adec:decorative xmlns:adec="http://schemas.microsoft.com/office/drawing/2017/decorative" val="1"/>
+              </a:ext>
+            </a:extLst>
+          </p:cNvPr>
+          <p:cNvSpPr>
+            <a:spLocks noGrp="1" noRot="1" noChangeAspect="1" noMove="1" noResize="1" noEditPoints="1" noAdjustHandles="1" noChangeArrowheads="1" noChangeShapeType="1" noTextEdit="1"/>
+          </p:cNvSpPr>
+          <p:nvPr>
+            <p:extLst>
+              <p:ext uri="{386F3935-93C4-4BCD-93E2-E3B085C9AB24}">
+                <p16:designElem xmlns:p16="http://schemas.microsoft.com/office/powerpoint/2015/main" val="1"/>
+              </p:ext>
+            </p:extLst>
+          </p:nvPr>
+        </p:nvSpPr>
+        <p:spPr>
+          <a:xfrm rot="18900000" flipH="1">
+            <a:off x="891641" y="422146"/>
+            <a:ext cx="645368" cy="645368"/>
+          </a:xfrm>
+          <a:prstGeom prst="rect">
+            <a:avLst/>
+          </a:prstGeom>
+          <a:solidFill>
+            <a:schemeClr val="accent1">
+              <a:alpha val="30000"/>
+            </a:schemeClr>
+          </a:solidFill>
+          <a:ln>
+            <a:noFill/>
+          </a:ln>
+        </p:spPr>
+        <p:style>
+          <a:lnRef idx="2">
+            <a:schemeClr val="accent1">
+              <a:shade val="50000"/>
+            </a:schemeClr>
+          </a:lnRef>
+          <a:fillRef idx="1">
+            <a:schemeClr val="accent1"/>
+          </a:fillRef>
+          <a:effectRef idx="0">
+            <a:schemeClr val="accent1"/>
+          </a:effectRef>
+          <a:fontRef idx="minor">
+            <a:schemeClr val="lt1"/>
+          </a:fontRef>
+        </p:style>
+        <p:txBody>
+          <a:bodyPr rtlCol="0" anchor="ctr"/>
+          <a:lstStyle/>
+          <a:p>
+            <a:pPr algn="ctr"/>
+            <a:endParaRPr lang="en-US"/>
+          </a:p>
+        </p:txBody>
+      </p:sp>
+      <p:sp>
+        <p:nvSpPr>
+          <p:cNvPr id="16" name="Rectangle 15">
+            <a:extLst>
+              <a:ext uri="{FF2B5EF4-FFF2-40B4-BE49-F238E27FC236}">
+                <a16:creationId xmlns:a16="http://schemas.microsoft.com/office/drawing/2014/main" id="{3783CA14-24A1-485C-8B30-D6A5D87987AD}"/>
+              </a:ext>
+              <a:ext uri="{C183D7F6-B498-43B3-948B-1728B52AA6E4}">
+                <adec:decorative xmlns:adec="http://schemas.microsoft.com/office/drawing/2017/decorative" val="1"/>
+              </a:ext>
+            </a:extLst>
+          </p:cNvPr>
+          <p:cNvSpPr>
+            <a:spLocks noGrp="1" noRot="1" noChangeAspect="1" noMove="1" noResize="1" noEditPoints="1" noAdjustHandles="1" noChangeArrowheads="1" noChangeShapeType="1" noTextEdit="1"/>
+          </p:cNvSpPr>
+          <p:nvPr>
+            <p:extLst>
+              <p:ext uri="{386F3935-93C4-4BCD-93E2-E3B085C9AB24}">
+                <p16:designElem xmlns:p16="http://schemas.microsoft.com/office/powerpoint/2015/main" val="1"/>
+              </p:ext>
+            </p:extLst>
+          </p:nvPr>
+        </p:nvSpPr>
+        <p:spPr>
+          <a:xfrm rot="18900000" flipH="1">
+            <a:off x="10043482" y="655140"/>
+            <a:ext cx="687472" cy="687472"/>
+          </a:xfrm>
+          <a:prstGeom prst="rect">
+            <a:avLst/>
+          </a:prstGeom>
+          <a:solidFill>
+            <a:schemeClr val="accent4">
+              <a:alpha val="30000"/>
+            </a:schemeClr>
+          </a:solidFill>
+          <a:ln>
+            <a:noFill/>
+          </a:ln>
+        </p:spPr>
+        <p:style>
+          <a:lnRef idx="2">
+            <a:schemeClr val="accent1">
+              <a:shade val="50000"/>
+            </a:schemeClr>
+          </a:lnRef>
+          <a:fillRef idx="1">
+            <a:schemeClr val="accent1"/>
+          </a:fillRef>
+          <a:effectRef idx="0">
+            <a:schemeClr val="accent1"/>
+          </a:effectRef>
+          <a:fontRef idx="minor">
+            <a:schemeClr val="lt1"/>
+          </a:fontRef>
+        </p:style>
+        <p:txBody>
+          <a:bodyPr rtlCol="0" anchor="ctr"/>
+          <a:lstStyle/>
+          <a:p>
+            <a:pPr algn="ctr"/>
+            <a:endParaRPr lang="en-US"/>
+          </a:p>
+        </p:txBody>
+      </p:sp>
+      <p:sp>
+        <p:nvSpPr>
+          <p:cNvPr id="18" name="Freeform: Shape 17">
+            <a:extLst>
+              <a:ext uri="{FF2B5EF4-FFF2-40B4-BE49-F238E27FC236}">
+                <a16:creationId xmlns:a16="http://schemas.microsoft.com/office/drawing/2014/main" id="{9A97C86A-04D6-40F7-AE84-31AB43E6A846}"/>
+              </a:ext>
+              <a:ext uri="{C183D7F6-B498-43B3-948B-1728B52AA6E4}">
+                <adec:decorative xmlns:adec="http://schemas.microsoft.com/office/drawing/2017/decorative" val="1"/>
+              </a:ext>
+            </a:extLst>
+          </p:cNvPr>
+          <p:cNvSpPr>
+            <a:spLocks noGrp="1" noRot="1" noChangeAspect="1" noMove="1" noResize="1" noEditPoints="1" noAdjustHandles="1" noChangeArrowheads="1" noChangeShapeType="1" noTextEdit="1"/>
+          </p:cNvSpPr>
+          <p:nvPr>
+            <p:extLst>
+              <p:ext uri="{386F3935-93C4-4BCD-93E2-E3B085C9AB24}">
+                <p16:designElem xmlns:p16="http://schemas.microsoft.com/office/powerpoint/2015/main" val="1"/>
+              </p:ext>
+            </p:extLst>
+          </p:nvPr>
+        </p:nvSpPr>
+        <p:spPr>
+          <a:xfrm rot="10800000" flipH="1">
+            <a:off x="9356643" y="0"/>
+            <a:ext cx="2835357" cy="1480837"/>
+          </a:xfrm>
+          <a:custGeom>
+            <a:avLst/>
+            <a:gdLst>
+              <a:gd name="connsiteX0" fmla="*/ 2835357 w 2835357"/>
+              <a:gd name="connsiteY0" fmla="*/ 1480837 h 1480837"/>
+              <a:gd name="connsiteX1" fmla="*/ 0 w 2835357"/>
+              <a:gd name="connsiteY1" fmla="*/ 1480837 h 1480837"/>
+              <a:gd name="connsiteX2" fmla="*/ 1552727 w 2835357"/>
+              <a:gd name="connsiteY2" fmla="*/ 0 h 1480837"/>
+              <a:gd name="connsiteX3" fmla="*/ 2835357 w 2835357"/>
+              <a:gd name="connsiteY3" fmla="*/ 1223245 h 1480837"/>
+            </a:gdLst>
+            <a:ahLst/>
+            <a:cxnLst>
+              <a:cxn ang="0">
+                <a:pos x="connsiteX0" y="connsiteY0"/>
+              </a:cxn>
+              <a:cxn ang="0">
+                <a:pos x="connsiteX1" y="connsiteY1"/>
+              </a:cxn>
+              <a:cxn ang="0">
+                <a:pos x="connsiteX2" y="connsiteY2"/>
+              </a:cxn>
+              <a:cxn ang="0">
+                <a:pos x="connsiteX3" y="connsiteY3"/>
+              </a:cxn>
+            </a:cxnLst>
+            <a:rect l="l" t="t" r="r" b="b"/>
+            <a:pathLst>
+              <a:path w="2835357" h="1480837">
+                <a:moveTo>
+                  <a:pt x="2835357" y="1480837"/>
+                </a:moveTo>
+                <a:lnTo>
+                  <a:pt x="0" y="1480837"/>
+                </a:lnTo>
+                <a:lnTo>
+                  <a:pt x="1552727" y="0"/>
+                </a:lnTo>
+                <a:lnTo>
+                  <a:pt x="2835357" y="1223245"/>
+                </a:lnTo>
+                <a:close/>
+              </a:path>
+            </a:pathLst>
+          </a:custGeom>
+          <a:solidFill>
+            <a:schemeClr val="accent4">
+              <a:alpha val="30000"/>
+            </a:schemeClr>
+          </a:solidFill>
+          <a:ln>
+            <a:noFill/>
+          </a:ln>
+        </p:spPr>
+        <p:style>
+          <a:lnRef idx="2">
+            <a:schemeClr val="accent1">
+              <a:shade val="50000"/>
+            </a:schemeClr>
+          </a:lnRef>
+          <a:fillRef idx="1">
+            <a:schemeClr val="accent1"/>
+          </a:fillRef>
+          <a:effectRef idx="0">
+            <a:schemeClr val="accent1"/>
+          </a:effectRef>
+          <a:fontRef idx="minor">
+            <a:schemeClr val="lt1"/>
+          </a:fontRef>
+        </p:style>
+        <p:txBody>
+          <a:bodyPr wrap="square" rtlCol="0" anchor="ctr">
+            <a:noAutofit/>
+          </a:bodyPr>
+          <a:lstStyle/>
+          <a:p>
+            <a:pPr algn="ctr"/>
+            <a:endParaRPr lang="en-US" dirty="0"/>
+          </a:p>
+        </p:txBody>
+      </p:sp>
+      <p:sp>
+        <p:nvSpPr>
+          <p:cNvPr id="20" name="Isosceles Triangle 19">
+            <a:extLst>
+              <a:ext uri="{FF2B5EF4-FFF2-40B4-BE49-F238E27FC236}">
+                <a16:creationId xmlns:a16="http://schemas.microsoft.com/office/drawing/2014/main" id="{FF9F2414-84E8-453E-B1F3-389FDE8192D9}"/>
+              </a:ext>
+              <a:ext uri="{C183D7F6-B498-43B3-948B-1728B52AA6E4}">
+                <adec:decorative xmlns:adec="http://schemas.microsoft.com/office/drawing/2017/decorative" val="1"/>
+              </a:ext>
+            </a:extLst>
+          </p:cNvPr>
+          <p:cNvSpPr>
+            <a:spLocks noGrp="1" noRot="1" noChangeAspect="1" noMove="1" noResize="1" noEditPoints="1" noAdjustHandles="1" noChangeArrowheads="1" noChangeShapeType="1" noTextEdit="1"/>
+          </p:cNvSpPr>
+          <p:nvPr>
+            <p:extLst>
+              <p:ext uri="{386F3935-93C4-4BCD-93E2-E3B085C9AB24}">
+                <p16:designElem xmlns:p16="http://schemas.microsoft.com/office/powerpoint/2015/main" val="1"/>
+              </p:ext>
+            </p:extLst>
+          </p:nvPr>
+        </p:nvSpPr>
+        <p:spPr>
+          <a:xfrm flipH="1">
+            <a:off x="7976344" y="6115501"/>
+            <a:ext cx="1494513" cy="742499"/>
+          </a:xfrm>
+          <a:prstGeom prst="triangle">
+            <a:avLst/>
+          </a:prstGeom>
+          <a:solidFill>
+            <a:schemeClr val="accent1">
+              <a:alpha val="30000"/>
+            </a:schemeClr>
+          </a:solidFill>
+          <a:ln>
+            <a:noFill/>
+          </a:ln>
+        </p:spPr>
+        <p:style>
+          <a:lnRef idx="2">
+            <a:schemeClr val="accent1">
+              <a:shade val="50000"/>
+            </a:schemeClr>
+          </a:lnRef>
+          <a:fillRef idx="1">
+            <a:schemeClr val="accent1"/>
+          </a:fillRef>
+          <a:effectRef idx="0">
+            <a:schemeClr val="accent1"/>
+          </a:effectRef>
+          <a:fontRef idx="minor">
+            <a:schemeClr val="lt1"/>
+          </a:fontRef>
+        </p:style>
+        <p:txBody>
+          <a:bodyPr rtlCol="0" anchor="ctr"/>
+          <a:lstStyle/>
+          <a:p>
+            <a:pPr algn="ctr"/>
+            <a:endParaRPr lang="en-US"/>
+          </a:p>
+        </p:txBody>
+      </p:sp>
+      <p:pic>
+        <p:nvPicPr>
+          <p:cNvPr id="5" name="Content Placeholder 4" descr="A graph with lines and numbers&#10;&#10;AI-generated content may be incorrect.">
+            <a:extLst>
+              <a:ext uri="{FF2B5EF4-FFF2-40B4-BE49-F238E27FC236}">
+                <a16:creationId xmlns:a16="http://schemas.microsoft.com/office/drawing/2014/main" id="{05DB589E-228D-E1AE-FF61-28938224950A}"/>
+              </a:ext>
+            </a:extLst>
+          </p:cNvPr>
+          <p:cNvPicPr>
+            <a:picLocks noGrp="1" noChangeAspect="1"/>
+          </p:cNvPicPr>
+          <p:nvPr>
+            <p:ph idx="1"/>
+          </p:nvPr>
+        </p:nvPicPr>
+        <p:blipFill>
+          <a:blip r:embed="rId2">
+            <a:extLst>
+              <a:ext uri="{28A0092B-C50C-407E-A947-70E740481C1C}">
+                <a14:useLocalDpi xmlns:a14="http://schemas.microsoft.com/office/drawing/2010/main" val="0"/>
+              </a:ext>
+            </a:extLst>
+          </a:blip>
+          <a:stretch>
+            <a:fillRect/>
+          </a:stretch>
+        </p:blipFill>
+        <p:spPr>
+          <a:xfrm>
+            <a:off x="570589" y="1538817"/>
+            <a:ext cx="11050822" cy="3674397"/>
+          </a:xfrm>
+          <a:prstGeom prst="rect">
+            <a:avLst/>
+          </a:prstGeom>
+          <a:ln>
+            <a:noFill/>
+          </a:ln>
+        </p:spPr>
+      </p:pic>
+      <p:sp>
+        <p:nvSpPr>
+          <p:cNvPr id="22" name="Isosceles Triangle 21">
+            <a:extLst>
+              <a:ext uri="{FF2B5EF4-FFF2-40B4-BE49-F238E27FC236}">
+                <a16:creationId xmlns:a16="http://schemas.microsoft.com/office/drawing/2014/main" id="{3ECA69A1-7536-43AC-85EF-C7106179F5ED}"/>
+              </a:ext>
+              <a:ext uri="{C183D7F6-B498-43B3-948B-1728B52AA6E4}">
+                <adec:decorative xmlns:adec="http://schemas.microsoft.com/office/drawing/2017/decorative" val="1"/>
+              </a:ext>
+            </a:extLst>
+          </p:cNvPr>
+          <p:cNvSpPr>
+            <a:spLocks noGrp="1" noRot="1" noChangeAspect="1" noMove="1" noResize="1" noEditPoints="1" noAdjustHandles="1" noChangeArrowheads="1" noChangeShapeType="1" noTextEdit="1"/>
+          </p:cNvSpPr>
+          <p:nvPr>
+            <p:extLst>
+              <p:ext uri="{386F3935-93C4-4BCD-93E2-E3B085C9AB24}">
+                <p16:designElem xmlns:p16="http://schemas.microsoft.com/office/powerpoint/2015/main" val="1"/>
+              </p:ext>
+            </p:extLst>
+          </p:nvPr>
+        </p:nvSpPr>
+        <p:spPr>
+          <a:xfrm flipH="1">
+            <a:off x="7604080" y="6453143"/>
+            <a:ext cx="814903" cy="404857"/>
+          </a:xfrm>
+          <a:prstGeom prst="triangle">
+            <a:avLst/>
+          </a:prstGeom>
+          <a:solidFill>
+            <a:schemeClr val="accent1">
+              <a:alpha val="30000"/>
+            </a:schemeClr>
+          </a:solidFill>
+          <a:ln>
+            <a:noFill/>
+          </a:ln>
+        </p:spPr>
+        <p:style>
+          <a:lnRef idx="2">
+            <a:schemeClr val="accent1">
+              <a:shade val="50000"/>
+            </a:schemeClr>
+          </a:lnRef>
+          <a:fillRef idx="1">
+            <a:schemeClr val="accent1"/>
+          </a:fillRef>
+          <a:effectRef idx="0">
+            <a:schemeClr val="accent1"/>
+          </a:effectRef>
+          <a:fontRef idx="minor">
+            <a:schemeClr val="lt1"/>
+          </a:fontRef>
+        </p:style>
+        <p:txBody>
+          <a:bodyPr rtlCol="0" anchor="ctr"/>
+          <a:lstStyle/>
+          <a:p>
+            <a:pPr algn="ctr"/>
+            <a:endParaRPr lang="en-US"/>
+          </a:p>
+        </p:txBody>
+      </p:sp>
+      <p:sp>
+        <p:nvSpPr>
+          <p:cNvPr id="6" name="TextBox 5">
+            <a:extLst>
+              <a:ext uri="{FF2B5EF4-FFF2-40B4-BE49-F238E27FC236}">
+                <a16:creationId xmlns:a16="http://schemas.microsoft.com/office/drawing/2014/main" id="{CC605CBA-A1BE-364B-09C1-7208BB6B2F77}"/>
+              </a:ext>
+            </a:extLst>
+          </p:cNvPr>
+          <p:cNvSpPr txBox="1"/>
+          <p:nvPr/>
+        </p:nvSpPr>
+        <p:spPr>
+          <a:xfrm>
+            <a:off x="1912717" y="5003674"/>
+            <a:ext cx="6094070" cy="369332"/>
+          </a:xfrm>
+          <a:prstGeom prst="rect">
+            <a:avLst/>
+          </a:prstGeom>
+          <a:noFill/>
+        </p:spPr>
+        <p:txBody>
+          <a:bodyPr wrap="square">
+            <a:spAutoFit/>
+          </a:bodyPr>
+          <a:lstStyle/>
+          <a:p>
+            <a:r>
+              <a:rPr lang="en-US" sz="1800" dirty="0"/>
+              <a:t>43127 times </a:t>
+            </a:r>
+            <a:endParaRPr lang="en-US" sz="1800" dirty="0">
+              <a:latin typeface="+mn-lt"/>
+            </a:endParaRPr>
+          </a:p>
+        </p:txBody>
+      </p:sp>
+      <p:sp>
+        <p:nvSpPr>
+          <p:cNvPr id="7" name="TextBox 6">
+            <a:extLst>
+              <a:ext uri="{FF2B5EF4-FFF2-40B4-BE49-F238E27FC236}">
+                <a16:creationId xmlns:a16="http://schemas.microsoft.com/office/drawing/2014/main" id="{FA9FCF84-E619-64D7-FE62-BAA2B5A4D869}"/>
+              </a:ext>
+            </a:extLst>
+          </p:cNvPr>
+          <p:cNvSpPr txBox="1"/>
+          <p:nvPr/>
+        </p:nvSpPr>
+        <p:spPr>
+          <a:xfrm>
+            <a:off x="5772889" y="5003674"/>
+            <a:ext cx="6094070" cy="369332"/>
+          </a:xfrm>
+          <a:prstGeom prst="rect">
+            <a:avLst/>
+          </a:prstGeom>
+          <a:noFill/>
+        </p:spPr>
+        <p:txBody>
+          <a:bodyPr wrap="square">
+            <a:spAutoFit/>
+          </a:bodyPr>
+          <a:lstStyle/>
+          <a:p>
+            <a:r>
+              <a:rPr lang="en-US" sz="1800" dirty="0"/>
+              <a:t>10219 times </a:t>
+            </a:r>
+            <a:endParaRPr lang="en-US" sz="1800" dirty="0">
+              <a:latin typeface="+mn-lt"/>
+            </a:endParaRPr>
+          </a:p>
+        </p:txBody>
+      </p:sp>
+      <p:sp>
+        <p:nvSpPr>
+          <p:cNvPr id="8" name="TextBox 7">
+            <a:extLst>
+              <a:ext uri="{FF2B5EF4-FFF2-40B4-BE49-F238E27FC236}">
+                <a16:creationId xmlns:a16="http://schemas.microsoft.com/office/drawing/2014/main" id="{8EF454AA-65B1-6F25-A9F5-8141919DFAB3}"/>
+              </a:ext>
+            </a:extLst>
+          </p:cNvPr>
+          <p:cNvSpPr txBox="1"/>
+          <p:nvPr/>
+        </p:nvSpPr>
+        <p:spPr>
+          <a:xfrm>
+            <a:off x="9544612" y="5003674"/>
+            <a:ext cx="6094070" cy="369332"/>
+          </a:xfrm>
+          <a:prstGeom prst="rect">
+            <a:avLst/>
+          </a:prstGeom>
+          <a:noFill/>
+        </p:spPr>
+        <p:txBody>
+          <a:bodyPr wrap="square">
+            <a:spAutoFit/>
+          </a:bodyPr>
+          <a:lstStyle/>
+          <a:p>
+            <a:r>
+              <a:rPr lang="en-US" sz="1800" dirty="0"/>
+              <a:t>8 times</a:t>
+            </a:r>
+            <a:endParaRPr lang="en-US" sz="1800" dirty="0">
+              <a:latin typeface="+mn-lt"/>
+            </a:endParaRPr>
+          </a:p>
+        </p:txBody>
+      </p:sp>
+    </p:spTree>
+    <p:extLst>
+      <p:ext uri="{BB962C8B-B14F-4D97-AF65-F5344CB8AC3E}">
+        <p14:creationId xmlns:p14="http://schemas.microsoft.com/office/powerpoint/2010/main" val="2624845931"/>
       </p:ext>
     </p:extLst>
   </p:cSld>
@@ -12095,7 +19391,7 @@
 <file path=ppt/theme/theme1.xml><?xml version="1.0" encoding="utf-8"?>
 <a:theme xmlns:a="http://schemas.openxmlformats.org/drawingml/2006/main" name="Office Theme">
   <a:themeElements>
-    <a:clrScheme name="Office">
+    <a:clrScheme name="Custom 3">
       <a:dk1>
         <a:sysClr val="windowText" lastClr="000000"/>
       </a:dk1>
@@ -12103,34 +19399,34 @@
         <a:sysClr val="window" lastClr="FFFFFF"/>
       </a:lt1>
       <a:dk2>
-        <a:srgbClr val="0E2841"/>
+        <a:srgbClr val="455F51"/>
       </a:dk2>
       <a:lt2>
-        <a:srgbClr val="E8E8E8"/>
+        <a:srgbClr val="E2DFCC"/>
       </a:lt2>
       <a:accent1>
-        <a:srgbClr val="156082"/>
+        <a:srgbClr val="94D1E2"/>
       </a:accent1>
       <a:accent2>
-        <a:srgbClr val="E97132"/>
+        <a:srgbClr val="94D1E2"/>
       </a:accent2>
       <a:accent3>
-        <a:srgbClr val="196B24"/>
+        <a:srgbClr val="37A76F"/>
       </a:accent3>
       <a:accent4>
-        <a:srgbClr val="0F9ED5"/>
+        <a:srgbClr val="63A537"/>
       </a:accent4>
       <a:accent5>
-        <a:srgbClr val="A02B93"/>
+        <a:srgbClr val="4EB3CF"/>
       </a:accent5>
       <a:accent6>
-        <a:srgbClr val="4EA72E"/>
+        <a:srgbClr val="00B050"/>
       </a:accent6>
       <a:hlink>
-        <a:srgbClr val="467886"/>
+        <a:srgbClr val="EE7B08"/>
       </a:hlink>
       <a:folHlink>
-        <a:srgbClr val="96607D"/>
+        <a:srgbClr val="977B2D"/>
       </a:folHlink>
     </a:clrScheme>
     <a:fontScheme name="Tw Cen MT">
@@ -12693,23 +19989,6 @@
 </file>
 
 <file path=customXml/item1.xml><?xml version="1.0" encoding="utf-8"?>
-<p:properties xmlns:p="http://schemas.microsoft.com/office/2006/metadata/properties" xmlns:xsi="http://www.w3.org/2001/XMLSchema-instance" xmlns:pc="http://schemas.microsoft.com/office/infopath/2007/PartnerControls">
-  <documentManagement>
-    <_activity xmlns="11c53111-f57e-45e2-a6ce-65cc5a06d54d" xsi:nil="true"/>
-  </documentManagement>
-</p:properties>
-</file>
-
-<file path=customXml/item2.xml><?xml version="1.0" encoding="utf-8"?>
-<?mso-contentType ?>
-<FormTemplates xmlns="http://schemas.microsoft.com/sharepoint/v3/contenttype/forms">
-  <Display>DocumentLibraryForm</Display>
-  <Edit>DocumentLibraryForm</Edit>
-  <New>DocumentLibraryForm</New>
-</FormTemplates>
-</file>
-
-<file path=customXml/item3.xml><?xml version="1.0" encoding="utf-8"?>
 <ct:contentTypeSchema xmlns:ct="http://schemas.microsoft.com/office/2006/metadata/contentType" xmlns:ma="http://schemas.microsoft.com/office/2006/metadata/properties/metaAttributes" ct:_="" ma:_="" ma:contentTypeName="Document" ma:contentTypeID="0x010100CFDC1CB67652CC49BBC4C0DC64701AFE" ma:contentTypeVersion="6" ma:contentTypeDescription="Create a new document." ma:contentTypeScope="" ma:versionID="47c51e3d8c3684639eba9edc36ee1317">
   <xsd:schema xmlns:xsd="http://www.w3.org/2001/XMLSchema" xmlns:xs="http://www.w3.org/2001/XMLSchema" xmlns:p="http://schemas.microsoft.com/office/2006/metadata/properties" xmlns:ns3="11c53111-f57e-45e2-a6ce-65cc5a06d54d" targetNamespace="http://schemas.microsoft.com/office/2006/metadata/properties" ma:root="true" ma:fieldsID="19a7e614ce1885078e28496a8f6e0502" ns3:_="">
     <xsd:import namespace="11c53111-f57e-45e2-a6ce-65cc5a06d54d"/>
@@ -12865,31 +20144,24 @@
 </ct:contentTypeSchema>
 </file>
 
-<file path=customXml/itemProps1.xml><?xml version="1.0" encoding="utf-8"?>
-<ds:datastoreItem xmlns:ds="http://schemas.openxmlformats.org/officeDocument/2006/customXml" ds:itemID="{6BFE50ED-0010-4EB0-A3EA-FAFD2BD62ECE}">
-  <ds:schemaRefs>
-    <ds:schemaRef ds:uri="http://purl.org/dc/elements/1.1/"/>
-    <ds:schemaRef ds:uri="http://purl.org/dc/terms/"/>
-    <ds:schemaRef ds:uri="http://www.w3.org/XML/1998/namespace"/>
-    <ds:schemaRef ds:uri="http://purl.org/dc/dcmitype/"/>
-    <ds:schemaRef ds:uri="http://schemas.openxmlformats.org/package/2006/metadata/core-properties"/>
-    <ds:schemaRef ds:uri="http://schemas.microsoft.com/office/2006/documentManagement/types"/>
-    <ds:schemaRef ds:uri="http://schemas.microsoft.com/office/infopath/2007/PartnerControls"/>
-    <ds:schemaRef ds:uri="11c53111-f57e-45e2-a6ce-65cc5a06d54d"/>
-    <ds:schemaRef ds:uri="http://schemas.microsoft.com/office/2006/metadata/properties"/>
-  </ds:schemaRefs>
-</ds:datastoreItem>
+<file path=customXml/item2.xml><?xml version="1.0" encoding="utf-8"?>
+<?mso-contentType ?>
+<FormTemplates xmlns="http://schemas.microsoft.com/sharepoint/v3/contenttype/forms">
+  <Display>DocumentLibraryForm</Display>
+  <Edit>DocumentLibraryForm</Edit>
+  <New>DocumentLibraryForm</New>
+</FormTemplates>
 </file>
 
-<file path=customXml/itemProps2.xml><?xml version="1.0" encoding="utf-8"?>
-<ds:datastoreItem xmlns:ds="http://schemas.openxmlformats.org/officeDocument/2006/customXml" ds:itemID="{9499CC31-CDEE-4A5D-B53D-0E2E90D6DE20}">
-  <ds:schemaRefs>
-    <ds:schemaRef ds:uri="http://schemas.microsoft.com/sharepoint/v3/contenttype/forms"/>
-  </ds:schemaRefs>
-</ds:datastoreItem>
+<file path=customXml/item3.xml><?xml version="1.0" encoding="utf-8"?>
+<p:properties xmlns:p="http://schemas.microsoft.com/office/2006/metadata/properties" xmlns:xsi="http://www.w3.org/2001/XMLSchema-instance" xmlns:pc="http://schemas.microsoft.com/office/infopath/2007/PartnerControls">
+  <documentManagement>
+    <_activity xmlns="11c53111-f57e-45e2-a6ce-65cc5a06d54d" xsi:nil="true"/>
+  </documentManagement>
+</p:properties>
 </file>
 
-<file path=customXml/itemProps3.xml><?xml version="1.0" encoding="utf-8"?>
+<file path=customXml/itemProps1.xml><?xml version="1.0" encoding="utf-8"?>
 <ds:datastoreItem xmlns:ds="http://schemas.openxmlformats.org/officeDocument/2006/customXml" ds:itemID="{D0C6FEA5-17B0-43BE-A4C3-60AD7FF98DF1}">
   <ds:schemaRefs>
     <ds:schemaRef ds:uri="http://schemas.microsoft.com/office/2006/metadata/contentType"/>
@@ -12905,4 +20177,28 @@
     <ds:schemaRef ds:uri="http://schemas.microsoft.com/internal/obd"/>
   </ds:schemaRefs>
 </ds:datastoreItem>
+</file>
+
+<file path=customXml/itemProps2.xml><?xml version="1.0" encoding="utf-8"?>
+<ds:datastoreItem xmlns:ds="http://schemas.openxmlformats.org/officeDocument/2006/customXml" ds:itemID="{9499CC31-CDEE-4A5D-B53D-0E2E90D6DE20}">
+  <ds:schemaRefs>
+    <ds:schemaRef ds:uri="http://schemas.microsoft.com/sharepoint/v3/contenttype/forms"/>
+  </ds:schemaRefs>
+</ds:datastoreItem>
+</file>
+
+<file path=customXml/itemProps3.xml><?xml version="1.0" encoding="utf-8"?>
+<ds:datastoreItem xmlns:ds="http://schemas.openxmlformats.org/officeDocument/2006/customXml" ds:itemID="{6BFE50ED-0010-4EB0-A3EA-FAFD2BD62ECE}">
+  <ds:schemaRefs>
+    <ds:schemaRef ds:uri="http://purl.org/dc/elements/1.1/"/>
+    <ds:schemaRef ds:uri="http://purl.org/dc/terms/"/>
+    <ds:schemaRef ds:uri="http://www.w3.org/XML/1998/namespace"/>
+    <ds:schemaRef ds:uri="http://purl.org/dc/dcmitype/"/>
+    <ds:schemaRef ds:uri="http://schemas.openxmlformats.org/package/2006/metadata/core-properties"/>
+    <ds:schemaRef ds:uri="http://schemas.microsoft.com/office/2006/documentManagement/types"/>
+    <ds:schemaRef ds:uri="http://schemas.microsoft.com/office/infopath/2007/PartnerControls"/>
+    <ds:schemaRef ds:uri="11c53111-f57e-45e2-a6ce-65cc5a06d54d"/>
+    <ds:schemaRef ds:uri="http://schemas.microsoft.com/office/2006/metadata/properties"/>
+  </ds:schemaRefs>
+</ds:datastoreItem>
 </file>